--- a/public/TM-Pick-n-Pay-Express.pptx
+++ b/public/TM-Pick-n-Pay-Express.pptx
@@ -5,7 +5,7 @@
     <p:sldMasterId id="2147483648" r:id="rId1"/>
   </p:sldMasterIdLst>
   <p:notesMasterIdLst>
-    <p:notesMasterId r:id="rId25"/>
+    <p:notesMasterId r:id="rId27"/>
   </p:notesMasterIdLst>
   <p:sldIdLst>
     <p:sldId id="256" r:id="rId2"/>
@@ -31,6 +31,8 @@
     <p:sldId id="276" r:id="rId22"/>
     <p:sldId id="277" r:id="rId23"/>
     <p:sldId id="278" r:id="rId24"/>
+    <p:sldId id="279" r:id="rId25"/>
+    <p:sldId id="280" r:id="rId26"/>
   </p:sldIdLst>
   <p:sldSz cx="9144000" cy="5143500"/>
   <p:notesSz cx="5143500" cy="9144000"/>
@@ -1868,6 +1870,182 @@
             <a:fld id="{F7021451-1387-4CA6-816F-3879F97B5CBC}" type="slidenum">
               <a:rPr lang="en-US"/>
               <a:t>23</a:t>
+            </a:fld>
+            <a:endParaRPr lang="en-US"/>
+          </a:p>
+        </p:txBody>
+      </p:sp>
+    </p:spTree>
+    <p:extLst>
+      <p:ext uri="{BB962C8B-B14F-4D97-AF65-F5344CB8AC3E}">
+        <p14:creationId xmlns:p14="http://schemas.microsoft.com/office/powerpoint/2010/main" val="1024086991"/>
+      </p:ext>
+    </p:extLst>
+  </p:cSld>
+  <p:clrMapOvr>
+    <a:masterClrMapping/>
+  </p:clrMapOvr>
+</p:notes>
+</file>
+
+<file path=ppt/notesSlides/notesSlide24.xml><?xml version="1.0" encoding="utf-8"?>
+<p:notes xmlns:a="http://schemas.openxmlformats.org/drawingml/2006/main" xmlns:r="http://schemas.openxmlformats.org/officeDocument/2006/relationships" xmlns:p="http://schemas.openxmlformats.org/presentationml/2006/main">
+  <p:cSld>
+    <p:spTree>
+      <p:nvGrpSpPr>
+        <p:cNvPr id="1" name=""/>
+        <p:cNvGrpSpPr/>
+        <p:nvPr/>
+      </p:nvGrpSpPr>
+      <p:grpSpPr>
+        <a:xfrm>
+          <a:off x="0" y="0"/>
+          <a:ext cx="0" cy="0"/>
+          <a:chOff x="0" y="0"/>
+          <a:chExt cx="0" cy="0"/>
+        </a:xfrm>
+      </p:grpSpPr>
+      <p:sp>
+        <p:nvSpPr>
+          <p:cNvPr id="2" name="Slide Image Placeholder 1"/>
+          <p:cNvSpPr>
+            <a:spLocks noGrp="1" noRot="1" noChangeAspect="1"/>
+          </p:cNvSpPr>
+          <p:nvPr>
+            <p:ph type="sldImg"/>
+          </p:nvPr>
+        </p:nvSpPr>
+        <p:spPr/>
+      </p:sp>
+      <p:sp>
+        <p:nvSpPr>
+          <p:cNvPr id="3" name="Notes Placeholder 2"/>
+          <p:cNvSpPr>
+            <a:spLocks noGrp="1"/>
+          </p:cNvSpPr>
+          <p:nvPr>
+            <p:ph type="body" idx="1"/>
+          </p:nvPr>
+        </p:nvSpPr>
+        <p:spPr/>
+        <p:txBody>
+          <a:bodyPr/>
+          <a:lstStyle/>
+          <a:p>
+            <a:r>
+              <a:rPr lang="en-US" dirty="0"/>
+              <a:t/>
+            </a:r>
+            <a:endParaRPr lang="en-US" dirty="0"/>
+          </a:p>
+        </p:txBody>
+      </p:sp>
+      <p:sp>
+        <p:nvSpPr>
+          <p:cNvPr id="4" name="Slide Number Placeholder 3"/>
+          <p:cNvSpPr>
+            <a:spLocks noGrp="1"/>
+          </p:cNvSpPr>
+          <p:nvPr>
+            <p:ph type="sldNum" sz="quarter" idx="10"/>
+          </p:nvPr>
+        </p:nvSpPr>
+        <p:spPr/>
+        <p:txBody>
+          <a:bodyPr/>
+          <a:lstStyle/>
+          <a:p>
+            <a:fld id="{F7021451-1387-4CA6-816F-3879F97B5CBC}" type="slidenum">
+              <a:rPr lang="en-US"/>
+              <a:t>24</a:t>
+            </a:fld>
+            <a:endParaRPr lang="en-US"/>
+          </a:p>
+        </p:txBody>
+      </p:sp>
+    </p:spTree>
+    <p:extLst>
+      <p:ext uri="{BB962C8B-B14F-4D97-AF65-F5344CB8AC3E}">
+        <p14:creationId xmlns:p14="http://schemas.microsoft.com/office/powerpoint/2010/main" val="1024086991"/>
+      </p:ext>
+    </p:extLst>
+  </p:cSld>
+  <p:clrMapOvr>
+    <a:masterClrMapping/>
+  </p:clrMapOvr>
+</p:notes>
+</file>
+
+<file path=ppt/notesSlides/notesSlide25.xml><?xml version="1.0" encoding="utf-8"?>
+<p:notes xmlns:a="http://schemas.openxmlformats.org/drawingml/2006/main" xmlns:r="http://schemas.openxmlformats.org/officeDocument/2006/relationships" xmlns:p="http://schemas.openxmlformats.org/presentationml/2006/main">
+  <p:cSld>
+    <p:spTree>
+      <p:nvGrpSpPr>
+        <p:cNvPr id="1" name=""/>
+        <p:cNvGrpSpPr/>
+        <p:nvPr/>
+      </p:nvGrpSpPr>
+      <p:grpSpPr>
+        <a:xfrm>
+          <a:off x="0" y="0"/>
+          <a:ext cx="0" cy="0"/>
+          <a:chOff x="0" y="0"/>
+          <a:chExt cx="0" cy="0"/>
+        </a:xfrm>
+      </p:grpSpPr>
+      <p:sp>
+        <p:nvSpPr>
+          <p:cNvPr id="2" name="Slide Image Placeholder 1"/>
+          <p:cNvSpPr>
+            <a:spLocks noGrp="1" noRot="1" noChangeAspect="1"/>
+          </p:cNvSpPr>
+          <p:nvPr>
+            <p:ph type="sldImg"/>
+          </p:nvPr>
+        </p:nvSpPr>
+        <p:spPr/>
+      </p:sp>
+      <p:sp>
+        <p:nvSpPr>
+          <p:cNvPr id="3" name="Notes Placeholder 2"/>
+          <p:cNvSpPr>
+            <a:spLocks noGrp="1"/>
+          </p:cNvSpPr>
+          <p:nvPr>
+            <p:ph type="body" idx="1"/>
+          </p:nvPr>
+        </p:nvSpPr>
+        <p:spPr/>
+        <p:txBody>
+          <a:bodyPr/>
+          <a:lstStyle/>
+          <a:p>
+            <a:r>
+              <a:rPr lang="en-US" dirty="0"/>
+              <a:t/>
+            </a:r>
+            <a:endParaRPr lang="en-US" dirty="0"/>
+          </a:p>
+        </p:txBody>
+      </p:sp>
+      <p:sp>
+        <p:nvSpPr>
+          <p:cNvPr id="4" name="Slide Number Placeholder 3"/>
+          <p:cNvSpPr>
+            <a:spLocks noGrp="1"/>
+          </p:cNvSpPr>
+          <p:nvPr>
+            <p:ph type="sldNum" sz="quarter" idx="10"/>
+          </p:nvPr>
+        </p:nvSpPr>
+        <p:spPr/>
+        <p:txBody>
+          <a:bodyPr/>
+          <a:lstStyle/>
+          <a:p>
+            <a:fld id="{F7021451-1387-4CA6-816F-3879F97B5CBC}" type="slidenum">
+              <a:rPr lang="en-US"/>
+              <a:t>25</a:t>
             </a:fld>
             <a:endParaRPr lang="en-US"/>
           </a:p>
@@ -3491,7 +3669,7 @@
         </p:nvSpPr>
         <p:spPr>
           <a:xfrm>
-            <a:off x="640080" y="2194560"/>
+            <a:off x="640080" y="2148840"/>
             <a:ext cx="411480" cy="54864"/>
           </a:xfrm>
           <a:prstGeom prst="roundRect">
@@ -3518,7 +3696,7 @@
         </p:nvSpPr>
         <p:spPr>
           <a:xfrm>
-            <a:off x="640080" y="2350008"/>
+            <a:off x="640080" y="2295144"/>
             <a:ext cx="2194560" cy="530352"/>
           </a:xfrm>
           <a:prstGeom prst="rect">
@@ -3557,8 +3735,8 @@
         </p:nvSpPr>
         <p:spPr>
           <a:xfrm>
-            <a:off x="640080" y="2926080"/>
-            <a:ext cx="2194560" cy="1188720"/>
+            <a:off x="640080" y="2862072"/>
+            <a:ext cx="2194560" cy="1316736"/>
           </a:xfrm>
           <a:prstGeom prst="rect">
             <a:avLst/>
@@ -3623,7 +3801,7 @@
         </p:nvSpPr>
         <p:spPr>
           <a:xfrm>
-            <a:off x="3474720" y="2194560"/>
+            <a:off x="3474720" y="2148840"/>
             <a:ext cx="411480" cy="54864"/>
           </a:xfrm>
           <a:prstGeom prst="roundRect">
@@ -3650,7 +3828,7 @@
         </p:nvSpPr>
         <p:spPr>
           <a:xfrm>
-            <a:off x="3474720" y="2350008"/>
+            <a:off x="3474720" y="2295144"/>
             <a:ext cx="2194560" cy="530352"/>
           </a:xfrm>
           <a:prstGeom prst="rect">
@@ -3689,8 +3867,8 @@
         </p:nvSpPr>
         <p:spPr>
           <a:xfrm>
-            <a:off x="3474720" y="2926080"/>
-            <a:ext cx="2194560" cy="1188720"/>
+            <a:off x="3474720" y="2862072"/>
+            <a:ext cx="2194560" cy="1316736"/>
           </a:xfrm>
           <a:prstGeom prst="rect">
             <a:avLst/>
@@ -3755,7 +3933,7 @@
         </p:nvSpPr>
         <p:spPr>
           <a:xfrm>
-            <a:off x="6309360" y="2194560"/>
+            <a:off x="6309360" y="2148840"/>
             <a:ext cx="411480" cy="54864"/>
           </a:xfrm>
           <a:prstGeom prst="roundRect">
@@ -3782,7 +3960,7 @@
         </p:nvSpPr>
         <p:spPr>
           <a:xfrm>
-            <a:off x="6309360" y="2350008"/>
+            <a:off x="6309360" y="2295144"/>
             <a:ext cx="2194560" cy="530352"/>
           </a:xfrm>
           <a:prstGeom prst="rect">
@@ -3821,8 +3999,8 @@
         </p:nvSpPr>
         <p:spPr>
           <a:xfrm>
-            <a:off x="6309360" y="2926080"/>
-            <a:ext cx="2194560" cy="1188720"/>
+            <a:off x="6309360" y="2862072"/>
+            <a:ext cx="2194560" cy="1316736"/>
           </a:xfrm>
           <a:prstGeom prst="rect">
             <a:avLst/>
@@ -7753,7 +7931,7 @@
         </p:nvSpPr>
         <p:spPr>
           <a:xfrm>
-            <a:off x="640080" y="1920240"/>
+            <a:off x="640080" y="1874520"/>
             <a:ext cx="411480" cy="54864"/>
           </a:xfrm>
           <a:prstGeom prst="roundRect">
@@ -7780,7 +7958,7 @@
         </p:nvSpPr>
         <p:spPr>
           <a:xfrm>
-            <a:off x="640080" y="2075688"/>
+            <a:off x="640080" y="2020824"/>
             <a:ext cx="3584448" cy="530352"/>
           </a:xfrm>
           <a:prstGeom prst="rect">
@@ -7819,8 +7997,8 @@
         </p:nvSpPr>
         <p:spPr>
           <a:xfrm>
-            <a:off x="640080" y="2651760"/>
-            <a:ext cx="3584448" cy="-73152"/>
+            <a:off x="640080" y="2587752"/>
+            <a:ext cx="3584448" cy="54864"/>
           </a:xfrm>
           <a:prstGeom prst="rect">
             <a:avLst/>
@@ -7885,7 +8063,7 @@
         </p:nvSpPr>
         <p:spPr>
           <a:xfrm>
-            <a:off x="4919472" y="1920240"/>
+            <a:off x="4919472" y="1874520"/>
             <a:ext cx="411480" cy="54864"/>
           </a:xfrm>
           <a:prstGeom prst="roundRect">
@@ -7912,7 +8090,7 @@
         </p:nvSpPr>
         <p:spPr>
           <a:xfrm>
-            <a:off x="4919472" y="2075688"/>
+            <a:off x="4919472" y="2020824"/>
             <a:ext cx="3584448" cy="530352"/>
           </a:xfrm>
           <a:prstGeom prst="rect">
@@ -7951,8 +8129,8 @@
         </p:nvSpPr>
         <p:spPr>
           <a:xfrm>
-            <a:off x="4919472" y="2651760"/>
-            <a:ext cx="3584448" cy="-73152"/>
+            <a:off x="4919472" y="2587752"/>
+            <a:ext cx="3584448" cy="54864"/>
           </a:xfrm>
           <a:prstGeom prst="rect">
             <a:avLst/>
@@ -8017,7 +8195,7 @@
         </p:nvSpPr>
         <p:spPr>
           <a:xfrm>
-            <a:off x="640080" y="3154680"/>
+            <a:off x="640080" y="3108960"/>
             <a:ext cx="411480" cy="54864"/>
           </a:xfrm>
           <a:prstGeom prst="roundRect">
@@ -8044,7 +8222,7 @@
         </p:nvSpPr>
         <p:spPr>
           <a:xfrm>
-            <a:off x="640080" y="3310128"/>
+            <a:off x="640080" y="3255264"/>
             <a:ext cx="3584448" cy="530352"/>
           </a:xfrm>
           <a:prstGeom prst="rect">
@@ -8083,8 +8261,8 @@
         </p:nvSpPr>
         <p:spPr>
           <a:xfrm>
-            <a:off x="640080" y="3886200"/>
-            <a:ext cx="3584448" cy="-73152"/>
+            <a:off x="640080" y="3822192"/>
+            <a:ext cx="3584448" cy="54864"/>
           </a:xfrm>
           <a:prstGeom prst="rect">
             <a:avLst/>
@@ -8149,7 +8327,7 @@
         </p:nvSpPr>
         <p:spPr>
           <a:xfrm>
-            <a:off x="4919472" y="3154680"/>
+            <a:off x="4919472" y="3108960"/>
             <a:ext cx="411480" cy="54864"/>
           </a:xfrm>
           <a:prstGeom prst="roundRect">
@@ -8176,7 +8354,7 @@
         </p:nvSpPr>
         <p:spPr>
           <a:xfrm>
-            <a:off x="4919472" y="3310128"/>
+            <a:off x="4919472" y="3255264"/>
             <a:ext cx="3584448" cy="530352"/>
           </a:xfrm>
           <a:prstGeom prst="rect">
@@ -8215,8 +8393,8 @@
         </p:nvSpPr>
         <p:spPr>
           <a:xfrm>
-            <a:off x="4919472" y="3886200"/>
-            <a:ext cx="3584448" cy="-73152"/>
+            <a:off x="4919472" y="3822192"/>
+            <a:ext cx="3584448" cy="54864"/>
           </a:xfrm>
           <a:prstGeom prst="rect">
             <a:avLst/>
@@ -10190,7 +10368,7 @@
         </p:nvSpPr>
         <p:spPr>
           <a:xfrm>
-            <a:off x="5394960" y="1920240"/>
+            <a:off x="5394960" y="1874520"/>
             <a:ext cx="411480" cy="54864"/>
           </a:xfrm>
           <a:prstGeom prst="roundRect">
@@ -10217,7 +10395,7 @@
         </p:nvSpPr>
         <p:spPr>
           <a:xfrm>
-            <a:off x="5394960" y="2075688"/>
+            <a:off x="5394960" y="2020824"/>
             <a:ext cx="3108960" cy="530352"/>
           </a:xfrm>
           <a:prstGeom prst="rect">
@@ -10256,8 +10434,8 @@
         </p:nvSpPr>
         <p:spPr>
           <a:xfrm>
-            <a:off x="5394960" y="2651760"/>
-            <a:ext cx="3108960" cy="228600"/>
+            <a:off x="5394960" y="2587752"/>
+            <a:ext cx="3108960" cy="356616"/>
           </a:xfrm>
           <a:prstGeom prst="rect">
             <a:avLst/>
@@ -10322,7 +10500,7 @@
         </p:nvSpPr>
         <p:spPr>
           <a:xfrm>
-            <a:off x="5394960" y="3474720"/>
+            <a:off x="5394960" y="3429000"/>
             <a:ext cx="411480" cy="54864"/>
           </a:xfrm>
           <a:prstGeom prst="roundRect">
@@ -10349,7 +10527,7 @@
         </p:nvSpPr>
         <p:spPr>
           <a:xfrm>
-            <a:off x="5394960" y="3630168"/>
+            <a:off x="5394960" y="3575304"/>
             <a:ext cx="3108960" cy="530352"/>
           </a:xfrm>
           <a:prstGeom prst="rect">
@@ -10388,8 +10566,8 @@
         </p:nvSpPr>
         <p:spPr>
           <a:xfrm>
-            <a:off x="5394960" y="4206240"/>
-            <a:ext cx="3108960" cy="228600"/>
+            <a:off x="5394960" y="4142232"/>
+            <a:ext cx="3108960" cy="356616"/>
           </a:xfrm>
           <a:prstGeom prst="rect">
             <a:avLst/>
@@ -11380,6 +11558,1533 @@
     <p:bg>
       <p:bgPr>
         <a:solidFill>
+          <a:srgbClr val="F7F7F9"/>
+        </a:solidFill>
+      </p:bgPr>
+    </p:bg>
+    <p:spTree>
+      <p:nvGrpSpPr>
+        <p:cNvPr id="1" name=""/>
+        <p:cNvGrpSpPr/>
+        <p:nvPr/>
+      </p:nvGrpSpPr>
+      <p:grpSpPr>
+        <a:xfrm>
+          <a:off x="0" y="0"/>
+          <a:ext cx="0" cy="0"/>
+          <a:chOff x="0" y="0"/>
+          <a:chExt cx="0" cy="0"/>
+        </a:xfrm>
+      </p:grpSpPr>
+      <p:sp>
+        <p:nvSpPr>
+          <p:cNvPr id="2" name="Shape 0"/>
+          <p:cNvSpPr/>
+          <p:nvPr/>
+        </p:nvSpPr>
+        <p:spPr>
+          <a:xfrm>
+            <a:off x="411480" y="274320"/>
+            <a:ext cx="1371600" cy="365760"/>
+          </a:xfrm>
+          <a:prstGeom prst="roundRect">
+            <a:avLst>
+              <a:gd name="adj" fmla="val 15000"/>
+            </a:avLst>
+          </a:prstGeom>
+          <a:solidFill>
+            <a:srgbClr val="FFFFFF"/>
+          </a:solidFill>
+          <a:ln w="12700">
+            <a:solidFill>
+              <a:srgbClr val="FFFFFF"/>
+            </a:solidFill>
+            <a:prstDash val="solid"/>
+          </a:ln>
+        </p:spPr>
+      </p:sp>
+      <p:pic>
+        <p:nvPicPr>
+          <p:cNvPr id="3" name="Image 0" descr="preencoded.png">    </p:cNvPr>
+          <p:cNvPicPr>
+            <a:picLocks noChangeAspect="1"/>
+          </p:cNvPicPr>
+          <p:nvPr/>
+        </p:nvPicPr>
+        <p:blipFill>
+          <a:blip r:embed="rId1"/>
+          <a:stretch>
+            <a:fillRect/>
+          </a:stretch>
+        </p:blipFill>
+        <p:spPr>
+          <a:xfrm>
+            <a:off x="484632" y="338328"/>
+            <a:ext cx="1225296" cy="237744"/>
+          </a:xfrm>
+          <a:prstGeom prst="rect">
+            <a:avLst/>
+          </a:prstGeom>
+        </p:spPr>
+      </p:pic>
+      <p:sp>
+        <p:nvSpPr>
+          <p:cNvPr id="4" name="Text 1"/>
+          <p:cNvSpPr/>
+          <p:nvPr/>
+        </p:nvSpPr>
+        <p:spPr>
+          <a:xfrm>
+            <a:off x="1920240" y="301752"/>
+            <a:ext cx="6263640" cy="320040"/>
+          </a:xfrm>
+          <a:prstGeom prst="rect">
+            <a:avLst/>
+          </a:prstGeom>
+          <a:noFill/>
+          <a:ln/>
+        </p:spPr>
+        <p:txBody>
+          <a:bodyPr wrap="square" rtlCol="0" anchor="ctr"/>
+          <a:lstStyle/>
+          <a:p>
+            <a:pPr indent="0" marL="0">
+              <a:buNone/>
+            </a:pPr>
+            <a:r>
+              <a:rPr lang="en-US" sz="1100" b="1" spc="200" kern="0" dirty="0">
+                <a:solidFill>
+                  <a:srgbClr val="D0103A"/>
+                </a:solidFill>
+                <a:latin typeface="Calibri" pitchFamily="34" charset="0"/>
+                <a:ea typeface="Calibri" pitchFamily="34" charset="-122"/>
+                <a:cs typeface="Calibri" pitchFamily="34" charset="-120"/>
+              </a:rPr>
+              <a:t>SLIDE 18 · CONSOLIDATED REVENUE MODEL</a:t>
+            </a:r>
+            <a:endParaRPr lang="en-US" sz="1100" dirty="0"/>
+          </a:p>
+        </p:txBody>
+      </p:sp>
+      <p:sp>
+        <p:nvSpPr>
+          <p:cNvPr id="5" name="Text 2"/>
+          <p:cNvSpPr/>
+          <p:nvPr/>
+        </p:nvSpPr>
+        <p:spPr>
+          <a:xfrm>
+            <a:off x="8229600" y="301752"/>
+            <a:ext cx="502920" cy="320040"/>
+          </a:xfrm>
+          <a:prstGeom prst="rect">
+            <a:avLst/>
+          </a:prstGeom>
+          <a:noFill/>
+          <a:ln/>
+        </p:spPr>
+        <p:txBody>
+          <a:bodyPr wrap="square" rtlCol="0" anchor="ctr"/>
+          <a:lstStyle/>
+          <a:p>
+            <a:pPr algn="r" indent="0" marL="0">
+              <a:buNone/>
+            </a:pPr>
+            <a:r>
+              <a:rPr lang="en-US" sz="1100" b="1" dirty="0">
+                <a:solidFill>
+                  <a:srgbClr val="5C6779"/>
+                </a:solidFill>
+                <a:latin typeface="Calibri" pitchFamily="34" charset="0"/>
+                <a:ea typeface="Calibri" pitchFamily="34" charset="-122"/>
+                <a:cs typeface="Calibri" pitchFamily="34" charset="-120"/>
+              </a:rPr>
+              <a:t>19</a:t>
+            </a:r>
+            <a:endParaRPr lang="en-US" sz="1100" dirty="0"/>
+          </a:p>
+        </p:txBody>
+      </p:sp>
+      <p:sp>
+        <p:nvSpPr>
+          <p:cNvPr id="6" name="Text 3"/>
+          <p:cNvSpPr/>
+          <p:nvPr/>
+        </p:nvSpPr>
+        <p:spPr>
+          <a:xfrm>
+            <a:off x="411480" y="4686300"/>
+            <a:ext cx="4572000" cy="274320"/>
+          </a:xfrm>
+          <a:prstGeom prst="rect">
+            <a:avLst/>
+          </a:prstGeom>
+          <a:noFill/>
+          <a:ln/>
+        </p:spPr>
+        <p:txBody>
+          <a:bodyPr wrap="square" rtlCol="0" anchor="ctr"/>
+          <a:lstStyle/>
+          <a:p>
+            <a:pPr indent="0" marL="0">
+              <a:buNone/>
+            </a:pPr>
+            <a:r>
+              <a:rPr lang="en-US" sz="900" dirty="0">
+                <a:solidFill>
+                  <a:srgbClr val="5C6779"/>
+                </a:solidFill>
+                <a:latin typeface="Calibri" pitchFamily="34" charset="0"/>
+                <a:ea typeface="Calibri" pitchFamily="34" charset="-122"/>
+                <a:cs typeface="Calibri" pitchFamily="34" charset="-120"/>
+              </a:rPr>
+              <a:t>TM Pick n Pay Express — Diaspora-to-Door</a:t>
+            </a:r>
+            <a:endParaRPr lang="en-US" sz="900" dirty="0"/>
+          </a:p>
+        </p:txBody>
+      </p:sp>
+      <p:sp>
+        <p:nvSpPr>
+          <p:cNvPr id="7" name="Text 4"/>
+          <p:cNvSpPr/>
+          <p:nvPr/>
+        </p:nvSpPr>
+        <p:spPr>
+          <a:xfrm>
+            <a:off x="4160520" y="4686300"/>
+            <a:ext cx="4572000" cy="274320"/>
+          </a:xfrm>
+          <a:prstGeom prst="rect">
+            <a:avLst/>
+          </a:prstGeom>
+          <a:noFill/>
+          <a:ln/>
+        </p:spPr>
+        <p:txBody>
+          <a:bodyPr wrap="square" rtlCol="0" anchor="ctr"/>
+          <a:lstStyle/>
+          <a:p>
+            <a:pPr algn="r" indent="0" marL="0">
+              <a:buNone/>
+            </a:pPr>
+            <a:r>
+              <a:rPr lang="en-US" sz="900" dirty="0">
+                <a:solidFill>
+                  <a:srgbClr val="5C6779"/>
+                </a:solidFill>
+                <a:latin typeface="Calibri" pitchFamily="34" charset="0"/>
+                <a:ea typeface="Calibri" pitchFamily="34" charset="-122"/>
+                <a:cs typeface="Calibri" pitchFamily="34" charset="-120"/>
+              </a:rPr>
+              <a:t>Confidential · Executive Board Proposal</a:t>
+            </a:r>
+            <a:endParaRPr lang="en-US" sz="900" dirty="0"/>
+          </a:p>
+        </p:txBody>
+      </p:sp>
+      <p:sp>
+        <p:nvSpPr>
+          <p:cNvPr id="8" name="Text 5"/>
+          <p:cNvSpPr/>
+          <p:nvPr/>
+        </p:nvSpPr>
+        <p:spPr>
+          <a:xfrm>
+            <a:off x="411480" y="868680"/>
+            <a:ext cx="8321040" cy="731520"/>
+          </a:xfrm>
+          <a:prstGeom prst="rect">
+            <a:avLst/>
+          </a:prstGeom>
+          <a:noFill/>
+          <a:ln/>
+        </p:spPr>
+        <p:txBody>
+          <a:bodyPr wrap="square" rtlCol="0" anchor="ctr"/>
+          <a:lstStyle/>
+          <a:p>
+            <a:pPr indent="0" marL="0">
+              <a:buNone/>
+            </a:pPr>
+            <a:r>
+              <a:rPr lang="en-US" sz="3000" b="1" dirty="0">
+                <a:solidFill>
+                  <a:srgbClr val="1B3A6B"/>
+                </a:solidFill>
+                <a:latin typeface="Georgia" pitchFamily="34" charset="0"/>
+                <a:ea typeface="Georgia" pitchFamily="34" charset="-122"/>
+                <a:cs typeface="Georgia" pitchFamily="34" charset="-120"/>
+              </a:rPr>
+              <a:t>One revenue model: the launch stack plus a recurring layer</a:t>
+            </a:r>
+            <a:endParaRPr lang="en-US" sz="3000" dirty="0"/>
+          </a:p>
+        </p:txBody>
+      </p:sp>
+      <p:sp>
+        <p:nvSpPr>
+          <p:cNvPr id="9" name="Shape 6"/>
+          <p:cNvSpPr/>
+          <p:nvPr/>
+        </p:nvSpPr>
+        <p:spPr>
+          <a:xfrm>
+            <a:off x="411480" y="1645920"/>
+            <a:ext cx="4846320" cy="2971800"/>
+          </a:xfrm>
+          <a:prstGeom prst="roundRect">
+            <a:avLst>
+              <a:gd name="adj" fmla="val 2462"/>
+            </a:avLst>
+          </a:prstGeom>
+          <a:solidFill>
+            <a:srgbClr val="FFFFFF"/>
+          </a:solidFill>
+          <a:ln w="12700">
+            <a:solidFill>
+              <a:srgbClr val="E2E5EB"/>
+            </a:solidFill>
+            <a:prstDash val="solid"/>
+          </a:ln>
+        </p:spPr>
+      </p:sp>
+      <p:sp>
+        <p:nvSpPr>
+          <p:cNvPr id="10" name="Text 7"/>
+          <p:cNvSpPr/>
+          <p:nvPr/>
+        </p:nvSpPr>
+        <p:spPr>
+          <a:xfrm>
+            <a:off x="640080" y="1783080"/>
+            <a:ext cx="4389120" cy="256032"/>
+          </a:xfrm>
+          <a:prstGeom prst="rect">
+            <a:avLst/>
+          </a:prstGeom>
+          <a:noFill/>
+          <a:ln/>
+        </p:spPr>
+        <p:txBody>
+          <a:bodyPr wrap="square" lIns="0" tIns="0" rIns="0" bIns="0" rtlCol="0" anchor="ctr"/>
+          <a:lstStyle/>
+          <a:p>
+            <a:pPr indent="0" marL="0">
+              <a:buNone/>
+            </a:pPr>
+            <a:r>
+              <a:rPr lang="en-US" sz="1000" b="1" spc="200" kern="0" dirty="0">
+                <a:solidFill>
+                  <a:srgbClr val="D0103A"/>
+                </a:solidFill>
+                <a:latin typeface="Calibri" pitchFamily="34" charset="0"/>
+                <a:ea typeface="Calibri" pitchFamily="34" charset="-122"/>
+                <a:cs typeface="Calibri" pitchFamily="34" charset="-120"/>
+              </a:rPr>
+              <a:t>PHASE 1 · MODELLED TODAY</a:t>
+            </a:r>
+            <a:endParaRPr lang="en-US" sz="1000" dirty="0"/>
+          </a:p>
+        </p:txBody>
+      </p:sp>
+      <p:sp>
+        <p:nvSpPr>
+          <p:cNvPr id="11" name="Text 8"/>
+          <p:cNvSpPr/>
+          <p:nvPr/>
+        </p:nvSpPr>
+        <p:spPr>
+          <a:xfrm>
+            <a:off x="640080" y="2103120"/>
+            <a:ext cx="2834640" cy="201168"/>
+          </a:xfrm>
+          <a:prstGeom prst="rect">
+            <a:avLst/>
+          </a:prstGeom>
+          <a:noFill/>
+          <a:ln/>
+        </p:spPr>
+        <p:txBody>
+          <a:bodyPr wrap="square" lIns="0" tIns="0" rIns="0" bIns="0" rtlCol="0" anchor="ctr"/>
+          <a:lstStyle/>
+          <a:p>
+            <a:pPr indent="0" marL="0">
+              <a:buNone/>
+            </a:pPr>
+            <a:r>
+              <a:rPr lang="en-US" sz="1100" b="1" dirty="0">
+                <a:solidFill>
+                  <a:srgbClr val="16233A"/>
+                </a:solidFill>
+                <a:latin typeface="Calibri" pitchFamily="34" charset="0"/>
+                <a:ea typeface="Calibri" pitchFamily="34" charset="-122"/>
+                <a:cs typeface="Calibri" pitchFamily="34" charset="-120"/>
+              </a:rPr>
+              <a:t>Retail product margins</a:t>
+            </a:r>
+            <a:endParaRPr lang="en-US" sz="1100" dirty="0"/>
+          </a:p>
+        </p:txBody>
+      </p:sp>
+      <p:sp>
+        <p:nvSpPr>
+          <p:cNvPr id="12" name="Text 9"/>
+          <p:cNvSpPr/>
+          <p:nvPr/>
+        </p:nvSpPr>
+        <p:spPr>
+          <a:xfrm>
+            <a:off x="640080" y="2286000"/>
+            <a:ext cx="3108960" cy="182880"/>
+          </a:xfrm>
+          <a:prstGeom prst="rect">
+            <a:avLst/>
+          </a:prstGeom>
+          <a:noFill/>
+          <a:ln/>
+        </p:spPr>
+        <p:txBody>
+          <a:bodyPr wrap="square" lIns="0" tIns="0" rIns="0" bIns="0" rtlCol="0" anchor="ctr"/>
+          <a:lstStyle/>
+          <a:p>
+            <a:pPr indent="0" marL="0">
+              <a:buNone/>
+            </a:pPr>
+            <a:r>
+              <a:rPr lang="en-US" sz="850" dirty="0">
+                <a:solidFill>
+                  <a:srgbClr val="5C6779"/>
+                </a:solidFill>
+                <a:latin typeface="Calibri" pitchFamily="34" charset="0"/>
+                <a:ea typeface="Calibri" pitchFamily="34" charset="-122"/>
+                <a:cs typeface="Calibri" pitchFamily="34" charset="-120"/>
+              </a:rPr>
+              <a:t>21% margin on migrated basket · Transactional</a:t>
+            </a:r>
+            <a:endParaRPr lang="en-US" sz="850" dirty="0"/>
+          </a:p>
+        </p:txBody>
+      </p:sp>
+      <p:sp>
+        <p:nvSpPr>
+          <p:cNvPr id="13" name="Text 10"/>
+          <p:cNvSpPr/>
+          <p:nvPr/>
+        </p:nvSpPr>
+        <p:spPr>
+          <a:xfrm>
+            <a:off x="3749040" y="2121408"/>
+            <a:ext cx="1280160" cy="219456"/>
+          </a:xfrm>
+          <a:prstGeom prst="rect">
+            <a:avLst/>
+          </a:prstGeom>
+          <a:noFill/>
+          <a:ln/>
+        </p:spPr>
+        <p:txBody>
+          <a:bodyPr wrap="square" lIns="0" tIns="0" rIns="0" bIns="0" rtlCol="0" anchor="ctr"/>
+          <a:lstStyle/>
+          <a:p>
+            <a:pPr algn="r" indent="0" marL="0">
+              <a:buNone/>
+            </a:pPr>
+            <a:r>
+              <a:rPr lang="en-US" sz="1100" b="1" dirty="0">
+                <a:solidFill>
+                  <a:srgbClr val="1B3A6B"/>
+                </a:solidFill>
+                <a:latin typeface="Calibri" pitchFamily="34" charset="0"/>
+                <a:ea typeface="Calibri" pitchFamily="34" charset="-122"/>
+                <a:cs typeface="Calibri" pitchFamily="34" charset="-120"/>
+              </a:rPr>
+              <a:t>US$12,852,000</a:t>
+            </a:r>
+            <a:endParaRPr lang="en-US" sz="1100" dirty="0"/>
+          </a:p>
+        </p:txBody>
+      </p:sp>
+      <p:sp>
+        <p:nvSpPr>
+          <p:cNvPr id="14" name="Text 11"/>
+          <p:cNvSpPr/>
+          <p:nvPr/>
+        </p:nvSpPr>
+        <p:spPr>
+          <a:xfrm>
+            <a:off x="640080" y="2505456"/>
+            <a:ext cx="2834640" cy="201168"/>
+          </a:xfrm>
+          <a:prstGeom prst="rect">
+            <a:avLst/>
+          </a:prstGeom>
+          <a:noFill/>
+          <a:ln/>
+        </p:spPr>
+        <p:txBody>
+          <a:bodyPr wrap="square" lIns="0" tIns="0" rIns="0" bIns="0" rtlCol="0" anchor="ctr"/>
+          <a:lstStyle/>
+          <a:p>
+            <a:pPr indent="0" marL="0">
+              <a:buNone/>
+            </a:pPr>
+            <a:r>
+              <a:rPr lang="en-US" sz="1100" b="1" dirty="0">
+                <a:solidFill>
+                  <a:srgbClr val="16233A"/>
+                </a:solidFill>
+                <a:latin typeface="Calibri" pitchFamily="34" charset="0"/>
+                <a:ea typeface="Calibri" pitchFamily="34" charset="-122"/>
+                <a:cs typeface="Calibri" pitchFamily="34" charset="-120"/>
+              </a:rPr>
+              <a:t>Last-mile delivery share</a:t>
+            </a:r>
+            <a:endParaRPr lang="en-US" sz="1100" dirty="0"/>
+          </a:p>
+        </p:txBody>
+      </p:sp>
+      <p:sp>
+        <p:nvSpPr>
+          <p:cNvPr id="15" name="Text 12"/>
+          <p:cNvSpPr/>
+          <p:nvPr/>
+        </p:nvSpPr>
+        <p:spPr>
+          <a:xfrm>
+            <a:off x="640080" y="2688336"/>
+            <a:ext cx="3108960" cy="182880"/>
+          </a:xfrm>
+          <a:prstGeom prst="rect">
+            <a:avLst/>
+          </a:prstGeom>
+          <a:noFill/>
+          <a:ln/>
+        </p:spPr>
+        <p:txBody>
+          <a:bodyPr wrap="square" lIns="0" tIns="0" rIns="0" bIns="0" rtlCol="0" anchor="ctr"/>
+          <a:lstStyle/>
+          <a:p>
+            <a:pPr indent="0" marL="0">
+              <a:buNone/>
+            </a:pPr>
+            <a:r>
+              <a:rPr lang="en-US" sz="850" dirty="0">
+                <a:solidFill>
+                  <a:srgbClr val="5C6779"/>
+                </a:solidFill>
+                <a:latin typeface="Calibri" pitchFamily="34" charset="0"/>
+                <a:ea typeface="Calibri" pitchFamily="34" charset="-122"/>
+                <a:cs typeface="Calibri" pitchFamily="34" charset="-120"/>
+              </a:rPr>
+              <a:t>US$1.50 net per drop · Transactional</a:t>
+            </a:r>
+            <a:endParaRPr lang="en-US" sz="850" dirty="0"/>
+          </a:p>
+        </p:txBody>
+      </p:sp>
+      <p:sp>
+        <p:nvSpPr>
+          <p:cNvPr id="16" name="Text 13"/>
+          <p:cNvSpPr/>
+          <p:nvPr/>
+        </p:nvSpPr>
+        <p:spPr>
+          <a:xfrm>
+            <a:off x="3749040" y="2523744"/>
+            <a:ext cx="1280160" cy="219456"/>
+          </a:xfrm>
+          <a:prstGeom prst="rect">
+            <a:avLst/>
+          </a:prstGeom>
+          <a:noFill/>
+          <a:ln/>
+        </p:spPr>
+        <p:txBody>
+          <a:bodyPr wrap="square" lIns="0" tIns="0" rIns="0" bIns="0" rtlCol="0" anchor="ctr"/>
+          <a:lstStyle/>
+          <a:p>
+            <a:pPr algn="r" indent="0" marL="0">
+              <a:buNone/>
+            </a:pPr>
+            <a:r>
+              <a:rPr lang="en-US" sz="1100" b="1" dirty="0">
+                <a:solidFill>
+                  <a:srgbClr val="1B3A6B"/>
+                </a:solidFill>
+                <a:latin typeface="Calibri" pitchFamily="34" charset="0"/>
+                <a:ea typeface="Calibri" pitchFamily="34" charset="-122"/>
+                <a:cs typeface="Calibri" pitchFamily="34" charset="-120"/>
+              </a:rPr>
+              <a:t>US$1,080,000</a:t>
+            </a:r>
+            <a:endParaRPr lang="en-US" sz="1100" dirty="0"/>
+          </a:p>
+        </p:txBody>
+      </p:sp>
+      <p:sp>
+        <p:nvSpPr>
+          <p:cNvPr id="17" name="Text 14"/>
+          <p:cNvSpPr/>
+          <p:nvPr/>
+        </p:nvSpPr>
+        <p:spPr>
+          <a:xfrm>
+            <a:off x="640080" y="2907792"/>
+            <a:ext cx="2834640" cy="201168"/>
+          </a:xfrm>
+          <a:prstGeom prst="rect">
+            <a:avLst/>
+          </a:prstGeom>
+          <a:noFill/>
+          <a:ln/>
+        </p:spPr>
+        <p:txBody>
+          <a:bodyPr wrap="square" lIns="0" tIns="0" rIns="0" bIns="0" rtlCol="0" anchor="ctr"/>
+          <a:lstStyle/>
+          <a:p>
+            <a:pPr indent="0" marL="0">
+              <a:buNone/>
+            </a:pPr>
+            <a:r>
+              <a:rPr lang="en-US" sz="1100" b="1" dirty="0">
+                <a:solidFill>
+                  <a:srgbClr val="16233A"/>
+                </a:solidFill>
+                <a:latin typeface="Calibri" pitchFamily="34" charset="0"/>
+                <a:ea typeface="Calibri" pitchFamily="34" charset="-122"/>
+                <a:cs typeface="Calibri" pitchFamily="34" charset="-120"/>
+              </a:rPr>
+              <a:t>Cross-border surcharge</a:t>
+            </a:r>
+            <a:endParaRPr lang="en-US" sz="1100" dirty="0"/>
+          </a:p>
+        </p:txBody>
+      </p:sp>
+      <p:sp>
+        <p:nvSpPr>
+          <p:cNvPr id="18" name="Text 15"/>
+          <p:cNvSpPr/>
+          <p:nvPr/>
+        </p:nvSpPr>
+        <p:spPr>
+          <a:xfrm>
+            <a:off x="640080" y="3090672"/>
+            <a:ext cx="3108960" cy="182880"/>
+          </a:xfrm>
+          <a:prstGeom prst="rect">
+            <a:avLst/>
+          </a:prstGeom>
+          <a:noFill/>
+          <a:ln/>
+        </p:spPr>
+        <p:txBody>
+          <a:bodyPr wrap="square" lIns="0" tIns="0" rIns="0" bIns="0" rtlCol="0" anchor="ctr"/>
+          <a:lstStyle/>
+          <a:p>
+            <a:pPr indent="0" marL="0">
+              <a:buNone/>
+            </a:pPr>
+            <a:r>
+              <a:rPr lang="en-US" sz="850" dirty="0">
+                <a:solidFill>
+                  <a:srgbClr val="5C6779"/>
+                </a:solidFill>
+                <a:latin typeface="Calibri" pitchFamily="34" charset="0"/>
+                <a:ea typeface="Calibri" pitchFamily="34" charset="-122"/>
+                <a:cs typeface="Calibri" pitchFamily="34" charset="-120"/>
+              </a:rPr>
+              <a:t>3% on international cards · Transactional</a:t>
+            </a:r>
+            <a:endParaRPr lang="en-US" sz="850" dirty="0"/>
+          </a:p>
+        </p:txBody>
+      </p:sp>
+      <p:sp>
+        <p:nvSpPr>
+          <p:cNvPr id="19" name="Text 16"/>
+          <p:cNvSpPr/>
+          <p:nvPr/>
+        </p:nvSpPr>
+        <p:spPr>
+          <a:xfrm>
+            <a:off x="3749040" y="2926080"/>
+            <a:ext cx="1280160" cy="219456"/>
+          </a:xfrm>
+          <a:prstGeom prst="rect">
+            <a:avLst/>
+          </a:prstGeom>
+          <a:noFill/>
+          <a:ln/>
+        </p:spPr>
+        <p:txBody>
+          <a:bodyPr wrap="square" lIns="0" tIns="0" rIns="0" bIns="0" rtlCol="0" anchor="ctr"/>
+          <a:lstStyle/>
+          <a:p>
+            <a:pPr algn="r" indent="0" marL="0">
+              <a:buNone/>
+            </a:pPr>
+            <a:r>
+              <a:rPr lang="en-US" sz="1100" b="1" dirty="0">
+                <a:solidFill>
+                  <a:srgbClr val="1B3A6B"/>
+                </a:solidFill>
+                <a:latin typeface="Calibri" pitchFamily="34" charset="0"/>
+                <a:ea typeface="Calibri" pitchFamily="34" charset="-122"/>
+                <a:cs typeface="Calibri" pitchFamily="34" charset="-120"/>
+              </a:rPr>
+              <a:t>US$1,836,000</a:t>
+            </a:r>
+            <a:endParaRPr lang="en-US" sz="1100" dirty="0"/>
+          </a:p>
+        </p:txBody>
+      </p:sp>
+      <p:sp>
+        <p:nvSpPr>
+          <p:cNvPr id="20" name="Text 17"/>
+          <p:cNvSpPr/>
+          <p:nvPr/>
+        </p:nvSpPr>
+        <p:spPr>
+          <a:xfrm>
+            <a:off x="640080" y="3310128"/>
+            <a:ext cx="2834640" cy="201168"/>
+          </a:xfrm>
+          <a:prstGeom prst="rect">
+            <a:avLst/>
+          </a:prstGeom>
+          <a:noFill/>
+          <a:ln/>
+        </p:spPr>
+        <p:txBody>
+          <a:bodyPr wrap="square" lIns="0" tIns="0" rIns="0" bIns="0" rtlCol="0" anchor="ctr"/>
+          <a:lstStyle/>
+          <a:p>
+            <a:pPr indent="0" marL="0">
+              <a:buNone/>
+            </a:pPr>
+            <a:r>
+              <a:rPr lang="en-US" sz="1100" b="1" dirty="0">
+                <a:solidFill>
+                  <a:srgbClr val="16233A"/>
+                </a:solidFill>
+                <a:latin typeface="Calibri" pitchFamily="34" charset="0"/>
+                <a:ea typeface="Calibri" pitchFamily="34" charset="-122"/>
+                <a:cs typeface="Calibri" pitchFamily="34" charset="-120"/>
+              </a:rPr>
+              <a:t>Diaspora Priority plans</a:t>
+            </a:r>
+            <a:endParaRPr lang="en-US" sz="1100" dirty="0"/>
+          </a:p>
+        </p:txBody>
+      </p:sp>
+      <p:sp>
+        <p:nvSpPr>
+          <p:cNvPr id="21" name="Text 18"/>
+          <p:cNvSpPr/>
+          <p:nvPr/>
+        </p:nvSpPr>
+        <p:spPr>
+          <a:xfrm>
+            <a:off x="640080" y="3493008"/>
+            <a:ext cx="3108960" cy="182880"/>
+          </a:xfrm>
+          <a:prstGeom prst="rect">
+            <a:avLst/>
+          </a:prstGeom>
+          <a:noFill/>
+          <a:ln/>
+        </p:spPr>
+        <p:txBody>
+          <a:bodyPr wrap="square" lIns="0" tIns="0" rIns="0" bIns="0" rtlCol="0" anchor="ctr"/>
+          <a:lstStyle/>
+          <a:p>
+            <a:pPr indent="0" marL="0">
+              <a:buNone/>
+            </a:pPr>
+            <a:r>
+              <a:rPr lang="en-US" sz="850" dirty="0">
+                <a:solidFill>
+                  <a:srgbClr val="5C6779"/>
+                </a:solidFill>
+                <a:latin typeface="Calibri" pitchFamily="34" charset="0"/>
+                <a:ea typeface="Calibri" pitchFamily="34" charset="-122"/>
+                <a:cs typeface="Calibri" pitchFamily="34" charset="-120"/>
+              </a:rPr>
+              <a:t>6,000 subscribers @ US$8.99 · Recurring</a:t>
+            </a:r>
+            <a:endParaRPr lang="en-US" sz="850" dirty="0"/>
+          </a:p>
+        </p:txBody>
+      </p:sp>
+      <p:sp>
+        <p:nvSpPr>
+          <p:cNvPr id="22" name="Text 19"/>
+          <p:cNvSpPr/>
+          <p:nvPr/>
+        </p:nvSpPr>
+        <p:spPr>
+          <a:xfrm>
+            <a:off x="3749040" y="3328416"/>
+            <a:ext cx="1280160" cy="219456"/>
+          </a:xfrm>
+          <a:prstGeom prst="rect">
+            <a:avLst/>
+          </a:prstGeom>
+          <a:noFill/>
+          <a:ln/>
+        </p:spPr>
+        <p:txBody>
+          <a:bodyPr wrap="square" lIns="0" tIns="0" rIns="0" bIns="0" rtlCol="0" anchor="ctr"/>
+          <a:lstStyle/>
+          <a:p>
+            <a:pPr algn="r" indent="0" marL="0">
+              <a:buNone/>
+            </a:pPr>
+            <a:r>
+              <a:rPr lang="en-US" sz="1100" b="1" dirty="0">
+                <a:solidFill>
+                  <a:srgbClr val="1B3A6B"/>
+                </a:solidFill>
+                <a:latin typeface="Calibri" pitchFamily="34" charset="0"/>
+                <a:ea typeface="Calibri" pitchFamily="34" charset="-122"/>
+                <a:cs typeface="Calibri" pitchFamily="34" charset="-120"/>
+              </a:rPr>
+              <a:t>US$647,280</a:t>
+            </a:r>
+            <a:endParaRPr lang="en-US" sz="1100" dirty="0"/>
+          </a:p>
+        </p:txBody>
+      </p:sp>
+      <p:sp>
+        <p:nvSpPr>
+          <p:cNvPr id="23" name="Text 20"/>
+          <p:cNvSpPr/>
+          <p:nvPr/>
+        </p:nvSpPr>
+        <p:spPr>
+          <a:xfrm>
+            <a:off x="640080" y="3712464"/>
+            <a:ext cx="2834640" cy="201168"/>
+          </a:xfrm>
+          <a:prstGeom prst="rect">
+            <a:avLst/>
+          </a:prstGeom>
+          <a:noFill/>
+          <a:ln/>
+        </p:spPr>
+        <p:txBody>
+          <a:bodyPr wrap="square" lIns="0" tIns="0" rIns="0" bIns="0" rtlCol="0" anchor="ctr"/>
+          <a:lstStyle/>
+          <a:p>
+            <a:pPr indent="0" marL="0">
+              <a:buNone/>
+            </a:pPr>
+            <a:r>
+              <a:rPr lang="en-US" sz="1100" b="1" dirty="0">
+                <a:solidFill>
+                  <a:srgbClr val="16233A"/>
+                </a:solidFill>
+                <a:latin typeface="Calibri" pitchFamily="34" charset="0"/>
+                <a:ea typeface="Calibri" pitchFamily="34" charset="-122"/>
+                <a:cs typeface="Calibri" pitchFamily="34" charset="-120"/>
+              </a:rPr>
+              <a:t>Retail media network</a:t>
+            </a:r>
+            <a:endParaRPr lang="en-US" sz="1100" dirty="0"/>
+          </a:p>
+        </p:txBody>
+      </p:sp>
+      <p:sp>
+        <p:nvSpPr>
+          <p:cNvPr id="24" name="Text 21"/>
+          <p:cNvSpPr/>
+          <p:nvPr/>
+        </p:nvSpPr>
+        <p:spPr>
+          <a:xfrm>
+            <a:off x="640080" y="3895344"/>
+            <a:ext cx="3108960" cy="182880"/>
+          </a:xfrm>
+          <a:prstGeom prst="rect">
+            <a:avLst/>
+          </a:prstGeom>
+          <a:noFill/>
+          <a:ln/>
+        </p:spPr>
+        <p:txBody>
+          <a:bodyPr wrap="square" lIns="0" tIns="0" rIns="0" bIns="0" rtlCol="0" anchor="ctr"/>
+          <a:lstStyle/>
+          <a:p>
+            <a:pPr indent="0" marL="0">
+              <a:buNone/>
+            </a:pPr>
+            <a:r>
+              <a:rPr lang="en-US" sz="850" dirty="0">
+                <a:solidFill>
+                  <a:srgbClr val="5C6779"/>
+                </a:solidFill>
+                <a:latin typeface="Calibri" pitchFamily="34" charset="0"/>
+                <a:ea typeface="Calibri" pitchFamily="34" charset="-122"/>
+                <a:cs typeface="Calibri" pitchFamily="34" charset="-120"/>
+              </a:rPr>
+              <a:t>1.2% of platform GMV · Semi-recurring</a:t>
+            </a:r>
+            <a:endParaRPr lang="en-US" sz="850" dirty="0"/>
+          </a:p>
+        </p:txBody>
+      </p:sp>
+      <p:sp>
+        <p:nvSpPr>
+          <p:cNvPr id="25" name="Text 22"/>
+          <p:cNvSpPr/>
+          <p:nvPr/>
+        </p:nvSpPr>
+        <p:spPr>
+          <a:xfrm>
+            <a:off x="3749040" y="3730752"/>
+            <a:ext cx="1280160" cy="219456"/>
+          </a:xfrm>
+          <a:prstGeom prst="rect">
+            <a:avLst/>
+          </a:prstGeom>
+          <a:noFill/>
+          <a:ln/>
+        </p:spPr>
+        <p:txBody>
+          <a:bodyPr wrap="square" lIns="0" tIns="0" rIns="0" bIns="0" rtlCol="0" anchor="ctr"/>
+          <a:lstStyle/>
+          <a:p>
+            <a:pPr algn="r" indent="0" marL="0">
+              <a:buNone/>
+            </a:pPr>
+            <a:r>
+              <a:rPr lang="en-US" sz="1100" b="1" dirty="0">
+                <a:solidFill>
+                  <a:srgbClr val="1B3A6B"/>
+                </a:solidFill>
+                <a:latin typeface="Calibri" pitchFamily="34" charset="0"/>
+                <a:ea typeface="Calibri" pitchFamily="34" charset="-122"/>
+                <a:cs typeface="Calibri" pitchFamily="34" charset="-120"/>
+              </a:rPr>
+              <a:t>US$734,400</a:t>
+            </a:r>
+            <a:endParaRPr lang="en-US" sz="1100" dirty="0"/>
+          </a:p>
+        </p:txBody>
+      </p:sp>
+      <p:sp>
+        <p:nvSpPr>
+          <p:cNvPr id="26" name="Shape 23"/>
+          <p:cNvSpPr/>
+          <p:nvPr/>
+        </p:nvSpPr>
+        <p:spPr>
+          <a:xfrm>
+            <a:off x="640080" y="4160520"/>
+            <a:ext cx="4389120" cy="9144"/>
+          </a:xfrm>
+          <a:prstGeom prst="rect">
+            <a:avLst/>
+          </a:prstGeom>
+          <a:solidFill>
+            <a:srgbClr val="E2E5EB"/>
+          </a:solidFill>
+          <a:ln w="12700">
+            <a:solidFill>
+              <a:srgbClr val="E2E5EB"/>
+            </a:solidFill>
+            <a:prstDash val="solid"/>
+          </a:ln>
+        </p:spPr>
+      </p:sp>
+      <p:sp>
+        <p:nvSpPr>
+          <p:cNvPr id="27" name="Text 24"/>
+          <p:cNvSpPr/>
+          <p:nvPr/>
+        </p:nvSpPr>
+        <p:spPr>
+          <a:xfrm>
+            <a:off x="640080" y="4251960"/>
+            <a:ext cx="2377440" cy="237744"/>
+          </a:xfrm>
+          <a:prstGeom prst="rect">
+            <a:avLst/>
+          </a:prstGeom>
+          <a:noFill/>
+          <a:ln/>
+        </p:spPr>
+        <p:txBody>
+          <a:bodyPr wrap="square" lIns="0" tIns="0" rIns="0" bIns="0" rtlCol="0" anchor="ctr"/>
+          <a:lstStyle/>
+          <a:p>
+            <a:pPr indent="0" marL="0">
+              <a:buNone/>
+            </a:pPr>
+            <a:r>
+              <a:rPr lang="en-US" sz="1100" b="1" dirty="0">
+                <a:solidFill>
+                  <a:srgbClr val="16233A"/>
+                </a:solidFill>
+                <a:latin typeface="Calibri" pitchFamily="34" charset="0"/>
+                <a:ea typeface="Calibri" pitchFamily="34" charset="-122"/>
+                <a:cs typeface="Calibri" pitchFamily="34" charset="-120"/>
+              </a:rPr>
+              <a:t>Total ecosystem</a:t>
+            </a:r>
+            <a:endParaRPr lang="en-US" sz="1100" dirty="0"/>
+          </a:p>
+        </p:txBody>
+      </p:sp>
+      <p:sp>
+        <p:nvSpPr>
+          <p:cNvPr id="28" name="Text 25"/>
+          <p:cNvSpPr/>
+          <p:nvPr/>
+        </p:nvSpPr>
+        <p:spPr>
+          <a:xfrm>
+            <a:off x="3200400" y="4224528"/>
+            <a:ext cx="1828800" cy="274320"/>
+          </a:xfrm>
+          <a:prstGeom prst="rect">
+            <a:avLst/>
+          </a:prstGeom>
+          <a:noFill/>
+          <a:ln/>
+        </p:spPr>
+        <p:txBody>
+          <a:bodyPr wrap="square" lIns="0" tIns="0" rIns="0" bIns="0" rtlCol="0" anchor="ctr"/>
+          <a:lstStyle/>
+          <a:p>
+            <a:pPr algn="r" indent="0" marL="0">
+              <a:buNone/>
+            </a:pPr>
+            <a:r>
+              <a:rPr lang="en-US" sz="1300" b="1" dirty="0">
+                <a:solidFill>
+                  <a:srgbClr val="D0103A"/>
+                </a:solidFill>
+                <a:latin typeface="Georgia" pitchFamily="34" charset="0"/>
+                <a:ea typeface="Georgia" pitchFamily="34" charset="-122"/>
+                <a:cs typeface="Georgia" pitchFamily="34" charset="-120"/>
+              </a:rPr>
+              <a:t>US$17,149,680</a:t>
+            </a:r>
+            <a:endParaRPr lang="en-US" sz="1300" dirty="0"/>
+          </a:p>
+        </p:txBody>
+      </p:sp>
+      <p:sp>
+        <p:nvSpPr>
+          <p:cNvPr id="29" name="Shape 26"/>
+          <p:cNvSpPr/>
+          <p:nvPr/>
+        </p:nvSpPr>
+        <p:spPr>
+          <a:xfrm>
+            <a:off x="5440680" y="1645920"/>
+            <a:ext cx="3291840" cy="2971800"/>
+          </a:xfrm>
+          <a:prstGeom prst="roundRect">
+            <a:avLst>
+              <a:gd name="adj" fmla="val 2462"/>
+            </a:avLst>
+          </a:prstGeom>
+          <a:solidFill>
+            <a:srgbClr val="1B3A6B"/>
+          </a:solidFill>
+          <a:ln w="12700">
+            <a:solidFill>
+              <a:srgbClr val="1B3A6B"/>
+            </a:solidFill>
+            <a:prstDash val="solid"/>
+          </a:ln>
+        </p:spPr>
+      </p:sp>
+      <p:sp>
+        <p:nvSpPr>
+          <p:cNvPr id="30" name="Text 27"/>
+          <p:cNvSpPr/>
+          <p:nvPr/>
+        </p:nvSpPr>
+        <p:spPr>
+          <a:xfrm>
+            <a:off x="5669280" y="1783080"/>
+            <a:ext cx="2834640" cy="256032"/>
+          </a:xfrm>
+          <a:prstGeom prst="rect">
+            <a:avLst/>
+          </a:prstGeom>
+          <a:noFill/>
+          <a:ln/>
+        </p:spPr>
+        <p:txBody>
+          <a:bodyPr wrap="square" lIns="0" tIns="0" rIns="0" bIns="0" rtlCol="0" anchor="ctr"/>
+          <a:lstStyle/>
+          <a:p>
+            <a:pPr indent="0" marL="0">
+              <a:buNone/>
+            </a:pPr>
+            <a:r>
+              <a:rPr lang="en-US" sz="1000" b="1" spc="150" kern="0" dirty="0">
+                <a:solidFill>
+                  <a:srgbClr val="F2B233"/>
+                </a:solidFill>
+                <a:latin typeface="Calibri" pitchFamily="34" charset="0"/>
+                <a:ea typeface="Calibri" pitchFamily="34" charset="-122"/>
+                <a:cs typeface="Calibri" pitchFamily="34" charset="-120"/>
+              </a:rPr>
+              <a:t>PHASE 2 · RECURRING LAYER ADDED</a:t>
+            </a:r>
+            <a:endParaRPr lang="en-US" sz="1000" dirty="0"/>
+          </a:p>
+        </p:txBody>
+      </p:sp>
+      <p:sp>
+        <p:nvSpPr>
+          <p:cNvPr id="31" name="Text 28"/>
+          <p:cNvSpPr/>
+          <p:nvPr/>
+        </p:nvSpPr>
+        <p:spPr>
+          <a:xfrm>
+            <a:off x="5669280" y="2121408"/>
+            <a:ext cx="2834640" cy="201168"/>
+          </a:xfrm>
+          <a:prstGeom prst="rect">
+            <a:avLst/>
+          </a:prstGeom>
+          <a:noFill/>
+          <a:ln/>
+        </p:spPr>
+        <p:txBody>
+          <a:bodyPr wrap="square" lIns="0" tIns="0" rIns="0" bIns="0" rtlCol="0" anchor="ctr"/>
+          <a:lstStyle/>
+          <a:p>
+            <a:pPr indent="0" marL="0">
+              <a:buNone/>
+            </a:pPr>
+            <a:r>
+              <a:rPr lang="en-US" sz="1050" b="1" dirty="0">
+                <a:solidFill>
+                  <a:srgbClr val="FFFFFF"/>
+                </a:solidFill>
+                <a:latin typeface="Calibri" pitchFamily="34" charset="0"/>
+                <a:ea typeface="Calibri" pitchFamily="34" charset="-122"/>
+                <a:cs typeface="Calibri" pitchFamily="34" charset="-120"/>
+              </a:rPr>
+              <a:t>Tenant platform fees</a:t>
+            </a:r>
+            <a:endParaRPr lang="en-US" sz="1050" dirty="0"/>
+          </a:p>
+        </p:txBody>
+      </p:sp>
+      <p:sp>
+        <p:nvSpPr>
+          <p:cNvPr id="32" name="Text 29"/>
+          <p:cNvSpPr/>
+          <p:nvPr/>
+        </p:nvSpPr>
+        <p:spPr>
+          <a:xfrm>
+            <a:off x="5669280" y="2304288"/>
+            <a:ext cx="2834640" cy="237744"/>
+          </a:xfrm>
+          <a:prstGeom prst="rect">
+            <a:avLst/>
+          </a:prstGeom>
+          <a:noFill/>
+          <a:ln/>
+        </p:spPr>
+        <p:txBody>
+          <a:bodyPr wrap="square" lIns="0" tIns="0" rIns="0" bIns="0" rtlCol="0" anchor="ctr"/>
+          <a:lstStyle/>
+          <a:p>
+            <a:pPr indent="0" marL="0">
+              <a:buNone/>
+            </a:pPr>
+            <a:r>
+              <a:rPr lang="en-US" sz="850" dirty="0">
+                <a:solidFill>
+                  <a:srgbClr val="C6D3E4"/>
+                </a:solidFill>
+                <a:latin typeface="Calibri" pitchFamily="34" charset="0"/>
+                <a:ea typeface="Calibri" pitchFamily="34" charset="-122"/>
+                <a:cs typeface="Calibri" pitchFamily="34" charset="-120"/>
+              </a:rPr>
+              <a:t>Tiered monthly fee per retailer, wholesaler and tuck shop</a:t>
+            </a:r>
+            <a:endParaRPr lang="en-US" sz="850" dirty="0"/>
+          </a:p>
+        </p:txBody>
+      </p:sp>
+      <p:sp>
+        <p:nvSpPr>
+          <p:cNvPr id="33" name="Text 30"/>
+          <p:cNvSpPr/>
+          <p:nvPr/>
+        </p:nvSpPr>
+        <p:spPr>
+          <a:xfrm>
+            <a:off x="5669280" y="2578608"/>
+            <a:ext cx="2834640" cy="201168"/>
+          </a:xfrm>
+          <a:prstGeom prst="rect">
+            <a:avLst/>
+          </a:prstGeom>
+          <a:noFill/>
+          <a:ln/>
+        </p:spPr>
+        <p:txBody>
+          <a:bodyPr wrap="square" lIns="0" tIns="0" rIns="0" bIns="0" rtlCol="0" anchor="ctr"/>
+          <a:lstStyle/>
+          <a:p>
+            <a:pPr indent="0" marL="0">
+              <a:buNone/>
+            </a:pPr>
+            <a:r>
+              <a:rPr lang="en-US" sz="1050" b="1" dirty="0">
+                <a:solidFill>
+                  <a:srgbClr val="FFFFFF"/>
+                </a:solidFill>
+                <a:latin typeface="Calibri" pitchFamily="34" charset="0"/>
+                <a:ea typeface="Calibri" pitchFamily="34" charset="-122"/>
+                <a:cs typeface="Calibri" pitchFamily="34" charset="-120"/>
+              </a:rPr>
+              <a:t>Rider plans</a:t>
+            </a:r>
+            <a:endParaRPr lang="en-US" sz="1050" dirty="0"/>
+          </a:p>
+        </p:txBody>
+      </p:sp>
+      <p:sp>
+        <p:nvSpPr>
+          <p:cNvPr id="34" name="Text 31"/>
+          <p:cNvSpPr/>
+          <p:nvPr/>
+        </p:nvSpPr>
+        <p:spPr>
+          <a:xfrm>
+            <a:off x="5669280" y="2761488"/>
+            <a:ext cx="2834640" cy="237744"/>
+          </a:xfrm>
+          <a:prstGeom prst="rect">
+            <a:avLst/>
+          </a:prstGeom>
+          <a:noFill/>
+          <a:ln/>
+        </p:spPr>
+        <p:txBody>
+          <a:bodyPr wrap="square" lIns="0" tIns="0" rIns="0" bIns="0" rtlCol="0" anchor="ctr"/>
+          <a:lstStyle/>
+          <a:p>
+            <a:pPr indent="0" marL="0">
+              <a:buNone/>
+            </a:pPr>
+            <a:r>
+              <a:rPr lang="en-US" sz="850" dirty="0">
+                <a:solidFill>
+                  <a:srgbClr val="C6D3E4"/>
+                </a:solidFill>
+                <a:latin typeface="Calibri" pitchFamily="34" charset="0"/>
+                <a:ea typeface="Calibri" pitchFamily="34" charset="-122"/>
+                <a:cs typeface="Calibri" pitchFamily="34" charset="-120"/>
+              </a:rPr>
+              <a:t>Rent-to-buy instalment, then a standing platform fee</a:t>
+            </a:r>
+            <a:endParaRPr lang="en-US" sz="850" dirty="0"/>
+          </a:p>
+        </p:txBody>
+      </p:sp>
+      <p:sp>
+        <p:nvSpPr>
+          <p:cNvPr id="35" name="Text 32"/>
+          <p:cNvSpPr/>
+          <p:nvPr/>
+        </p:nvSpPr>
+        <p:spPr>
+          <a:xfrm>
+            <a:off x="5669280" y="3035808"/>
+            <a:ext cx="2834640" cy="201168"/>
+          </a:xfrm>
+          <a:prstGeom prst="rect">
+            <a:avLst/>
+          </a:prstGeom>
+          <a:noFill/>
+          <a:ln/>
+        </p:spPr>
+        <p:txBody>
+          <a:bodyPr wrap="square" lIns="0" tIns="0" rIns="0" bIns="0" rtlCol="0" anchor="ctr"/>
+          <a:lstStyle/>
+          <a:p>
+            <a:pPr indent="0" marL="0">
+              <a:buNone/>
+            </a:pPr>
+            <a:r>
+              <a:rPr lang="en-US" sz="1050" b="1" dirty="0">
+                <a:solidFill>
+                  <a:srgbClr val="FFFFFF"/>
+                </a:solidFill>
+                <a:latin typeface="Calibri" pitchFamily="34" charset="0"/>
+                <a:ea typeface="Calibri" pitchFamily="34" charset="-122"/>
+                <a:cs typeface="Calibri" pitchFamily="34" charset="-120"/>
+              </a:rPr>
+              <a:t>Garage &amp; maintenance plans</a:t>
+            </a:r>
+            <a:endParaRPr lang="en-US" sz="1050" dirty="0"/>
+          </a:p>
+        </p:txBody>
+      </p:sp>
+      <p:sp>
+        <p:nvSpPr>
+          <p:cNvPr id="36" name="Text 33"/>
+          <p:cNvSpPr/>
+          <p:nvPr/>
+        </p:nvSpPr>
+        <p:spPr>
+          <a:xfrm>
+            <a:off x="5669280" y="3218688"/>
+            <a:ext cx="2834640" cy="237744"/>
+          </a:xfrm>
+          <a:prstGeom prst="rect">
+            <a:avLst/>
+          </a:prstGeom>
+          <a:noFill/>
+          <a:ln/>
+        </p:spPr>
+        <p:txBody>
+          <a:bodyPr wrap="square" lIns="0" tIns="0" rIns="0" bIns="0" rtlCol="0" anchor="ctr"/>
+          <a:lstStyle/>
+          <a:p>
+            <a:pPr indent="0" marL="0">
+              <a:buNone/>
+            </a:pPr>
+            <a:r>
+              <a:rPr lang="en-US" sz="850" dirty="0">
+                <a:solidFill>
+                  <a:srgbClr val="C6D3E4"/>
+                </a:solidFill>
+                <a:latin typeface="Calibri" pitchFamily="34" charset="0"/>
+                <a:ea typeface="Calibri" pitchFamily="34" charset="-122"/>
+                <a:cs typeface="Calibri" pitchFamily="34" charset="-120"/>
+              </a:rPr>
+              <a:t>Monthly servicing and parts cover, not per repair</a:t>
+            </a:r>
+            <a:endParaRPr lang="en-US" sz="850" dirty="0"/>
+          </a:p>
+        </p:txBody>
+      </p:sp>
+      <p:sp>
+        <p:nvSpPr>
+          <p:cNvPr id="37" name="Text 34"/>
+          <p:cNvSpPr/>
+          <p:nvPr/>
+        </p:nvSpPr>
+        <p:spPr>
+          <a:xfrm>
+            <a:off x="5669280" y="3493008"/>
+            <a:ext cx="2834640" cy="201168"/>
+          </a:xfrm>
+          <a:prstGeom prst="rect">
+            <a:avLst/>
+          </a:prstGeom>
+          <a:noFill/>
+          <a:ln/>
+        </p:spPr>
+        <p:txBody>
+          <a:bodyPr wrap="square" lIns="0" tIns="0" rIns="0" bIns="0" rtlCol="0" anchor="ctr"/>
+          <a:lstStyle/>
+          <a:p>
+            <a:pPr indent="0" marL="0">
+              <a:buNone/>
+            </a:pPr>
+            <a:r>
+              <a:rPr lang="en-US" sz="1050" b="1" dirty="0">
+                <a:solidFill>
+                  <a:srgbClr val="FFFFFF"/>
+                </a:solidFill>
+                <a:latin typeface="Calibri" pitchFamily="34" charset="0"/>
+                <a:ea typeface="Calibri" pitchFamily="34" charset="-122"/>
+                <a:cs typeface="Calibri" pitchFamily="34" charset="-120"/>
+              </a:rPr>
+              <a:t>Data &amp; price intelligence</a:t>
+            </a:r>
+            <a:endParaRPr lang="en-US" sz="1050" dirty="0"/>
+          </a:p>
+        </p:txBody>
+      </p:sp>
+      <p:sp>
+        <p:nvSpPr>
+          <p:cNvPr id="38" name="Text 35"/>
+          <p:cNvSpPr/>
+          <p:nvPr/>
+        </p:nvSpPr>
+        <p:spPr>
+          <a:xfrm>
+            <a:off x="5669280" y="3675888"/>
+            <a:ext cx="2834640" cy="237744"/>
+          </a:xfrm>
+          <a:prstGeom prst="rect">
+            <a:avLst/>
+          </a:prstGeom>
+          <a:noFill/>
+          <a:ln/>
+        </p:spPr>
+        <p:txBody>
+          <a:bodyPr wrap="square" lIns="0" tIns="0" rIns="0" bIns="0" rtlCol="0" anchor="ctr"/>
+          <a:lstStyle/>
+          <a:p>
+            <a:pPr indent="0" marL="0">
+              <a:buNone/>
+            </a:pPr>
+            <a:r>
+              <a:rPr lang="en-US" sz="850" dirty="0">
+                <a:solidFill>
+                  <a:srgbClr val="C6D3E4"/>
+                </a:solidFill>
+                <a:latin typeface="Calibri" pitchFamily="34" charset="0"/>
+                <a:ea typeface="Calibri" pitchFamily="34" charset="-122"/>
+                <a:cs typeface="Calibri" pitchFamily="34" charset="-120"/>
+              </a:rPr>
+              <a:t>Demand and pricing feeds licensed to suppliers</a:t>
+            </a:r>
+            <a:endParaRPr lang="en-US" sz="850" dirty="0"/>
+          </a:p>
+        </p:txBody>
+      </p:sp>
+      <p:sp>
+        <p:nvSpPr>
+          <p:cNvPr id="39" name="Text 36"/>
+          <p:cNvSpPr/>
+          <p:nvPr/>
+        </p:nvSpPr>
+        <p:spPr>
+          <a:xfrm>
+            <a:off x="5669280" y="3950208"/>
+            <a:ext cx="2834640" cy="201168"/>
+          </a:xfrm>
+          <a:prstGeom prst="rect">
+            <a:avLst/>
+          </a:prstGeom>
+          <a:noFill/>
+          <a:ln/>
+        </p:spPr>
+        <p:txBody>
+          <a:bodyPr wrap="square" lIns="0" tIns="0" rIns="0" bIns="0" rtlCol="0" anchor="ctr"/>
+          <a:lstStyle/>
+          <a:p>
+            <a:pPr indent="0" marL="0">
+              <a:buNone/>
+            </a:pPr>
+            <a:r>
+              <a:rPr lang="en-US" sz="1050" b="1" dirty="0">
+                <a:solidFill>
+                  <a:srgbClr val="FFFFFF"/>
+                </a:solidFill>
+                <a:latin typeface="Calibri" pitchFamily="34" charset="0"/>
+                <a:ea typeface="Calibri" pitchFamily="34" charset="-122"/>
+                <a:cs typeface="Calibri" pitchFamily="34" charset="-120"/>
+              </a:rPr>
+              <a:t>Shopper plans</a:t>
+            </a:r>
+            <a:endParaRPr lang="en-US" sz="1050" dirty="0"/>
+          </a:p>
+        </p:txBody>
+      </p:sp>
+      <p:sp>
+        <p:nvSpPr>
+          <p:cNvPr id="40" name="Text 37"/>
+          <p:cNvSpPr/>
+          <p:nvPr/>
+        </p:nvSpPr>
+        <p:spPr>
+          <a:xfrm>
+            <a:off x="5669280" y="4133088"/>
+            <a:ext cx="2834640" cy="237744"/>
+          </a:xfrm>
+          <a:prstGeom prst="rect">
+            <a:avLst/>
+          </a:prstGeom>
+          <a:noFill/>
+          <a:ln/>
+        </p:spPr>
+        <p:txBody>
+          <a:bodyPr wrap="square" lIns="0" tIns="0" rIns="0" bIns="0" rtlCol="0" anchor="ctr"/>
+          <a:lstStyle/>
+          <a:p>
+            <a:pPr indent="0" marL="0">
+              <a:buNone/>
+            </a:pPr>
+            <a:r>
+              <a:rPr lang="en-US" sz="850" dirty="0">
+                <a:solidFill>
+                  <a:srgbClr val="C6D3E4"/>
+                </a:solidFill>
+                <a:latin typeface="Calibri" pitchFamily="34" charset="0"/>
+                <a:ea typeface="Calibri" pitchFamily="34" charset="-122"/>
+                <a:cs typeface="Calibri" pitchFamily="34" charset="-120"/>
+              </a:rPr>
+              <a:t>Priority delivery and shared family baskets</a:t>
+            </a:r>
+            <a:endParaRPr lang="en-US" sz="850" dirty="0"/>
+          </a:p>
+        </p:txBody>
+      </p:sp>
+      <p:sp>
+        <p:nvSpPr>
+          <p:cNvPr id="41" name="Text 38"/>
+          <p:cNvSpPr/>
+          <p:nvPr/>
+        </p:nvSpPr>
+        <p:spPr>
+          <a:xfrm>
+            <a:off x="5669280" y="4315968"/>
+            <a:ext cx="2834640" cy="228600"/>
+          </a:xfrm>
+          <a:prstGeom prst="rect">
+            <a:avLst/>
+          </a:prstGeom>
+          <a:noFill/>
+          <a:ln/>
+        </p:spPr>
+        <p:txBody>
+          <a:bodyPr wrap="square" lIns="0" tIns="0" rIns="0" bIns="0" rtlCol="0" anchor="ctr"/>
+          <a:lstStyle/>
+          <a:p>
+            <a:pPr indent="0" marL="0">
+              <a:buNone/>
+            </a:pPr>
+            <a:r>
+              <a:rPr lang="en-US" sz="800" dirty="0">
+                <a:solidFill>
+                  <a:srgbClr val="9FB3CC"/>
+                </a:solidFill>
+                <a:latin typeface="Calibri" pitchFamily="34" charset="0"/>
+                <a:ea typeface="Calibri" pitchFamily="34" charset="-122"/>
+                <a:cs typeface="Calibri" pitchFamily="34" charset="-120"/>
+              </a:rPr>
+              <a:t>Pricing per tier still to be set — annual values [TBC] until tenant and rider counts are agreed.</a:t>
+            </a:r>
+            <a:endParaRPr lang="en-US" sz="800" dirty="0"/>
+          </a:p>
+        </p:txBody>
+      </p:sp>
+    </p:spTree>
+  </p:cSld>
+  <p:clrMapOvr>
+    <a:masterClrMapping/>
+  </p:clrMapOvr>
+</p:sld>
+</file>
+
+<file path=ppt/slides/slide19.xml><?xml version="1.0" encoding="utf-8"?>
+<p:sld xmlns:a="http://schemas.openxmlformats.org/drawingml/2006/main" xmlns:r="http://schemas.openxmlformats.org/officeDocument/2006/relationships" xmlns:p="http://schemas.openxmlformats.org/presentationml/2006/main">
+  <p:cSld name="Slide 19">
+    <p:bg>
+      <p:bgPr>
+        <a:solidFill>
           <a:srgbClr val="10243F"/>
         </a:solidFill>
       </p:bgPr>
@@ -11482,7 +13187,7 @@
                 <a:ea typeface="Calibri" pitchFamily="34" charset="-122"/>
                 <a:cs typeface="Calibri" pitchFamily="34" charset="-120"/>
               </a:rPr>
-              <a:t>SLIDE 18 · OWNED DELIVERY NETWORK</a:t>
+              <a:t>SLIDE 19 · FUTURE REVENUE MIX</a:t>
             </a:r>
             <a:endParaRPr lang="en-US" sz="1100" dirty="0"/>
           </a:p>
@@ -11521,7 +13226,7 @@
                 <a:ea typeface="Calibri" pitchFamily="34" charset="-122"/>
                 <a:cs typeface="Calibri" pitchFamily="34" charset="-120"/>
               </a:rPr>
-              <a:t>19</a:t>
+              <a:t>20</a:t>
             </a:r>
             <a:endParaRPr lang="en-US" sz="1100" dirty="0"/>
           </a:p>
@@ -11638,7 +13343,7 @@
                 <a:ea typeface="Georgia" pitchFamily="34" charset="-122"/>
                 <a:cs typeface="Georgia" pitchFamily="34" charset="-120"/>
               </a:rPr>
-              <a:t>The last mile is owned, not outsourced</a:t>
+              <a:t>From transaction-led to subscription-led as the platform goes agnostic</a:t>
             </a:r>
             <a:endParaRPr lang="en-US" sz="3000" dirty="0"/>
           </a:p>
@@ -11652,12 +13357,12 @@
         </p:nvSpPr>
         <p:spPr>
           <a:xfrm>
-            <a:off x="411480" y="1645920"/>
-            <a:ext cx="1929384" cy="960120"/>
+            <a:off x="411480" y="1691640"/>
+            <a:ext cx="2651760" cy="2148840"/>
           </a:xfrm>
           <a:prstGeom prst="roundRect">
             <a:avLst>
-              <a:gd name="adj" fmla="val 7619"/>
+              <a:gd name="adj" fmla="val 3404"/>
             </a:avLst>
           </a:prstGeom>
           <a:solidFill>
@@ -11679,8 +13384,8 @@
         </p:nvSpPr>
         <p:spPr>
           <a:xfrm>
-            <a:off x="594360" y="1737360"/>
-            <a:ext cx="1600200" cy="411480"/>
+            <a:off x="640080" y="1828800"/>
+            <a:ext cx="2194560" cy="228600"/>
           </a:xfrm>
           <a:prstGeom prst="rect">
             <a:avLst/>
@@ -11696,30 +13401,69 @@
               <a:buNone/>
             </a:pPr>
             <a:r>
-              <a:rPr lang="en-US" sz="2000" b="1" dirty="0">
+              <a:rPr lang="en-US" sz="950" b="1" spc="200" kern="0" dirty="0">
                 <a:solidFill>
                   <a:srgbClr val="F2B233"/>
+                </a:solidFill>
+                <a:latin typeface="Calibri" pitchFamily="34" charset="0"/>
+                <a:ea typeface="Calibri" pitchFamily="34" charset="-122"/>
+                <a:cs typeface="Calibri" pitchFamily="34" charset="-120"/>
+              </a:rPr>
+              <a:t>LAUNCH</a:t>
+            </a:r>
+            <a:endParaRPr lang="en-US" sz="950" dirty="0"/>
+          </a:p>
+        </p:txBody>
+      </p:sp>
+      <p:sp>
+        <p:nvSpPr>
+          <p:cNvPr id="11" name="Text 8"/>
+          <p:cNvSpPr/>
+          <p:nvPr/>
+        </p:nvSpPr>
+        <p:spPr>
+          <a:xfrm>
+            <a:off x="640080" y="2084832"/>
+            <a:ext cx="2194560" cy="502920"/>
+          </a:xfrm>
+          <a:prstGeom prst="rect">
+            <a:avLst/>
+          </a:prstGeom>
+          <a:noFill/>
+          <a:ln/>
+        </p:spPr>
+        <p:txBody>
+          <a:bodyPr wrap="square" lIns="0" tIns="0" rIns="0" bIns="0" rtlCol="0" anchor="t"/>
+          <a:lstStyle/>
+          <a:p>
+            <a:pPr indent="0" marL="0">
+              <a:buNone/>
+            </a:pPr>
+            <a:r>
+              <a:rPr lang="en-US" sz="1300" b="1" dirty="0">
+                <a:solidFill>
+                  <a:srgbClr val="FFFFFF"/>
                 </a:solidFill>
                 <a:latin typeface="Georgia" pitchFamily="34" charset="0"/>
                 <a:ea typeface="Georgia" pitchFamily="34" charset="-122"/>
                 <a:cs typeface="Georgia" pitchFamily="34" charset="-120"/>
               </a:rPr>
-              <a:t>500–2,000</a:t>
-            </a:r>
-            <a:endParaRPr lang="en-US" sz="2000" dirty="0"/>
-          </a:p>
-        </p:txBody>
-      </p:sp>
-      <p:sp>
-        <p:nvSpPr>
-          <p:cNvPr id="11" name="Text 8"/>
-          <p:cNvSpPr/>
-          <p:nvPr/>
-        </p:nvSpPr>
-        <p:spPr>
-          <a:xfrm>
-            <a:off x="594360" y="2148840"/>
-            <a:ext cx="1600200" cy="384048"/>
+              <a:t>Diaspora-to-door on TM stock</a:t>
+            </a:r>
+            <a:endParaRPr lang="en-US" sz="1300" dirty="0"/>
+          </a:p>
+        </p:txBody>
+      </p:sp>
+      <p:sp>
+        <p:nvSpPr>
+          <p:cNvPr id="12" name="Text 9"/>
+          <p:cNvSpPr/>
+          <p:nvPr/>
+        </p:nvSpPr>
+        <p:spPr>
+          <a:xfrm>
+            <a:off x="640080" y="2651760"/>
+            <a:ext cx="2194560" cy="1097280"/>
           </a:xfrm>
           <a:prstGeom prst="rect">
             <a:avLst/>
@@ -11735,7 +13479,7 @@
               <a:buNone/>
             </a:pPr>
             <a:r>
-              <a:rPr lang="en-US" sz="900" dirty="0">
+              <a:rPr lang="en-US" sz="950" dirty="0">
                 <a:solidFill>
                   <a:srgbClr val="C6D3E4"/>
                 </a:solidFill>
@@ -11743,26 +13487,26 @@
                 <a:ea typeface="Calibri" pitchFamily="34" charset="-122"/>
                 <a:cs typeface="Calibri" pitchFamily="34" charset="-120"/>
               </a:rPr>
-              <a:t>Platform-owned electric scooters</a:t>
-            </a:r>
-            <a:endParaRPr lang="en-US" sz="900" dirty="0"/>
-          </a:p>
-        </p:txBody>
-      </p:sp>
-      <p:sp>
-        <p:nvSpPr>
-          <p:cNvPr id="12" name="Shape 9"/>
-          <p:cNvSpPr/>
-          <p:nvPr/>
-        </p:nvSpPr>
-        <p:spPr>
-          <a:xfrm>
-            <a:off x="2523744" y="1645920"/>
-            <a:ext cx="1929384" cy="960120"/>
+              <a:t>Retail margin, delivery share and the cross-border surcharge carry the model. One recurring line: Diaspora Priority at US$647,280.</a:t>
+            </a:r>
+            <a:endParaRPr lang="en-US" sz="950" dirty="0"/>
+          </a:p>
+        </p:txBody>
+      </p:sp>
+      <p:sp>
+        <p:nvSpPr>
+          <p:cNvPr id="13" name="Shape 10"/>
+          <p:cNvSpPr/>
+          <p:nvPr/>
+        </p:nvSpPr>
+        <p:spPr>
+          <a:xfrm>
+            <a:off x="3246120" y="1691640"/>
+            <a:ext cx="2651760" cy="2148840"/>
           </a:xfrm>
           <a:prstGeom prst="roundRect">
             <a:avLst>
-              <a:gd name="adj" fmla="val 7619"/>
+              <a:gd name="adj" fmla="val 3404"/>
             </a:avLst>
           </a:prstGeom>
           <a:solidFill>
@@ -11778,14 +13522,14 @@
       </p:sp>
       <p:sp>
         <p:nvSpPr>
-          <p:cNvPr id="13" name="Text 10"/>
-          <p:cNvSpPr/>
-          <p:nvPr/>
-        </p:nvSpPr>
-        <p:spPr>
-          <a:xfrm>
-            <a:off x="2706624" y="1737360"/>
-            <a:ext cx="1600200" cy="411480"/>
+          <p:cNvPr id="14" name="Text 11"/>
+          <p:cNvSpPr/>
+          <p:nvPr/>
+        </p:nvSpPr>
+        <p:spPr>
+          <a:xfrm>
+            <a:off x="3474720" y="1828800"/>
+            <a:ext cx="2194560" cy="228600"/>
           </a:xfrm>
           <a:prstGeom prst="rect">
             <a:avLst/>
@@ -11801,30 +13545,69 @@
               <a:buNone/>
             </a:pPr>
             <a:r>
-              <a:rPr lang="en-US" sz="2000" b="1" dirty="0">
+              <a:rPr lang="en-US" sz="950" b="1" spc="200" kern="0" dirty="0">
                 <a:solidFill>
                   <a:srgbClr val="F2B233"/>
+                </a:solidFill>
+                <a:latin typeface="Calibri" pitchFamily="34" charset="0"/>
+                <a:ea typeface="Calibri" pitchFamily="34" charset="-122"/>
+                <a:cs typeface="Calibri" pitchFamily="34" charset="-120"/>
+              </a:rPr>
+              <a:t>SCALE</a:t>
+            </a:r>
+            <a:endParaRPr lang="en-US" sz="950" dirty="0"/>
+          </a:p>
+        </p:txBody>
+      </p:sp>
+      <p:sp>
+        <p:nvSpPr>
+          <p:cNvPr id="15" name="Text 12"/>
+          <p:cNvSpPr/>
+          <p:nvPr/>
+        </p:nvSpPr>
+        <p:spPr>
+          <a:xfrm>
+            <a:off x="3474720" y="2084832"/>
+            <a:ext cx="2194560" cy="502920"/>
+          </a:xfrm>
+          <a:prstGeom prst="rect">
+            <a:avLst/>
+          </a:prstGeom>
+          <a:noFill/>
+          <a:ln/>
+        </p:spPr>
+        <p:txBody>
+          <a:bodyPr wrap="square" lIns="0" tIns="0" rIns="0" bIns="0" rtlCol="0" anchor="t"/>
+          <a:lstStyle/>
+          <a:p>
+            <a:pPr indent="0" marL="0">
+              <a:buNone/>
+            </a:pPr>
+            <a:r>
+              <a:rPr lang="en-US" sz="1300" b="1" dirty="0">
+                <a:solidFill>
+                  <a:srgbClr val="FFFFFF"/>
                 </a:solidFill>
                 <a:latin typeface="Georgia" pitchFamily="34" charset="0"/>
                 <a:ea typeface="Georgia" pitchFamily="34" charset="-122"/>
                 <a:cs typeface="Georgia" pitchFamily="34" charset="-120"/>
               </a:rPr>
-              <a:t>12 months</a:t>
-            </a:r>
-            <a:endParaRPr lang="en-US" sz="2000" dirty="0"/>
-          </a:p>
-        </p:txBody>
-      </p:sp>
-      <p:sp>
-        <p:nvSpPr>
-          <p:cNvPr id="14" name="Text 11"/>
-          <p:cNvSpPr/>
-          <p:nvPr/>
-        </p:nvSpPr>
-        <p:spPr>
-          <a:xfrm>
-            <a:off x="2706624" y="2148840"/>
-            <a:ext cx="1600200" cy="384048"/>
+              <a:t>Second and third retailers onboard</a:t>
+            </a:r>
+            <a:endParaRPr lang="en-US" sz="1300" dirty="0"/>
+          </a:p>
+        </p:txBody>
+      </p:sp>
+      <p:sp>
+        <p:nvSpPr>
+          <p:cNvPr id="16" name="Text 13"/>
+          <p:cNvSpPr/>
+          <p:nvPr/>
+        </p:nvSpPr>
+        <p:spPr>
+          <a:xfrm>
+            <a:off x="3474720" y="2651760"/>
+            <a:ext cx="2194560" cy="1097280"/>
           </a:xfrm>
           <a:prstGeom prst="rect">
             <a:avLst/>
@@ -11840,7 +13623,7 @@
               <a:buNone/>
             </a:pPr>
             <a:r>
-              <a:rPr lang="en-US" sz="900" dirty="0">
+              <a:rPr lang="en-US" sz="950" dirty="0">
                 <a:solidFill>
                   <a:srgbClr val="C6D3E4"/>
                 </a:solidFill>
@@ -11848,26 +13631,26 @@
                 <a:ea typeface="Calibri" pitchFamily="34" charset="-122"/>
                 <a:cs typeface="Calibri" pitchFamily="34" charset="-120"/>
               </a:rPr>
-              <a:t>Rent-to-buy, then the rider owns it</a:t>
-            </a:r>
-            <a:endParaRPr lang="en-US" sz="900" dirty="0"/>
-          </a:p>
-        </p:txBody>
-      </p:sp>
-      <p:sp>
-        <p:nvSpPr>
-          <p:cNvPr id="15" name="Shape 12"/>
-          <p:cNvSpPr/>
-          <p:nvPr/>
-        </p:nvSpPr>
-        <p:spPr>
-          <a:xfrm>
-            <a:off x="4636008" y="1645920"/>
-            <a:ext cx="1929384" cy="960120"/>
+              <a:t>Tenant platform fees, rider plans and garage plans start billing monthly. Transaction fees stay, but stop being the whole story.</a:t>
+            </a:r>
+            <a:endParaRPr lang="en-US" sz="950" dirty="0"/>
+          </a:p>
+        </p:txBody>
+      </p:sp>
+      <p:sp>
+        <p:nvSpPr>
+          <p:cNvPr id="17" name="Shape 14"/>
+          <p:cNvSpPr/>
+          <p:nvPr/>
+        </p:nvSpPr>
+        <p:spPr>
+          <a:xfrm>
+            <a:off x="6080760" y="1691640"/>
+            <a:ext cx="2651760" cy="2148840"/>
           </a:xfrm>
           <a:prstGeom prst="roundRect">
             <a:avLst>
-              <a:gd name="adj" fmla="val 7619"/>
+              <a:gd name="adj" fmla="val 3404"/>
             </a:avLst>
           </a:prstGeom>
           <a:solidFill>
@@ -11883,14 +13666,14 @@
       </p:sp>
       <p:sp>
         <p:nvSpPr>
-          <p:cNvPr id="16" name="Text 13"/>
-          <p:cNvSpPr/>
-          <p:nvPr/>
-        </p:nvSpPr>
-        <p:spPr>
-          <a:xfrm>
-            <a:off x="4818888" y="1737360"/>
-            <a:ext cx="1600200" cy="411480"/>
+          <p:cNvPr id="18" name="Text 15"/>
+          <p:cNvSpPr/>
+          <p:nvPr/>
+        </p:nvSpPr>
+        <p:spPr>
+          <a:xfrm>
+            <a:off x="6309360" y="1828800"/>
+            <a:ext cx="2194560" cy="228600"/>
           </a:xfrm>
           <a:prstGeom prst="rect">
             <a:avLst/>
@@ -11906,30 +13689,69 @@
               <a:buNone/>
             </a:pPr>
             <a:r>
-              <a:rPr lang="en-US" sz="2000" b="1" dirty="0">
+              <a:rPr lang="en-US" sz="950" b="1" spc="200" kern="0" dirty="0">
                 <a:solidFill>
                   <a:srgbClr val="F2B233"/>
+                </a:solidFill>
+                <a:latin typeface="Calibri" pitchFamily="34" charset="0"/>
+                <a:ea typeface="Calibri" pitchFamily="34" charset="-122"/>
+                <a:cs typeface="Calibri" pitchFamily="34" charset="-120"/>
+              </a:rPr>
+              <a:t>AGNOSTIC</a:t>
+            </a:r>
+            <a:endParaRPr lang="en-US" sz="950" dirty="0"/>
+          </a:p>
+        </p:txBody>
+      </p:sp>
+      <p:sp>
+        <p:nvSpPr>
+          <p:cNvPr id="19" name="Text 16"/>
+          <p:cNvSpPr/>
+          <p:nvPr/>
+        </p:nvSpPr>
+        <p:spPr>
+          <a:xfrm>
+            <a:off x="6309360" y="2084832"/>
+            <a:ext cx="2194560" cy="502920"/>
+          </a:xfrm>
+          <a:prstGeom prst="rect">
+            <a:avLst/>
+          </a:prstGeom>
+          <a:noFill/>
+          <a:ln/>
+        </p:spPr>
+        <p:txBody>
+          <a:bodyPr wrap="square" lIns="0" tIns="0" rIns="0" bIns="0" rtlCol="0" anchor="t"/>
+          <a:lstStyle/>
+          <a:p>
+            <a:pPr indent="0" marL="0">
+              <a:buNone/>
+            </a:pPr>
+            <a:r>
+              <a:rPr lang="en-US" sz="1300" b="1" dirty="0">
+                <a:solidFill>
+                  <a:srgbClr val="FFFFFF"/>
                 </a:solidFill>
                 <a:latin typeface="Georgia" pitchFamily="34" charset="0"/>
                 <a:ea typeface="Georgia" pitchFamily="34" charset="-122"/>
                 <a:cs typeface="Georgia" pitchFamily="34" charset="-120"/>
               </a:rPr>
-              <a:t>~5 months</a:t>
-            </a:r>
-            <a:endParaRPr lang="en-US" sz="2000" dirty="0"/>
-          </a:p>
-        </p:txBody>
-      </p:sp>
-      <p:sp>
-        <p:nvSpPr>
-          <p:cNvPr id="17" name="Text 14"/>
-          <p:cNvSpPr/>
-          <p:nvPr/>
-        </p:nvSpPr>
-        <p:spPr>
-          <a:xfrm>
-            <a:off x="4818888" y="2148840"/>
-            <a:ext cx="1600200" cy="384048"/>
+              <a:t>Marketplace of retailers and tuck shops</a:t>
+            </a:r>
+            <a:endParaRPr lang="en-US" sz="1300" dirty="0"/>
+          </a:p>
+        </p:txBody>
+      </p:sp>
+      <p:sp>
+        <p:nvSpPr>
+          <p:cNvPr id="20" name="Text 17"/>
+          <p:cNvSpPr/>
+          <p:nvPr/>
+        </p:nvSpPr>
+        <p:spPr>
+          <a:xfrm>
+            <a:off x="6309360" y="2651760"/>
+            <a:ext cx="2194560" cy="1097280"/>
           </a:xfrm>
           <a:prstGeom prst="rect">
             <a:avLst/>
@@ -11945,7 +13767,7 @@
               <a:buNone/>
             </a:pPr>
             <a:r>
-              <a:rPr lang="en-US" sz="900" dirty="0">
+              <a:rPr lang="en-US" sz="950" dirty="0">
                 <a:solidFill>
                   <a:srgbClr val="C6D3E4"/>
                 </a:solidFill>
@@ -11953,1167 +13775,26 @@
                 <a:ea typeface="Calibri" pitchFamily="34" charset="-122"/>
                 <a:cs typeface="Calibri" pitchFamily="34" charset="-120"/>
               </a:rPr>
-              <a:t>Asset pays itself back</a:t>
-            </a:r>
-            <a:endParaRPr lang="en-US" sz="900" dirty="0"/>
-          </a:p>
-        </p:txBody>
-      </p:sp>
-      <p:sp>
-        <p:nvSpPr>
-          <p:cNvPr id="18" name="Shape 15"/>
-          <p:cNvSpPr/>
-          <p:nvPr/>
-        </p:nvSpPr>
-        <p:spPr>
-          <a:xfrm>
-            <a:off x="6748272" y="1645920"/>
-            <a:ext cx="1929384" cy="960120"/>
+              <a:t>Subscriptions across tenants, riders, shoppers and data become the base load; commission rides on top as upside.</a:t>
+            </a:r>
+            <a:endParaRPr lang="en-US" sz="950" dirty="0"/>
+          </a:p>
+        </p:txBody>
+      </p:sp>
+      <p:sp>
+        <p:nvSpPr>
+          <p:cNvPr id="21" name="Shape 18"/>
+          <p:cNvSpPr/>
+          <p:nvPr/>
+        </p:nvSpPr>
+        <p:spPr>
+          <a:xfrm>
+            <a:off x="411480" y="3977640"/>
+            <a:ext cx="8321040" cy="594360"/>
           </a:xfrm>
           <a:prstGeom prst="roundRect">
             <a:avLst>
-              <a:gd name="adj" fmla="val 7619"/>
-            </a:avLst>
-          </a:prstGeom>
-          <a:solidFill>
-            <a:srgbClr val="1E426F"/>
-          </a:solidFill>
-          <a:ln w="12700">
-            <a:solidFill>
-              <a:srgbClr val="1E426F"/>
-            </a:solidFill>
-            <a:prstDash val="solid"/>
-          </a:ln>
-        </p:spPr>
-      </p:sp>
-      <p:sp>
-        <p:nvSpPr>
-          <p:cNvPr id="19" name="Text 16"/>
-          <p:cNvSpPr/>
-          <p:nvPr/>
-        </p:nvSpPr>
-        <p:spPr>
-          <a:xfrm>
-            <a:off x="6931152" y="1737360"/>
-            <a:ext cx="1600200" cy="411480"/>
-          </a:xfrm>
-          <a:prstGeom prst="rect">
-            <a:avLst/>
-          </a:prstGeom>
-          <a:noFill/>
-          <a:ln/>
-        </p:spPr>
-        <p:txBody>
-          <a:bodyPr wrap="square" lIns="0" tIns="0" rIns="0" bIns="0" rtlCol="0" anchor="ctr"/>
-          <a:lstStyle/>
-          <a:p>
-            <a:pPr indent="0" marL="0">
-              <a:buNone/>
-            </a:pPr>
-            <a:r>
-              <a:rPr lang="en-US" sz="2000" b="1" dirty="0">
-                <a:solidFill>
-                  <a:srgbClr val="F2B233"/>
-                </a:solidFill>
-                <a:latin typeface="Georgia" pitchFamily="34" charset="0"/>
-                <a:ea typeface="Georgia" pitchFamily="34" charset="-122"/>
-                <a:cs typeface="Georgia" pitchFamily="34" charset="-120"/>
-              </a:rPr>
-              <a:t>~10%</a:t>
-            </a:r>
-            <a:endParaRPr lang="en-US" sz="2000" dirty="0"/>
-          </a:p>
-        </p:txBody>
-      </p:sp>
-      <p:sp>
-        <p:nvSpPr>
-          <p:cNvPr id="20" name="Text 17"/>
-          <p:cNvSpPr/>
-          <p:nvPr/>
-        </p:nvSpPr>
-        <p:spPr>
-          <a:xfrm>
-            <a:off x="6931152" y="2148840"/>
-            <a:ext cx="1600200" cy="384048"/>
-          </a:xfrm>
-          <a:prstGeom prst="rect">
-            <a:avLst/>
-          </a:prstGeom>
-          <a:noFill/>
-          <a:ln/>
-        </p:spPr>
-        <p:txBody>
-          <a:bodyPr wrap="square" lIns="0" tIns="0" rIns="0" bIns="0" rtlCol="0" anchor="t"/>
-          <a:lstStyle/>
-          <a:p>
-            <a:pPr indent="0" marL="0">
-              <a:buNone/>
-            </a:pPr>
-            <a:r>
-              <a:rPr lang="en-US" sz="900" dirty="0">
-                <a:solidFill>
-                  <a:srgbClr val="C6D3E4"/>
-                </a:solidFill>
-                <a:latin typeface="Calibri" pitchFamily="34" charset="0"/>
-                <a:ea typeface="Calibri" pitchFamily="34" charset="-122"/>
-                <a:cs typeface="Calibri" pitchFamily="34" charset="-120"/>
-              </a:rPr>
-              <a:t>Platform fee per dollar earned after ownership</a:t>
-            </a:r>
-            <a:endParaRPr lang="en-US" sz="900" dirty="0"/>
-          </a:p>
-        </p:txBody>
-      </p:sp>
-      <p:sp>
-        <p:nvSpPr>
-          <p:cNvPr id="21" name="Shape 18"/>
-          <p:cNvSpPr/>
-          <p:nvPr/>
-        </p:nvSpPr>
-        <p:spPr>
-          <a:xfrm>
-            <a:off x="411480" y="2743200"/>
-            <a:ext cx="2651760" cy="1417320"/>
-          </a:xfrm>
-          <a:prstGeom prst="roundRect">
-            <a:avLst>
-              <a:gd name="adj" fmla="val 5161"/>
-            </a:avLst>
-          </a:prstGeom>
-          <a:solidFill>
-            <a:srgbClr val="1E426F"/>
-          </a:solidFill>
-          <a:ln w="12700">
-            <a:solidFill>
-              <a:srgbClr val="1E426F"/>
-            </a:solidFill>
-            <a:prstDash val="solid"/>
-          </a:ln>
-        </p:spPr>
-      </p:sp>
-      <p:sp>
-        <p:nvSpPr>
-          <p:cNvPr id="22" name="Text 19"/>
-          <p:cNvSpPr/>
-          <p:nvPr/>
-        </p:nvSpPr>
-        <p:spPr>
-          <a:xfrm>
-            <a:off x="612648" y="2907792"/>
-            <a:ext cx="2249424" cy="384048"/>
-          </a:xfrm>
-          <a:prstGeom prst="rect">
-            <a:avLst/>
-          </a:prstGeom>
-          <a:noFill/>
-          <a:ln/>
-        </p:spPr>
-        <p:txBody>
-          <a:bodyPr wrap="square" lIns="0" tIns="0" rIns="0" bIns="0" rtlCol="0" anchor="t"/>
-          <a:lstStyle/>
-          <a:p>
-            <a:pPr indent="0" marL="0">
-              <a:buNone/>
-            </a:pPr>
-            <a:r>
-              <a:rPr lang="en-US" sz="1300" b="1" dirty="0">
-                <a:solidFill>
-                  <a:srgbClr val="FFFFFF"/>
-                </a:solidFill>
-                <a:latin typeface="Georgia" pitchFamily="34" charset="0"/>
-                <a:ea typeface="Georgia" pitchFamily="34" charset="-122"/>
-                <a:cs typeface="Georgia" pitchFamily="34" charset="-120"/>
-              </a:rPr>
-              <a:t>Rent-to-buy</a:t>
-            </a:r>
-            <a:endParaRPr lang="en-US" sz="1300" dirty="0"/>
-          </a:p>
-        </p:txBody>
-      </p:sp>
-      <p:sp>
-        <p:nvSpPr>
-          <p:cNvPr id="23" name="Text 20"/>
-          <p:cNvSpPr/>
-          <p:nvPr/>
-        </p:nvSpPr>
-        <p:spPr>
-          <a:xfrm>
-            <a:off x="612648" y="3310128"/>
-            <a:ext cx="2249424" cy="685800"/>
-          </a:xfrm>
-          <a:prstGeom prst="rect">
-            <a:avLst/>
-          </a:prstGeom>
-          <a:noFill/>
-          <a:ln/>
-        </p:spPr>
-        <p:txBody>
-          <a:bodyPr wrap="square" lIns="0" tIns="0" rIns="0" bIns="0" rtlCol="0" anchor="t"/>
-          <a:lstStyle/>
-          <a:p>
-            <a:pPr indent="0" marL="0">
-              <a:buNone/>
-            </a:pPr>
-            <a:r>
-              <a:rPr lang="en-US" sz="1000" dirty="0">
-                <a:solidFill>
-                  <a:srgbClr val="D5DEEA"/>
-                </a:solidFill>
-                <a:latin typeface="Calibri" pitchFamily="34" charset="0"/>
-                <a:ea typeface="Calibri" pitchFamily="34" charset="-122"/>
-                <a:cs typeface="Calibri" pitchFamily="34" charset="-120"/>
-              </a:rPr>
-              <a:t>The rider operates for twelve months and then owns the scooter. The asset repays itself in roughly five months; months six to twelve are margin.</a:t>
-            </a:r>
-            <a:endParaRPr lang="en-US" sz="1000" dirty="0"/>
-          </a:p>
-        </p:txBody>
-      </p:sp>
-      <p:sp>
-        <p:nvSpPr>
-          <p:cNvPr id="24" name="Shape 21"/>
-          <p:cNvSpPr/>
-          <p:nvPr/>
-        </p:nvSpPr>
-        <p:spPr>
-          <a:xfrm>
-            <a:off x="3246120" y="2743200"/>
-            <a:ext cx="2651760" cy="1417320"/>
-          </a:xfrm>
-          <a:prstGeom prst="roundRect">
-            <a:avLst>
-              <a:gd name="adj" fmla="val 5161"/>
-            </a:avLst>
-          </a:prstGeom>
-          <a:solidFill>
-            <a:srgbClr val="1E426F"/>
-          </a:solidFill>
-          <a:ln w="12700">
-            <a:solidFill>
-              <a:srgbClr val="1E426F"/>
-            </a:solidFill>
-            <a:prstDash val="solid"/>
-          </a:ln>
-        </p:spPr>
-      </p:sp>
-      <p:sp>
-        <p:nvSpPr>
-          <p:cNvPr id="25" name="Text 22"/>
-          <p:cNvSpPr/>
-          <p:nvPr/>
-        </p:nvSpPr>
-        <p:spPr>
-          <a:xfrm>
-            <a:off x="3447288" y="2907792"/>
-            <a:ext cx="2249424" cy="384048"/>
-          </a:xfrm>
-          <a:prstGeom prst="rect">
-            <a:avLst/>
-          </a:prstGeom>
-          <a:noFill/>
-          <a:ln/>
-        </p:spPr>
-        <p:txBody>
-          <a:bodyPr wrap="square" lIns="0" tIns="0" rIns="0" bIns="0" rtlCol="0" anchor="t"/>
-          <a:lstStyle/>
-          <a:p>
-            <a:pPr indent="0" marL="0">
-              <a:buNone/>
-            </a:pPr>
-            <a:r>
-              <a:rPr lang="en-US" sz="1300" b="1" dirty="0">
-                <a:solidFill>
-                  <a:srgbClr val="FFFFFF"/>
-                </a:solidFill>
-                <a:latin typeface="Georgia" pitchFamily="34" charset="0"/>
-                <a:ea typeface="Georgia" pitchFamily="34" charset="-122"/>
-                <a:cs typeface="Georgia" pitchFamily="34" charset="-120"/>
-              </a:rPr>
-              <a:t>Advertising rights</a:t>
-            </a:r>
-            <a:endParaRPr lang="en-US" sz="1300" dirty="0"/>
-          </a:p>
-        </p:txBody>
-      </p:sp>
-      <p:sp>
-        <p:nvSpPr>
-          <p:cNvPr id="26" name="Text 23"/>
-          <p:cNvSpPr/>
-          <p:nvPr/>
-        </p:nvSpPr>
-        <p:spPr>
-          <a:xfrm>
-            <a:off x="3447288" y="3310128"/>
-            <a:ext cx="2249424" cy="685800"/>
-          </a:xfrm>
-          <a:prstGeom prst="rect">
-            <a:avLst/>
-          </a:prstGeom>
-          <a:noFill/>
-          <a:ln/>
-        </p:spPr>
-        <p:txBody>
-          <a:bodyPr wrap="square" lIns="0" tIns="0" rIns="0" bIns="0" rtlCol="0" anchor="t"/>
-          <a:lstStyle/>
-          <a:p>
-            <a:pPr indent="0" marL="0">
-              <a:buNone/>
-            </a:pPr>
-            <a:r>
-              <a:rPr lang="en-US" sz="1000" dirty="0">
-                <a:solidFill>
-                  <a:srgbClr val="D5DEEA"/>
-                </a:solidFill>
-                <a:latin typeface="Calibri" pitchFamily="34" charset="0"/>
-                <a:ea typeface="Calibri" pitchFamily="34" charset="-122"/>
-                <a:cs typeface="Calibri" pitchFamily="34" charset="-120"/>
-              </a:rPr>
-              <a:t>Livery is sold on subscription: 80% reserved for the anchor retailer, 20% open inventory. A moving media network across every delivery route.</a:t>
-            </a:r>
-            <a:endParaRPr lang="en-US" sz="1000" dirty="0"/>
-          </a:p>
-        </p:txBody>
-      </p:sp>
-      <p:sp>
-        <p:nvSpPr>
-          <p:cNvPr id="27" name="Shape 24"/>
-          <p:cNvSpPr/>
-          <p:nvPr/>
-        </p:nvSpPr>
-        <p:spPr>
-          <a:xfrm>
-            <a:off x="6080760" y="2743200"/>
-            <a:ext cx="2651760" cy="1417320"/>
-          </a:xfrm>
-          <a:prstGeom prst="roundRect">
-            <a:avLst>
-              <a:gd name="adj" fmla="val 5161"/>
-            </a:avLst>
-          </a:prstGeom>
-          <a:solidFill>
-            <a:srgbClr val="1E426F"/>
-          </a:solidFill>
-          <a:ln w="12700">
-            <a:solidFill>
-              <a:srgbClr val="1E426F"/>
-            </a:solidFill>
-            <a:prstDash val="solid"/>
-          </a:ln>
-        </p:spPr>
-      </p:sp>
-      <p:sp>
-        <p:nvSpPr>
-          <p:cNvPr id="28" name="Text 25"/>
-          <p:cNvSpPr/>
-          <p:nvPr/>
-        </p:nvSpPr>
-        <p:spPr>
-          <a:xfrm>
-            <a:off x="6281928" y="2907792"/>
-            <a:ext cx="2249424" cy="384048"/>
-          </a:xfrm>
-          <a:prstGeom prst="rect">
-            <a:avLst/>
-          </a:prstGeom>
-          <a:noFill/>
-          <a:ln/>
-        </p:spPr>
-        <p:txBody>
-          <a:bodyPr wrap="square" lIns="0" tIns="0" rIns="0" bIns="0" rtlCol="0" anchor="t"/>
-          <a:lstStyle/>
-          <a:p>
-            <a:pPr indent="0" marL="0">
-              <a:buNone/>
-            </a:pPr>
-            <a:r>
-              <a:rPr lang="en-US" sz="1300" b="1" dirty="0">
-                <a:solidFill>
-                  <a:srgbClr val="FFFFFF"/>
-                </a:solidFill>
-                <a:latin typeface="Georgia" pitchFamily="34" charset="0"/>
-                <a:ea typeface="Georgia" pitchFamily="34" charset="-122"/>
-                <a:cs typeface="Georgia" pitchFamily="34" charset="-120"/>
-              </a:rPr>
-              <a:t>Own the garage</a:t>
-            </a:r>
-            <a:endParaRPr lang="en-US" sz="1300" dirty="0"/>
-          </a:p>
-        </p:txBody>
-      </p:sp>
-      <p:sp>
-        <p:nvSpPr>
-          <p:cNvPr id="29" name="Text 26"/>
-          <p:cNvSpPr/>
-          <p:nvPr/>
-        </p:nvSpPr>
-        <p:spPr>
-          <a:xfrm>
-            <a:off x="6281928" y="3310128"/>
-            <a:ext cx="2249424" cy="685800"/>
-          </a:xfrm>
-          <a:prstGeom prst="rect">
-            <a:avLst/>
-          </a:prstGeom>
-          <a:noFill/>
-          <a:ln/>
-        </p:spPr>
-        <p:txBody>
-          <a:bodyPr wrap="square" lIns="0" tIns="0" rIns="0" bIns="0" rtlCol="0" anchor="t"/>
-          <a:lstStyle/>
-          <a:p>
-            <a:pPr indent="0" marL="0">
-              <a:buNone/>
-            </a:pPr>
-            <a:r>
-              <a:rPr lang="en-US" sz="1000" dirty="0">
-                <a:solidFill>
-                  <a:srgbClr val="D5DEEA"/>
-                </a:solidFill>
-                <a:latin typeface="Calibri" pitchFamily="34" charset="0"/>
-                <a:ea typeface="Calibri" pitchFamily="34" charset="-122"/>
-                <a:cs typeface="Calibri" pitchFamily="34" charset="-120"/>
-              </a:rPr>
-              <a:t>Repairs, parts and accessories stay inside the platform on a maintenance plan. Electric tricycles extend the fleet into rural routes, with women riders as the first cohort.</a:t>
-            </a:r>
-            <a:endParaRPr lang="en-US" sz="1000" dirty="0"/>
-          </a:p>
-        </p:txBody>
-      </p:sp>
-      <p:pic>
-        <p:nvPicPr>
-          <p:cNvPr id="30" name="Image 1" descr="preencoded.png">    </p:cNvPr>
-          <p:cNvPicPr>
-            <a:picLocks noChangeAspect="1"/>
-          </p:cNvPicPr>
-          <p:nvPr/>
-        </p:nvPicPr>
-        <p:blipFill>
-          <a:blip r:embed="rId2"/>
-          <a:srcRect l="0" r="0" t="0" b="0"/>
-          <a:stretch/>
-        </p:blipFill>
-        <p:spPr>
-          <a:xfrm>
-            <a:off x="411480" y="4279392"/>
-            <a:ext cx="8321040" cy="384048"/>
-          </a:xfrm>
-          <a:prstGeom prst="rect">
-            <a:avLst/>
-          </a:prstGeom>
-        </p:spPr>
-      </p:pic>
-    </p:spTree>
-  </p:cSld>
-  <p:clrMapOvr>
-    <a:masterClrMapping/>
-  </p:clrMapOvr>
-</p:sld>
-</file>
-
-<file path=ppt/slides/slide19.xml><?xml version="1.0" encoding="utf-8"?>
-<p:sld xmlns:a="http://schemas.openxmlformats.org/drawingml/2006/main" xmlns:r="http://schemas.openxmlformats.org/officeDocument/2006/relationships" xmlns:p="http://schemas.openxmlformats.org/presentationml/2006/main">
-  <p:cSld name="Slide 19">
-    <p:bg>
-      <p:bgPr>
-        <a:solidFill>
-          <a:srgbClr val="F7F7F9"/>
-        </a:solidFill>
-      </p:bgPr>
-    </p:bg>
-    <p:spTree>
-      <p:nvGrpSpPr>
-        <p:cNvPr id="1" name=""/>
-        <p:cNvGrpSpPr/>
-        <p:nvPr/>
-      </p:nvGrpSpPr>
-      <p:grpSpPr>
-        <a:xfrm>
-          <a:off x="0" y="0"/>
-          <a:ext cx="0" cy="0"/>
-          <a:chOff x="0" y="0"/>
-          <a:chExt cx="0" cy="0"/>
-        </a:xfrm>
-      </p:grpSpPr>
-      <p:sp>
-        <p:nvSpPr>
-          <p:cNvPr id="2" name="Shape 0"/>
-          <p:cNvSpPr/>
-          <p:nvPr/>
-        </p:nvSpPr>
-        <p:spPr>
-          <a:xfrm>
-            <a:off x="411480" y="274320"/>
-            <a:ext cx="1371600" cy="365760"/>
-          </a:xfrm>
-          <a:prstGeom prst="roundRect">
-            <a:avLst>
-              <a:gd name="adj" fmla="val 15000"/>
-            </a:avLst>
-          </a:prstGeom>
-          <a:solidFill>
-            <a:srgbClr val="FFFFFF"/>
-          </a:solidFill>
-          <a:ln w="12700">
-            <a:solidFill>
-              <a:srgbClr val="FFFFFF"/>
-            </a:solidFill>
-            <a:prstDash val="solid"/>
-          </a:ln>
-        </p:spPr>
-      </p:sp>
-      <p:pic>
-        <p:nvPicPr>
-          <p:cNvPr id="3" name="Image 0" descr="preencoded.png">    </p:cNvPr>
-          <p:cNvPicPr>
-            <a:picLocks noChangeAspect="1"/>
-          </p:cNvPicPr>
-          <p:nvPr/>
-        </p:nvPicPr>
-        <p:blipFill>
-          <a:blip r:embed="rId1"/>
-          <a:stretch>
-            <a:fillRect/>
-          </a:stretch>
-        </p:blipFill>
-        <p:spPr>
-          <a:xfrm>
-            <a:off x="484632" y="338328"/>
-            <a:ext cx="1225296" cy="237744"/>
-          </a:xfrm>
-          <a:prstGeom prst="rect">
-            <a:avLst/>
-          </a:prstGeom>
-        </p:spPr>
-      </p:pic>
-      <p:sp>
-        <p:nvSpPr>
-          <p:cNvPr id="4" name="Text 1"/>
-          <p:cNvSpPr/>
-          <p:nvPr/>
-        </p:nvSpPr>
-        <p:spPr>
-          <a:xfrm>
-            <a:off x="1920240" y="301752"/>
-            <a:ext cx="6263640" cy="320040"/>
-          </a:xfrm>
-          <a:prstGeom prst="rect">
-            <a:avLst/>
-          </a:prstGeom>
-          <a:noFill/>
-          <a:ln/>
-        </p:spPr>
-        <p:txBody>
-          <a:bodyPr wrap="square" rtlCol="0" anchor="ctr"/>
-          <a:lstStyle/>
-          <a:p>
-            <a:pPr indent="0" marL="0">
-              <a:buNone/>
-            </a:pPr>
-            <a:r>
-              <a:rPr lang="en-US" sz="1100" b="1" spc="200" kern="0" dirty="0">
-                <a:solidFill>
-                  <a:srgbClr val="D0103A"/>
-                </a:solidFill>
-                <a:latin typeface="Calibri" pitchFamily="34" charset="0"/>
-                <a:ea typeface="Calibri" pitchFamily="34" charset="-122"/>
-                <a:cs typeface="Calibri" pitchFamily="34" charset="-120"/>
-              </a:rPr>
-              <a:t>SLIDE 19 · LOYALTY &amp; DEVICE MIGRATION</a:t>
-            </a:r>
-            <a:endParaRPr lang="en-US" sz="1100" dirty="0"/>
-          </a:p>
-        </p:txBody>
-      </p:sp>
-      <p:sp>
-        <p:nvSpPr>
-          <p:cNvPr id="5" name="Text 2"/>
-          <p:cNvSpPr/>
-          <p:nvPr/>
-        </p:nvSpPr>
-        <p:spPr>
-          <a:xfrm>
-            <a:off x="8229600" y="301752"/>
-            <a:ext cx="502920" cy="320040"/>
-          </a:xfrm>
-          <a:prstGeom prst="rect">
-            <a:avLst/>
-          </a:prstGeom>
-          <a:noFill/>
-          <a:ln/>
-        </p:spPr>
-        <p:txBody>
-          <a:bodyPr wrap="square" rtlCol="0" anchor="ctr"/>
-          <a:lstStyle/>
-          <a:p>
-            <a:pPr algn="r" indent="0" marL="0">
-              <a:buNone/>
-            </a:pPr>
-            <a:r>
-              <a:rPr lang="en-US" sz="1100" b="1" dirty="0">
-                <a:solidFill>
-                  <a:srgbClr val="5C6779"/>
-                </a:solidFill>
-                <a:latin typeface="Calibri" pitchFamily="34" charset="0"/>
-                <a:ea typeface="Calibri" pitchFamily="34" charset="-122"/>
-                <a:cs typeface="Calibri" pitchFamily="34" charset="-120"/>
-              </a:rPr>
-              <a:t>20</a:t>
-            </a:r>
-            <a:endParaRPr lang="en-US" sz="1100" dirty="0"/>
-          </a:p>
-        </p:txBody>
-      </p:sp>
-      <p:sp>
-        <p:nvSpPr>
-          <p:cNvPr id="6" name="Text 3"/>
-          <p:cNvSpPr/>
-          <p:nvPr/>
-        </p:nvSpPr>
-        <p:spPr>
-          <a:xfrm>
-            <a:off x="411480" y="4686300"/>
-            <a:ext cx="4572000" cy="274320"/>
-          </a:xfrm>
-          <a:prstGeom prst="rect">
-            <a:avLst/>
-          </a:prstGeom>
-          <a:noFill/>
-          <a:ln/>
-        </p:spPr>
-        <p:txBody>
-          <a:bodyPr wrap="square" rtlCol="0" anchor="ctr"/>
-          <a:lstStyle/>
-          <a:p>
-            <a:pPr indent="0" marL="0">
-              <a:buNone/>
-            </a:pPr>
-            <a:r>
-              <a:rPr lang="en-US" sz="900" dirty="0">
-                <a:solidFill>
-                  <a:srgbClr val="5C6779"/>
-                </a:solidFill>
-                <a:latin typeface="Calibri" pitchFamily="34" charset="0"/>
-                <a:ea typeface="Calibri" pitchFamily="34" charset="-122"/>
-                <a:cs typeface="Calibri" pitchFamily="34" charset="-120"/>
-              </a:rPr>
-              <a:t>TM Pick n Pay Express — Diaspora-to-Door</a:t>
-            </a:r>
-            <a:endParaRPr lang="en-US" sz="900" dirty="0"/>
-          </a:p>
-        </p:txBody>
-      </p:sp>
-      <p:sp>
-        <p:nvSpPr>
-          <p:cNvPr id="7" name="Text 4"/>
-          <p:cNvSpPr/>
-          <p:nvPr/>
-        </p:nvSpPr>
-        <p:spPr>
-          <a:xfrm>
-            <a:off x="4160520" y="4686300"/>
-            <a:ext cx="4572000" cy="274320"/>
-          </a:xfrm>
-          <a:prstGeom prst="rect">
-            <a:avLst/>
-          </a:prstGeom>
-          <a:noFill/>
-          <a:ln/>
-        </p:spPr>
-        <p:txBody>
-          <a:bodyPr wrap="square" rtlCol="0" anchor="ctr"/>
-          <a:lstStyle/>
-          <a:p>
-            <a:pPr algn="r" indent="0" marL="0">
-              <a:buNone/>
-            </a:pPr>
-            <a:r>
-              <a:rPr lang="en-US" sz="900" dirty="0">
-                <a:solidFill>
-                  <a:srgbClr val="5C6779"/>
-                </a:solidFill>
-                <a:latin typeface="Calibri" pitchFamily="34" charset="0"/>
-                <a:ea typeface="Calibri" pitchFamily="34" charset="-122"/>
-                <a:cs typeface="Calibri" pitchFamily="34" charset="-120"/>
-              </a:rPr>
-              <a:t>Confidential · Executive Board Proposal</a:t>
-            </a:r>
-            <a:endParaRPr lang="en-US" sz="900" dirty="0"/>
-          </a:p>
-        </p:txBody>
-      </p:sp>
-      <p:sp>
-        <p:nvSpPr>
-          <p:cNvPr id="8" name="Text 5"/>
-          <p:cNvSpPr/>
-          <p:nvPr/>
-        </p:nvSpPr>
-        <p:spPr>
-          <a:xfrm>
-            <a:off x="411480" y="868680"/>
-            <a:ext cx="8321040" cy="731520"/>
-          </a:xfrm>
-          <a:prstGeom prst="rect">
-            <a:avLst/>
-          </a:prstGeom>
-          <a:noFill/>
-          <a:ln/>
-        </p:spPr>
-        <p:txBody>
-          <a:bodyPr wrap="square" rtlCol="0" anchor="ctr"/>
-          <a:lstStyle/>
-          <a:p>
-            <a:pPr indent="0" marL="0">
-              <a:buNone/>
-            </a:pPr>
-            <a:r>
-              <a:rPr lang="en-US" sz="3000" b="1" dirty="0">
-                <a:solidFill>
-                  <a:srgbClr val="1B3A6B"/>
-                </a:solidFill>
-                <a:latin typeface="Georgia" pitchFamily="34" charset="0"/>
-                <a:ea typeface="Georgia" pitchFamily="34" charset="-122"/>
-                <a:cs typeface="Georgia" pitchFamily="34" charset="-120"/>
-              </a:rPr>
-              <a:t>Trade US$100 a month for five months — earn the handset</a:t>
-            </a:r>
-            <a:endParaRPr lang="en-US" sz="3000" dirty="0"/>
-          </a:p>
-        </p:txBody>
-      </p:sp>
-      <p:sp>
-        <p:nvSpPr>
-          <p:cNvPr id="9" name="Shape 6"/>
-          <p:cNvSpPr/>
-          <p:nvPr/>
-        </p:nvSpPr>
-        <p:spPr>
-          <a:xfrm>
-            <a:off x="411480" y="1691640"/>
-            <a:ext cx="1554480" cy="914400"/>
-          </a:xfrm>
-          <a:prstGeom prst="roundRect">
-            <a:avLst>
-              <a:gd name="adj" fmla="val 8000"/>
-            </a:avLst>
-          </a:prstGeom>
-          <a:solidFill>
-            <a:srgbClr val="FFFFFF"/>
-          </a:solidFill>
-          <a:ln w="12700">
-            <a:solidFill>
-              <a:srgbClr val="E2E5EB"/>
-            </a:solidFill>
-            <a:prstDash val="solid"/>
-          </a:ln>
-        </p:spPr>
-      </p:sp>
-      <p:sp>
-        <p:nvSpPr>
-          <p:cNvPr id="10" name="Text 7"/>
-          <p:cNvSpPr/>
-          <p:nvPr/>
-        </p:nvSpPr>
-        <p:spPr>
-          <a:xfrm>
-            <a:off x="411480" y="1847088"/>
-            <a:ext cx="1554480" cy="292608"/>
-          </a:xfrm>
-          <a:prstGeom prst="rect">
-            <a:avLst/>
-          </a:prstGeom>
-          <a:noFill/>
-          <a:ln/>
-        </p:spPr>
-        <p:txBody>
-          <a:bodyPr wrap="square" lIns="0" tIns="0" rIns="0" bIns="0" rtlCol="0" anchor="ctr"/>
-          <a:lstStyle/>
-          <a:p>
-            <a:pPr algn="ctr" indent="0" marL="0">
-              <a:buNone/>
-            </a:pPr>
-            <a:r>
-              <a:rPr lang="en-US" sz="1300" b="1" dirty="0">
-                <a:solidFill>
-                  <a:srgbClr val="16233A"/>
-                </a:solidFill>
-                <a:latin typeface="Georgia" pitchFamily="34" charset="0"/>
-                <a:ea typeface="Georgia" pitchFamily="34" charset="-122"/>
-                <a:cs typeface="Georgia" pitchFamily="34" charset="-120"/>
-              </a:rPr>
-              <a:t>Month 1</a:t>
-            </a:r>
-            <a:endParaRPr lang="en-US" sz="1300" dirty="0"/>
-          </a:p>
-        </p:txBody>
-      </p:sp>
-      <p:sp>
-        <p:nvSpPr>
-          <p:cNvPr id="11" name="Text 8"/>
-          <p:cNvSpPr/>
-          <p:nvPr/>
-        </p:nvSpPr>
-        <p:spPr>
-          <a:xfrm>
-            <a:off x="548640" y="2157984"/>
-            <a:ext cx="1280160" cy="384048"/>
-          </a:xfrm>
-          <a:prstGeom prst="rect">
-            <a:avLst/>
-          </a:prstGeom>
-          <a:noFill/>
-          <a:ln/>
-        </p:spPr>
-        <p:txBody>
-          <a:bodyPr wrap="square" lIns="0" tIns="0" rIns="0" bIns="0" rtlCol="0" anchor="ctr"/>
-          <a:lstStyle/>
-          <a:p>
-            <a:pPr algn="ctr" indent="0" marL="0">
-              <a:buNone/>
-            </a:pPr>
-            <a:r>
-              <a:rPr lang="en-US" sz="900" dirty="0">
-                <a:solidFill>
-                  <a:srgbClr val="5C6779"/>
-                </a:solidFill>
-                <a:latin typeface="Calibri" pitchFamily="34" charset="0"/>
-                <a:ea typeface="Calibri" pitchFamily="34" charset="-122"/>
-                <a:cs typeface="Calibri" pitchFamily="34" charset="-120"/>
-              </a:rPr>
-              <a:t>US$100 traded</a:t>
-            </a:r>
-            <a:endParaRPr lang="en-US" sz="900" dirty="0"/>
-          </a:p>
-        </p:txBody>
-      </p:sp>
-      <p:sp>
-        <p:nvSpPr>
-          <p:cNvPr id="12" name="Shape 9"/>
-          <p:cNvSpPr/>
-          <p:nvPr/>
-        </p:nvSpPr>
-        <p:spPr>
-          <a:xfrm>
-            <a:off x="2103120" y="1691640"/>
-            <a:ext cx="1554480" cy="914400"/>
-          </a:xfrm>
-          <a:prstGeom prst="roundRect">
-            <a:avLst>
-              <a:gd name="adj" fmla="val 8000"/>
-            </a:avLst>
-          </a:prstGeom>
-          <a:solidFill>
-            <a:srgbClr val="FFFFFF"/>
-          </a:solidFill>
-          <a:ln w="12700">
-            <a:solidFill>
-              <a:srgbClr val="E2E5EB"/>
-            </a:solidFill>
-            <a:prstDash val="solid"/>
-          </a:ln>
-        </p:spPr>
-      </p:sp>
-      <p:sp>
-        <p:nvSpPr>
-          <p:cNvPr id="13" name="Text 10"/>
-          <p:cNvSpPr/>
-          <p:nvPr/>
-        </p:nvSpPr>
-        <p:spPr>
-          <a:xfrm>
-            <a:off x="2103120" y="1847088"/>
-            <a:ext cx="1554480" cy="292608"/>
-          </a:xfrm>
-          <a:prstGeom prst="rect">
-            <a:avLst/>
-          </a:prstGeom>
-          <a:noFill/>
-          <a:ln/>
-        </p:spPr>
-        <p:txBody>
-          <a:bodyPr wrap="square" lIns="0" tIns="0" rIns="0" bIns="0" rtlCol="0" anchor="ctr"/>
-          <a:lstStyle/>
-          <a:p>
-            <a:pPr algn="ctr" indent="0" marL="0">
-              <a:buNone/>
-            </a:pPr>
-            <a:r>
-              <a:rPr lang="en-US" sz="1300" b="1" dirty="0">
-                <a:solidFill>
-                  <a:srgbClr val="16233A"/>
-                </a:solidFill>
-                <a:latin typeface="Georgia" pitchFamily="34" charset="0"/>
-                <a:ea typeface="Georgia" pitchFamily="34" charset="-122"/>
-                <a:cs typeface="Georgia" pitchFamily="34" charset="-120"/>
-              </a:rPr>
-              <a:t>Month 2</a:t>
-            </a:r>
-            <a:endParaRPr lang="en-US" sz="1300" dirty="0"/>
-          </a:p>
-        </p:txBody>
-      </p:sp>
-      <p:sp>
-        <p:nvSpPr>
-          <p:cNvPr id="14" name="Text 11"/>
-          <p:cNvSpPr/>
-          <p:nvPr/>
-        </p:nvSpPr>
-        <p:spPr>
-          <a:xfrm>
-            <a:off x="2240280" y="2157984"/>
-            <a:ext cx="1280160" cy="384048"/>
-          </a:xfrm>
-          <a:prstGeom prst="rect">
-            <a:avLst/>
-          </a:prstGeom>
-          <a:noFill/>
-          <a:ln/>
-        </p:spPr>
-        <p:txBody>
-          <a:bodyPr wrap="square" lIns="0" tIns="0" rIns="0" bIns="0" rtlCol="0" anchor="ctr"/>
-          <a:lstStyle/>
-          <a:p>
-            <a:pPr algn="ctr" indent="0" marL="0">
-              <a:buNone/>
-            </a:pPr>
-            <a:r>
-              <a:rPr lang="en-US" sz="900" dirty="0">
-                <a:solidFill>
-                  <a:srgbClr val="5C6779"/>
-                </a:solidFill>
-                <a:latin typeface="Calibri" pitchFamily="34" charset="0"/>
-                <a:ea typeface="Calibri" pitchFamily="34" charset="-122"/>
-                <a:cs typeface="Calibri" pitchFamily="34" charset="-120"/>
-              </a:rPr>
-              <a:t>US$100 traded</a:t>
-            </a:r>
-            <a:endParaRPr lang="en-US" sz="900" dirty="0"/>
-          </a:p>
-        </p:txBody>
-      </p:sp>
-      <p:sp>
-        <p:nvSpPr>
-          <p:cNvPr id="15" name="Shape 12"/>
-          <p:cNvSpPr/>
-          <p:nvPr/>
-        </p:nvSpPr>
-        <p:spPr>
-          <a:xfrm>
-            <a:off x="3794760" y="1691640"/>
-            <a:ext cx="1554480" cy="914400"/>
-          </a:xfrm>
-          <a:prstGeom prst="roundRect">
-            <a:avLst>
-              <a:gd name="adj" fmla="val 8000"/>
-            </a:avLst>
-          </a:prstGeom>
-          <a:solidFill>
-            <a:srgbClr val="FFFFFF"/>
-          </a:solidFill>
-          <a:ln w="12700">
-            <a:solidFill>
-              <a:srgbClr val="E2E5EB"/>
-            </a:solidFill>
-            <a:prstDash val="solid"/>
-          </a:ln>
-        </p:spPr>
-      </p:sp>
-      <p:sp>
-        <p:nvSpPr>
-          <p:cNvPr id="16" name="Text 13"/>
-          <p:cNvSpPr/>
-          <p:nvPr/>
-        </p:nvSpPr>
-        <p:spPr>
-          <a:xfrm>
-            <a:off x="3794760" y="1847088"/>
-            <a:ext cx="1554480" cy="292608"/>
-          </a:xfrm>
-          <a:prstGeom prst="rect">
-            <a:avLst/>
-          </a:prstGeom>
-          <a:noFill/>
-          <a:ln/>
-        </p:spPr>
-        <p:txBody>
-          <a:bodyPr wrap="square" lIns="0" tIns="0" rIns="0" bIns="0" rtlCol="0" anchor="ctr"/>
-          <a:lstStyle/>
-          <a:p>
-            <a:pPr algn="ctr" indent="0" marL="0">
-              <a:buNone/>
-            </a:pPr>
-            <a:r>
-              <a:rPr lang="en-US" sz="1300" b="1" dirty="0">
-                <a:solidFill>
-                  <a:srgbClr val="16233A"/>
-                </a:solidFill>
-                <a:latin typeface="Georgia" pitchFamily="34" charset="0"/>
-                <a:ea typeface="Georgia" pitchFamily="34" charset="-122"/>
-                <a:cs typeface="Georgia" pitchFamily="34" charset="-120"/>
-              </a:rPr>
-              <a:t>Month 3</a:t>
-            </a:r>
-            <a:endParaRPr lang="en-US" sz="1300" dirty="0"/>
-          </a:p>
-        </p:txBody>
-      </p:sp>
-      <p:sp>
-        <p:nvSpPr>
-          <p:cNvPr id="17" name="Text 14"/>
-          <p:cNvSpPr/>
-          <p:nvPr/>
-        </p:nvSpPr>
-        <p:spPr>
-          <a:xfrm>
-            <a:off x="3931920" y="2157984"/>
-            <a:ext cx="1280160" cy="384048"/>
-          </a:xfrm>
-          <a:prstGeom prst="rect">
-            <a:avLst/>
-          </a:prstGeom>
-          <a:noFill/>
-          <a:ln/>
-        </p:spPr>
-        <p:txBody>
-          <a:bodyPr wrap="square" lIns="0" tIns="0" rIns="0" bIns="0" rtlCol="0" anchor="ctr"/>
-          <a:lstStyle/>
-          <a:p>
-            <a:pPr algn="ctr" indent="0" marL="0">
-              <a:buNone/>
-            </a:pPr>
-            <a:r>
-              <a:rPr lang="en-US" sz="900" dirty="0">
-                <a:solidFill>
-                  <a:srgbClr val="5C6779"/>
-                </a:solidFill>
-                <a:latin typeface="Calibri" pitchFamily="34" charset="0"/>
-                <a:ea typeface="Calibri" pitchFamily="34" charset="-122"/>
-                <a:cs typeface="Calibri" pitchFamily="34" charset="-120"/>
-              </a:rPr>
-              <a:t>US$100 traded</a:t>
-            </a:r>
-            <a:endParaRPr lang="en-US" sz="900" dirty="0"/>
-          </a:p>
-        </p:txBody>
-      </p:sp>
-      <p:sp>
-        <p:nvSpPr>
-          <p:cNvPr id="18" name="Shape 15"/>
-          <p:cNvSpPr/>
-          <p:nvPr/>
-        </p:nvSpPr>
-        <p:spPr>
-          <a:xfrm>
-            <a:off x="5486400" y="1691640"/>
-            <a:ext cx="1554480" cy="914400"/>
-          </a:xfrm>
-          <a:prstGeom prst="roundRect">
-            <a:avLst>
-              <a:gd name="adj" fmla="val 8000"/>
-            </a:avLst>
-          </a:prstGeom>
-          <a:solidFill>
-            <a:srgbClr val="FFFFFF"/>
-          </a:solidFill>
-          <a:ln w="12700">
-            <a:solidFill>
-              <a:srgbClr val="E2E5EB"/>
-            </a:solidFill>
-            <a:prstDash val="solid"/>
-          </a:ln>
-        </p:spPr>
-      </p:sp>
-      <p:sp>
-        <p:nvSpPr>
-          <p:cNvPr id="19" name="Text 16"/>
-          <p:cNvSpPr/>
-          <p:nvPr/>
-        </p:nvSpPr>
-        <p:spPr>
-          <a:xfrm>
-            <a:off x="5486400" y="1847088"/>
-            <a:ext cx="1554480" cy="292608"/>
-          </a:xfrm>
-          <a:prstGeom prst="rect">
-            <a:avLst/>
-          </a:prstGeom>
-          <a:noFill/>
-          <a:ln/>
-        </p:spPr>
-        <p:txBody>
-          <a:bodyPr wrap="square" lIns="0" tIns="0" rIns="0" bIns="0" rtlCol="0" anchor="ctr"/>
-          <a:lstStyle/>
-          <a:p>
-            <a:pPr algn="ctr" indent="0" marL="0">
-              <a:buNone/>
-            </a:pPr>
-            <a:r>
-              <a:rPr lang="en-US" sz="1300" b="1" dirty="0">
-                <a:solidFill>
-                  <a:srgbClr val="16233A"/>
-                </a:solidFill>
-                <a:latin typeface="Georgia" pitchFamily="34" charset="0"/>
-                <a:ea typeface="Georgia" pitchFamily="34" charset="-122"/>
-                <a:cs typeface="Georgia" pitchFamily="34" charset="-120"/>
-              </a:rPr>
-              <a:t>Month 4</a:t>
-            </a:r>
-            <a:endParaRPr lang="en-US" sz="1300" dirty="0"/>
-          </a:p>
-        </p:txBody>
-      </p:sp>
-      <p:sp>
-        <p:nvSpPr>
-          <p:cNvPr id="20" name="Text 17"/>
-          <p:cNvSpPr/>
-          <p:nvPr/>
-        </p:nvSpPr>
-        <p:spPr>
-          <a:xfrm>
-            <a:off x="5623560" y="2157984"/>
-            <a:ext cx="1280160" cy="384048"/>
-          </a:xfrm>
-          <a:prstGeom prst="rect">
-            <a:avLst/>
-          </a:prstGeom>
-          <a:noFill/>
-          <a:ln/>
-        </p:spPr>
-        <p:txBody>
-          <a:bodyPr wrap="square" lIns="0" tIns="0" rIns="0" bIns="0" rtlCol="0" anchor="ctr"/>
-          <a:lstStyle/>
-          <a:p>
-            <a:pPr algn="ctr" indent="0" marL="0">
-              <a:buNone/>
-            </a:pPr>
-            <a:r>
-              <a:rPr lang="en-US" sz="900" dirty="0">
-                <a:solidFill>
-                  <a:srgbClr val="5C6779"/>
-                </a:solidFill>
-                <a:latin typeface="Calibri" pitchFamily="34" charset="0"/>
-                <a:ea typeface="Calibri" pitchFamily="34" charset="-122"/>
-                <a:cs typeface="Calibri" pitchFamily="34" charset="-120"/>
-              </a:rPr>
-              <a:t>US$100 traded</a:t>
-            </a:r>
-            <a:endParaRPr lang="en-US" sz="900" dirty="0"/>
-          </a:p>
-        </p:txBody>
-      </p:sp>
-      <p:sp>
-        <p:nvSpPr>
-          <p:cNvPr id="21" name="Shape 18"/>
-          <p:cNvSpPr/>
-          <p:nvPr/>
-        </p:nvSpPr>
-        <p:spPr>
-          <a:xfrm>
-            <a:off x="7178040" y="1691640"/>
-            <a:ext cx="1554480" cy="914400"/>
-          </a:xfrm>
-          <a:prstGeom prst="roundRect">
-            <a:avLst>
-              <a:gd name="adj" fmla="val 8000"/>
+              <a:gd name="adj" fmla="val 12308"/>
             </a:avLst>
           </a:prstGeom>
           <a:solidFill>
@@ -13135,8 +13816,8 @@
         </p:nvSpPr>
         <p:spPr>
           <a:xfrm>
-            <a:off x="7178040" y="1847088"/>
-            <a:ext cx="1554480" cy="292608"/>
+            <a:off x="685800" y="4069080"/>
+            <a:ext cx="7772400" cy="411480"/>
           </a:xfrm>
           <a:prstGeom prst="rect">
             <a:avLst/>
@@ -13148,7 +13829,7 @@
           <a:bodyPr wrap="square" lIns="0" tIns="0" rIns="0" bIns="0" rtlCol="0" anchor="ctr"/>
           <a:lstStyle/>
           <a:p>
-            <a:pPr algn="ctr" indent="0" marL="0">
+            <a:pPr indent="0" marL="0">
               <a:buNone/>
             </a:pPr>
             <a:r>
@@ -13160,444 +13841,9 @@
                 <a:ea typeface="Georgia" pitchFamily="34" charset="-122"/>
                 <a:cs typeface="Georgia" pitchFamily="34" charset="-120"/>
               </a:rPr>
-              <a:t>Month 5</a:t>
+              <a:t>Same ecosystem, valued differently: transaction fees fund a project, recurring fees fund a company.</a:t>
             </a:r>
             <a:endParaRPr lang="en-US" sz="1300" dirty="0"/>
-          </a:p>
-        </p:txBody>
-      </p:sp>
-      <p:sp>
-        <p:nvSpPr>
-          <p:cNvPr id="23" name="Text 20"/>
-          <p:cNvSpPr/>
-          <p:nvPr/>
-        </p:nvSpPr>
-        <p:spPr>
-          <a:xfrm>
-            <a:off x="7315200" y="2157984"/>
-            <a:ext cx="1280160" cy="384048"/>
-          </a:xfrm>
-          <a:prstGeom prst="rect">
-            <a:avLst/>
-          </a:prstGeom>
-          <a:noFill/>
-          <a:ln/>
-        </p:spPr>
-        <p:txBody>
-          <a:bodyPr wrap="square" lIns="0" tIns="0" rIns="0" bIns="0" rtlCol="0" anchor="ctr"/>
-          <a:lstStyle/>
-          <a:p>
-            <a:pPr algn="ctr" indent="0" marL="0">
-              <a:buNone/>
-            </a:pPr>
-            <a:r>
-              <a:rPr lang="en-US" sz="900" dirty="0">
-                <a:solidFill>
-                  <a:srgbClr val="FDE7EC"/>
-                </a:solidFill>
-                <a:latin typeface="Calibri" pitchFamily="34" charset="0"/>
-                <a:ea typeface="Calibri" pitchFamily="34" charset="-122"/>
-                <a:cs typeface="Calibri" pitchFamily="34" charset="-120"/>
-              </a:rPr>
-              <a:t>5G-lite smartphone awarded</a:t>
-            </a:r>
-            <a:endParaRPr lang="en-US" sz="900" dirty="0"/>
-          </a:p>
-        </p:txBody>
-      </p:sp>
-      <p:sp>
-        <p:nvSpPr>
-          <p:cNvPr id="24" name="Shape 21"/>
-          <p:cNvSpPr/>
-          <p:nvPr/>
-        </p:nvSpPr>
-        <p:spPr>
-          <a:xfrm>
-            <a:off x="411480" y="2788920"/>
-            <a:ext cx="2651760" cy="1828800"/>
-          </a:xfrm>
-          <a:prstGeom prst="roundRect">
-            <a:avLst>
-              <a:gd name="adj" fmla="val 4000"/>
-            </a:avLst>
-          </a:prstGeom>
-          <a:solidFill>
-            <a:srgbClr val="FFFFFF"/>
-          </a:solidFill>
-          <a:ln w="12700">
-            <a:solidFill>
-              <a:srgbClr val="E2E5EB"/>
-            </a:solidFill>
-            <a:prstDash val="solid"/>
-          </a:ln>
-        </p:spPr>
-      </p:sp>
-      <p:sp>
-        <p:nvSpPr>
-          <p:cNvPr id="25" name="Shape 22"/>
-          <p:cNvSpPr/>
-          <p:nvPr/>
-        </p:nvSpPr>
-        <p:spPr>
-          <a:xfrm>
-            <a:off x="640080" y="3017520"/>
-            <a:ext cx="411480" cy="54864"/>
-          </a:xfrm>
-          <a:prstGeom prst="roundRect">
-            <a:avLst>
-              <a:gd name="adj" fmla="val 50000"/>
-            </a:avLst>
-          </a:prstGeom>
-          <a:solidFill>
-            <a:srgbClr val="1B3A6B"/>
-          </a:solidFill>
-          <a:ln w="12700">
-            <a:solidFill>
-              <a:srgbClr val="1B3A6B"/>
-            </a:solidFill>
-            <a:prstDash val="solid"/>
-          </a:ln>
-        </p:spPr>
-      </p:sp>
-      <p:sp>
-        <p:nvSpPr>
-          <p:cNvPr id="26" name="Text 23"/>
-          <p:cNvSpPr/>
-          <p:nvPr/>
-        </p:nvSpPr>
-        <p:spPr>
-          <a:xfrm>
-            <a:off x="640080" y="3172968"/>
-            <a:ext cx="2194560" cy="530352"/>
-          </a:xfrm>
-          <a:prstGeom prst="rect">
-            <a:avLst/>
-          </a:prstGeom>
-          <a:noFill/>
-          <a:ln/>
-        </p:spPr>
-        <p:txBody>
-          <a:bodyPr wrap="square" lIns="0" tIns="0" rIns="0" bIns="0" rtlCol="0" anchor="t"/>
-          <a:lstStyle/>
-          <a:p>
-            <a:pPr indent="0" marL="0">
-              <a:buNone/>
-            </a:pPr>
-            <a:r>
-              <a:rPr lang="en-US" sz="1400" b="1" dirty="0">
-                <a:solidFill>
-                  <a:srgbClr val="1B3A6B"/>
-                </a:solidFill>
-                <a:latin typeface="Georgia" pitchFamily="34" charset="0"/>
-                <a:ea typeface="Georgia" pitchFamily="34" charset="-122"/>
-                <a:cs typeface="Georgia" pitchFamily="34" charset="-120"/>
-              </a:rPr>
-              <a:t>Discovery-Vitality mechanics</a:t>
-            </a:r>
-            <a:endParaRPr lang="en-US" sz="1400" dirty="0"/>
-          </a:p>
-        </p:txBody>
-      </p:sp>
-      <p:sp>
-        <p:nvSpPr>
-          <p:cNvPr id="27" name="Text 24"/>
-          <p:cNvSpPr/>
-          <p:nvPr/>
-        </p:nvSpPr>
-        <p:spPr>
-          <a:xfrm>
-            <a:off x="640080" y="3749040"/>
-            <a:ext cx="2194560" cy="640080"/>
-          </a:xfrm>
-          <a:prstGeom prst="rect">
-            <a:avLst/>
-          </a:prstGeom>
-          <a:noFill/>
-          <a:ln/>
-        </p:spPr>
-        <p:txBody>
-          <a:bodyPr wrap="square" lIns="0" tIns="0" rIns="0" bIns="0" rtlCol="0" anchor="t"/>
-          <a:lstStyle/>
-          <a:p>
-            <a:pPr indent="0" marL="0">
-              <a:buNone/>
-            </a:pPr>
-            <a:r>
-              <a:rPr lang="en-US" sz="1200" dirty="0">
-                <a:solidFill>
-                  <a:srgbClr val="5C6779"/>
-                </a:solidFill>
-                <a:latin typeface="Calibri" pitchFamily="34" charset="0"/>
-                <a:ea typeface="Calibri" pitchFamily="34" charset="-122"/>
-                <a:cs typeface="Calibri" pitchFamily="34" charset="-120"/>
-              </a:rPr>
-              <a:t>Consecutive qualifying months unlock the reward. Behaviour is earned, not bought, and the tier resets if trading lapses.</a:t>
-            </a:r>
-            <a:endParaRPr lang="en-US" sz="1200" dirty="0"/>
-          </a:p>
-        </p:txBody>
-      </p:sp>
-      <p:sp>
-        <p:nvSpPr>
-          <p:cNvPr id="28" name="Shape 25"/>
-          <p:cNvSpPr/>
-          <p:nvPr/>
-        </p:nvSpPr>
-        <p:spPr>
-          <a:xfrm>
-            <a:off x="3246120" y="2788920"/>
-            <a:ext cx="2651760" cy="1828800"/>
-          </a:xfrm>
-          <a:prstGeom prst="roundRect">
-            <a:avLst>
-              <a:gd name="adj" fmla="val 4000"/>
-            </a:avLst>
-          </a:prstGeom>
-          <a:solidFill>
-            <a:srgbClr val="FFFFFF"/>
-          </a:solidFill>
-          <a:ln w="12700">
-            <a:solidFill>
-              <a:srgbClr val="E2E5EB"/>
-            </a:solidFill>
-            <a:prstDash val="solid"/>
-          </a:ln>
-        </p:spPr>
-      </p:sp>
-      <p:sp>
-        <p:nvSpPr>
-          <p:cNvPr id="29" name="Shape 26"/>
-          <p:cNvSpPr/>
-          <p:nvPr/>
-        </p:nvSpPr>
-        <p:spPr>
-          <a:xfrm>
-            <a:off x="3474720" y="3017520"/>
-            <a:ext cx="411480" cy="54864"/>
-          </a:xfrm>
-          <a:prstGeom prst="roundRect">
-            <a:avLst>
-              <a:gd name="adj" fmla="val 50000"/>
-            </a:avLst>
-          </a:prstGeom>
-          <a:solidFill>
-            <a:srgbClr val="D0103A"/>
-          </a:solidFill>
-          <a:ln w="12700">
-            <a:solidFill>
-              <a:srgbClr val="D0103A"/>
-            </a:solidFill>
-            <a:prstDash val="solid"/>
-          </a:ln>
-        </p:spPr>
-      </p:sp>
-      <p:sp>
-        <p:nvSpPr>
-          <p:cNvPr id="30" name="Text 27"/>
-          <p:cNvSpPr/>
-          <p:nvPr/>
-        </p:nvSpPr>
-        <p:spPr>
-          <a:xfrm>
-            <a:off x="3474720" y="3172968"/>
-            <a:ext cx="2194560" cy="530352"/>
-          </a:xfrm>
-          <a:prstGeom prst="rect">
-            <a:avLst/>
-          </a:prstGeom>
-          <a:noFill/>
-          <a:ln/>
-        </p:spPr>
-        <p:txBody>
-          <a:bodyPr wrap="square" lIns="0" tIns="0" rIns="0" bIns="0" rtlCol="0" anchor="t"/>
-          <a:lstStyle/>
-          <a:p>
-            <a:pPr indent="0" marL="0">
-              <a:buNone/>
-            </a:pPr>
-            <a:r>
-              <a:rPr lang="en-US" sz="1400" b="1" dirty="0">
-                <a:solidFill>
-                  <a:srgbClr val="1B3A6B"/>
-                </a:solidFill>
-                <a:latin typeface="Georgia" pitchFamily="34" charset="0"/>
-                <a:ea typeface="Georgia" pitchFamily="34" charset="-122"/>
-                <a:cs typeface="Georgia" pitchFamily="34" charset="-120"/>
-              </a:rPr>
-              <a:t>Family basket sharing</a:t>
-            </a:r>
-            <a:endParaRPr lang="en-US" sz="1400" dirty="0"/>
-          </a:p>
-        </p:txBody>
-      </p:sp>
-      <p:sp>
-        <p:nvSpPr>
-          <p:cNvPr id="31" name="Text 28"/>
-          <p:cNvSpPr/>
-          <p:nvPr/>
-        </p:nvSpPr>
-        <p:spPr>
-          <a:xfrm>
-            <a:off x="3474720" y="3749040"/>
-            <a:ext cx="2194560" cy="640080"/>
-          </a:xfrm>
-          <a:prstGeom prst="rect">
-            <a:avLst/>
-          </a:prstGeom>
-          <a:noFill/>
-          <a:ln/>
-        </p:spPr>
-        <p:txBody>
-          <a:bodyPr wrap="square" lIns="0" tIns="0" rIns="0" bIns="0" rtlCol="0" anchor="t"/>
-          <a:lstStyle/>
-          <a:p>
-            <a:pPr indent="0" marL="0">
-              <a:buNone/>
-            </a:pPr>
-            <a:r>
-              <a:rPr lang="en-US" sz="1200" dirty="0">
-                <a:solidFill>
-                  <a:srgbClr val="5C6779"/>
-                </a:solidFill>
-                <a:latin typeface="Calibri" pitchFamily="34" charset="0"/>
-                <a:ea typeface="Calibri" pitchFamily="34" charset="-122"/>
-                <a:cs typeface="Calibri" pitchFamily="34" charset="-120"/>
-              </a:rPr>
-              <a:t>Several household members contribute to one qualifying basket, so families reach the threshold faster and consolidate spend on the platform.</a:t>
-            </a:r>
-            <a:endParaRPr lang="en-US" sz="1200" dirty="0"/>
-          </a:p>
-        </p:txBody>
-      </p:sp>
-      <p:sp>
-        <p:nvSpPr>
-          <p:cNvPr id="32" name="Shape 29"/>
-          <p:cNvSpPr/>
-          <p:nvPr/>
-        </p:nvSpPr>
-        <p:spPr>
-          <a:xfrm>
-            <a:off x="6080760" y="2788920"/>
-            <a:ext cx="2651760" cy="1828800"/>
-          </a:xfrm>
-          <a:prstGeom prst="roundRect">
-            <a:avLst>
-              <a:gd name="adj" fmla="val 4000"/>
-            </a:avLst>
-          </a:prstGeom>
-          <a:solidFill>
-            <a:srgbClr val="FFFFFF"/>
-          </a:solidFill>
-          <a:ln w="12700">
-            <a:solidFill>
-              <a:srgbClr val="E2E5EB"/>
-            </a:solidFill>
-            <a:prstDash val="solid"/>
-          </a:ln>
-        </p:spPr>
-      </p:sp>
-      <p:sp>
-        <p:nvSpPr>
-          <p:cNvPr id="33" name="Shape 30"/>
-          <p:cNvSpPr/>
-          <p:nvPr/>
-        </p:nvSpPr>
-        <p:spPr>
-          <a:xfrm>
-            <a:off x="6309360" y="3017520"/>
-            <a:ext cx="411480" cy="54864"/>
-          </a:xfrm>
-          <a:prstGeom prst="roundRect">
-            <a:avLst>
-              <a:gd name="adj" fmla="val 50000"/>
-            </a:avLst>
-          </a:prstGeom>
-          <a:solidFill>
-            <a:srgbClr val="1B3A6B"/>
-          </a:solidFill>
-          <a:ln w="12700">
-            <a:solidFill>
-              <a:srgbClr val="1B3A6B"/>
-            </a:solidFill>
-            <a:prstDash val="solid"/>
-          </a:ln>
-        </p:spPr>
-      </p:sp>
-      <p:sp>
-        <p:nvSpPr>
-          <p:cNvPr id="34" name="Text 31"/>
-          <p:cNvSpPr/>
-          <p:nvPr/>
-        </p:nvSpPr>
-        <p:spPr>
-          <a:xfrm>
-            <a:off x="6309360" y="3172968"/>
-            <a:ext cx="2194560" cy="530352"/>
-          </a:xfrm>
-          <a:prstGeom prst="rect">
-            <a:avLst/>
-          </a:prstGeom>
-          <a:noFill/>
-          <a:ln/>
-        </p:spPr>
-        <p:txBody>
-          <a:bodyPr wrap="square" lIns="0" tIns="0" rIns="0" bIns="0" rtlCol="0" anchor="t"/>
-          <a:lstStyle/>
-          <a:p>
-            <a:pPr indent="0" marL="0">
-              <a:buNone/>
-            </a:pPr>
-            <a:r>
-              <a:rPr lang="en-US" sz="1400" b="1" dirty="0">
-                <a:solidFill>
-                  <a:srgbClr val="1B3A6B"/>
-                </a:solidFill>
-                <a:latin typeface="Georgia" pitchFamily="34" charset="0"/>
-                <a:ea typeface="Georgia" pitchFamily="34" charset="-122"/>
-                <a:cs typeface="Georgia" pitchFamily="34" charset="-120"/>
-              </a:rPr>
-              <a:t>The real purpose</a:t>
-            </a:r>
-            <a:endParaRPr lang="en-US" sz="1400" dirty="0"/>
-          </a:p>
-        </p:txBody>
-      </p:sp>
-      <p:sp>
-        <p:nvSpPr>
-          <p:cNvPr id="35" name="Text 32"/>
-          <p:cNvSpPr/>
-          <p:nvPr/>
-        </p:nvSpPr>
-        <p:spPr>
-          <a:xfrm>
-            <a:off x="6309360" y="3749040"/>
-            <a:ext cx="2194560" cy="640080"/>
-          </a:xfrm>
-          <a:prstGeom prst="rect">
-            <a:avLst/>
-          </a:prstGeom>
-          <a:noFill/>
-          <a:ln/>
-        </p:spPr>
-        <p:txBody>
-          <a:bodyPr wrap="square" lIns="0" tIns="0" rIns="0" bIns="0" rtlCol="0" anchor="t"/>
-          <a:lstStyle/>
-          <a:p>
-            <a:pPr indent="0" marL="0">
-              <a:buNone/>
-            </a:pPr>
-            <a:r>
-              <a:rPr lang="en-US" sz="1200" dirty="0">
-                <a:solidFill>
-                  <a:srgbClr val="5C6779"/>
-                </a:solidFill>
-                <a:latin typeface="Calibri" pitchFamily="34" charset="0"/>
-                <a:ea typeface="Calibri" pitchFamily="34" charset="-122"/>
-                <a:cs typeface="Calibri" pitchFamily="34" charset="-120"/>
-              </a:rPr>
-              <a:t>A ~US$50 landed handset with the markup absorbed migrates 2G and 3G users onto the platform. Device cost is customer acquisition, booked as such.</a:t>
-            </a:r>
-            <a:endParaRPr lang="en-US" sz="1200" dirty="0"/>
           </a:p>
         </p:txBody>
       </p:sp>
@@ -13914,7 +14160,7 @@
         </p:nvSpPr>
         <p:spPr>
           <a:xfrm>
-            <a:off x="640080" y="1965960"/>
+            <a:off x="640080" y="1920240"/>
             <a:ext cx="411480" cy="54864"/>
           </a:xfrm>
           <a:prstGeom prst="roundRect">
@@ -13941,7 +14187,7 @@
         </p:nvSpPr>
         <p:spPr>
           <a:xfrm>
-            <a:off x="640080" y="2121408"/>
+            <a:off x="640080" y="2066544"/>
             <a:ext cx="2194560" cy="530352"/>
           </a:xfrm>
           <a:prstGeom prst="rect">
@@ -13980,8 +14226,8 @@
         </p:nvSpPr>
         <p:spPr>
           <a:xfrm>
-            <a:off x="640080" y="2697480"/>
-            <a:ext cx="2194560" cy="640080"/>
+            <a:off x="640080" y="2633472"/>
+            <a:ext cx="2194560" cy="768096"/>
           </a:xfrm>
           <a:prstGeom prst="rect">
             <a:avLst/>
@@ -14046,7 +14292,7 @@
         </p:nvSpPr>
         <p:spPr>
           <a:xfrm>
-            <a:off x="3429000" y="1965960"/>
+            <a:off x="3429000" y="1920240"/>
             <a:ext cx="411480" cy="54864"/>
           </a:xfrm>
           <a:prstGeom prst="roundRect">
@@ -14073,7 +14319,7 @@
         </p:nvSpPr>
         <p:spPr>
           <a:xfrm>
-            <a:off x="3429000" y="2121408"/>
+            <a:off x="3429000" y="2066544"/>
             <a:ext cx="2194560" cy="530352"/>
           </a:xfrm>
           <a:prstGeom prst="rect">
@@ -14112,8 +14358,8 @@
         </p:nvSpPr>
         <p:spPr>
           <a:xfrm>
-            <a:off x="3429000" y="2697480"/>
-            <a:ext cx="2194560" cy="640080"/>
+            <a:off x="3429000" y="2633472"/>
+            <a:ext cx="2194560" cy="768096"/>
           </a:xfrm>
           <a:prstGeom prst="rect">
             <a:avLst/>
@@ -14178,7 +14424,7 @@
         </p:nvSpPr>
         <p:spPr>
           <a:xfrm>
-            <a:off x="6217920" y="1965960"/>
+            <a:off x="6217920" y="1920240"/>
             <a:ext cx="411480" cy="54864"/>
           </a:xfrm>
           <a:prstGeom prst="roundRect">
@@ -14205,7 +14451,7 @@
         </p:nvSpPr>
         <p:spPr>
           <a:xfrm>
-            <a:off x="6217920" y="2121408"/>
+            <a:off x="6217920" y="2066544"/>
             <a:ext cx="2194560" cy="530352"/>
           </a:xfrm>
           <a:prstGeom prst="rect">
@@ -14244,8 +14490,8 @@
         </p:nvSpPr>
         <p:spPr>
           <a:xfrm>
-            <a:off x="6217920" y="2697480"/>
-            <a:ext cx="2194560" cy="640080"/>
+            <a:off x="6217920" y="2633472"/>
+            <a:ext cx="2194560" cy="768096"/>
           </a:xfrm>
           <a:prstGeom prst="rect">
             <a:avLst/>
@@ -14414,7 +14660,7 @@
                 <a:ea typeface="Calibri" pitchFamily="34" charset="-122"/>
                 <a:cs typeface="Calibri" pitchFamily="34" charset="-120"/>
               </a:rPr>
-              <a:t>SLIDE 20 · PAYMENT RAILS</a:t>
+              <a:t>SLIDE 20 · OWNED DELIVERY NETWORK</a:t>
             </a:r>
             <a:endParaRPr lang="en-US" sz="1100" dirty="0"/>
           </a:p>
@@ -14570,7 +14816,7 @@
                 <a:ea typeface="Georgia" pitchFamily="34" charset="-122"/>
                 <a:cs typeface="Georgia" pitchFamily="34" charset="-120"/>
               </a:rPr>
-              <a:t>Bank-agnostic by design, multi-bank in practice</a:t>
+              <a:t>The last mile is owned, not outsourced</a:t>
             </a:r>
             <a:endParaRPr lang="en-US" sz="3000" dirty="0"/>
           </a:p>
@@ -14584,12 +14830,12 @@
         </p:nvSpPr>
         <p:spPr>
           <a:xfrm>
-            <a:off x="411480" y="1691640"/>
-            <a:ext cx="4069080" cy="2148840"/>
+            <a:off x="411480" y="1645920"/>
+            <a:ext cx="1929384" cy="960120"/>
           </a:xfrm>
           <a:prstGeom prst="roundRect">
             <a:avLst>
-              <a:gd name="adj" fmla="val 3404"/>
+              <a:gd name="adj" fmla="val 7619"/>
             </a:avLst>
           </a:prstGeom>
           <a:solidFill>
@@ -14611,34 +14857,34 @@
         </p:nvSpPr>
         <p:spPr>
           <a:xfrm>
-            <a:off x="612648" y="1856232"/>
-            <a:ext cx="3666744" cy="384048"/>
-          </a:xfrm>
-          <a:prstGeom prst="rect">
-            <a:avLst/>
-          </a:prstGeom>
-          <a:noFill/>
-          <a:ln/>
-        </p:spPr>
-        <p:txBody>
-          <a:bodyPr wrap="square" lIns="0" tIns="0" rIns="0" bIns="0" rtlCol="0" anchor="t"/>
-          <a:lstStyle/>
-          <a:p>
-            <a:pPr indent="0" marL="0">
-              <a:buNone/>
-            </a:pPr>
-            <a:r>
-              <a:rPr lang="en-US" sz="1300" b="1" dirty="0">
-                <a:solidFill>
-                  <a:srgbClr val="FFFFFF"/>
+            <a:off x="594360" y="1737360"/>
+            <a:ext cx="1600200" cy="411480"/>
+          </a:xfrm>
+          <a:prstGeom prst="rect">
+            <a:avLst/>
+          </a:prstGeom>
+          <a:noFill/>
+          <a:ln/>
+        </p:spPr>
+        <p:txBody>
+          <a:bodyPr wrap="square" lIns="0" tIns="0" rIns="0" bIns="0" rtlCol="0" anchor="ctr"/>
+          <a:lstStyle/>
+          <a:p>
+            <a:pPr indent="0" marL="0">
+              <a:buNone/>
+            </a:pPr>
+            <a:r>
+              <a:rPr lang="en-US" sz="2000" b="1" dirty="0">
+                <a:solidFill>
+                  <a:srgbClr val="F2B233"/>
                 </a:solidFill>
                 <a:latin typeface="Georgia" pitchFamily="34" charset="0"/>
                 <a:ea typeface="Georgia" pitchFamily="34" charset="-122"/>
                 <a:cs typeface="Georgia" pitchFamily="34" charset="-120"/>
               </a:rPr>
-              <a:t>What we say to banks</a:t>
-            </a:r>
-            <a:endParaRPr lang="en-US" sz="1300" dirty="0"/>
+              <a:t>500–2,000</a:t>
+            </a:r>
+            <a:endParaRPr lang="en-US" sz="2000" dirty="0"/>
           </a:p>
         </p:txBody>
       </p:sp>
@@ -14650,8 +14896,8 @@
         </p:nvSpPr>
         <p:spPr>
           <a:xfrm>
-            <a:off x="612648" y="2258568"/>
-            <a:ext cx="3666744" cy="1417320"/>
+            <a:off x="594360" y="2148840"/>
+            <a:ext cx="1600200" cy="384048"/>
           </a:xfrm>
           <a:prstGeom prst="rect">
             <a:avLst/>
@@ -14667,40 +14913,17 @@
               <a:buNone/>
             </a:pPr>
             <a:r>
-              <a:rPr lang="en-US" sz="1000" dirty="0">
-                <a:solidFill>
-                  <a:srgbClr val="D5DEEA"/>
-                </a:solidFill>
-                <a:latin typeface="Calibri" pitchFamily="34" charset="0"/>
-                <a:ea typeface="Calibri" pitchFamily="34" charset="-122"/>
-                <a:cs typeface="Calibri" pitchFamily="34" charset="-120"/>
-              </a:rPr>
-              <a:t>Plug your remittance APIs into the platform and we bring transaction share-of-wallet: recurring diaspora flows landing as retail settlement rather than cash-out.</a:t>
-            </a:r>
-            <a:endParaRPr lang="en-US" sz="1000" dirty="0"/>
-          </a:p>
-          <a:p>
-            <a:pPr indent="0" marL="0">
-              <a:buNone/>
-            </a:pPr>
-            <a:endParaRPr lang="en-US" sz="1000" dirty="0"/>
-          </a:p>
-          <a:p>
-            <a:pPr indent="0" marL="0">
-              <a:buNone/>
-            </a:pPr>
-            <a:r>
-              <a:rPr lang="en-US" sz="1000" dirty="0">
-                <a:solidFill>
-                  <a:srgbClr val="D5DEEA"/>
-                </a:solidFill>
-                <a:latin typeface="Calibri" pitchFamily="34" charset="0"/>
-                <a:ea typeface="Calibri" pitchFamily="34" charset="-122"/>
-                <a:cs typeface="Calibri" pitchFamily="34" charset="-120"/>
-              </a:rPr>
-              <a:t>No exclusivity is requested and none is given. Every rail is one integration among several, so pricing stays competitive and no single institution gates the platform.</a:t>
-            </a:r>
-            <a:endParaRPr lang="en-US" sz="1000" dirty="0"/>
+              <a:rPr lang="en-US" sz="900" dirty="0">
+                <a:solidFill>
+                  <a:srgbClr val="C6D3E4"/>
+                </a:solidFill>
+                <a:latin typeface="Calibri" pitchFamily="34" charset="0"/>
+                <a:ea typeface="Calibri" pitchFamily="34" charset="-122"/>
+                <a:cs typeface="Calibri" pitchFamily="34" charset="-120"/>
+              </a:rPr>
+              <a:t>Platform-owned electric scooters</a:t>
+            </a:r>
+            <a:endParaRPr lang="en-US" sz="900" dirty="0"/>
           </a:p>
         </p:txBody>
       </p:sp>
@@ -14712,12 +14935,12 @@
         </p:nvSpPr>
         <p:spPr>
           <a:xfrm>
-            <a:off x="4663440" y="1691640"/>
-            <a:ext cx="4069080" cy="2148840"/>
+            <a:off x="2523744" y="1645920"/>
+            <a:ext cx="1929384" cy="960120"/>
           </a:xfrm>
           <a:prstGeom prst="roundRect">
             <a:avLst>
-              <a:gd name="adj" fmla="val 3404"/>
+              <a:gd name="adj" fmla="val 7619"/>
             </a:avLst>
           </a:prstGeom>
           <a:solidFill>
@@ -14739,34 +14962,34 @@
         </p:nvSpPr>
         <p:spPr>
           <a:xfrm>
-            <a:off x="4864608" y="1856232"/>
-            <a:ext cx="3666744" cy="384048"/>
-          </a:xfrm>
-          <a:prstGeom prst="rect">
-            <a:avLst/>
-          </a:prstGeom>
-          <a:noFill/>
-          <a:ln/>
-        </p:spPr>
-        <p:txBody>
-          <a:bodyPr wrap="square" lIns="0" tIns="0" rIns="0" bIns="0" rtlCol="0" anchor="t"/>
-          <a:lstStyle/>
-          <a:p>
-            <a:pPr indent="0" marL="0">
-              <a:buNone/>
-            </a:pPr>
-            <a:r>
-              <a:rPr lang="en-US" sz="1300" b="1" dirty="0">
-                <a:solidFill>
-                  <a:srgbClr val="FFFFFF"/>
+            <a:off x="2706624" y="1737360"/>
+            <a:ext cx="1600200" cy="411480"/>
+          </a:xfrm>
+          <a:prstGeom prst="rect">
+            <a:avLst/>
+          </a:prstGeom>
+          <a:noFill/>
+          <a:ln/>
+        </p:spPr>
+        <p:txBody>
+          <a:bodyPr wrap="square" lIns="0" tIns="0" rIns="0" bIns="0" rtlCol="0" anchor="ctr"/>
+          <a:lstStyle/>
+          <a:p>
+            <a:pPr indent="0" marL="0">
+              <a:buNone/>
+            </a:pPr>
+            <a:r>
+              <a:rPr lang="en-US" sz="2000" b="1" dirty="0">
+                <a:solidFill>
+                  <a:srgbClr val="F2B233"/>
                 </a:solidFill>
                 <a:latin typeface="Georgia" pitchFamily="34" charset="0"/>
                 <a:ea typeface="Georgia" pitchFamily="34" charset="-122"/>
                 <a:cs typeface="Georgia" pitchFamily="34" charset="-120"/>
               </a:rPr>
-              <a:t>What we say to the retailer</a:t>
-            </a:r>
-            <a:endParaRPr lang="en-US" sz="1300" dirty="0"/>
+              <a:t>12 months</a:t>
+            </a:r>
+            <a:endParaRPr lang="en-US" sz="2000" dirty="0"/>
           </a:p>
         </p:txBody>
       </p:sp>
@@ -14778,8 +15001,8 @@
         </p:nvSpPr>
         <p:spPr>
           <a:xfrm>
-            <a:off x="4864608" y="2258568"/>
-            <a:ext cx="3666744" cy="1417320"/>
+            <a:off x="2706624" y="2148840"/>
+            <a:ext cx="1600200" cy="384048"/>
           </a:xfrm>
           <a:prstGeom prst="rect">
             <a:avLst/>
@@ -14795,40 +15018,17 @@
               <a:buNone/>
             </a:pPr>
             <a:r>
-              <a:rPr lang="en-US" sz="1000" dirty="0">
-                <a:solidFill>
-                  <a:srgbClr val="D5DEEA"/>
-                </a:solidFill>
-                <a:latin typeface="Calibri" pitchFamily="34" charset="0"/>
-                <a:ea typeface="Calibri" pitchFamily="34" charset="-122"/>
-                <a:cs typeface="Calibri" pitchFamily="34" charset="-120"/>
-              </a:rPr>
-              <a:t>Banks bring critical mass. Their diaspora bases are already captured audiences; the platform converts those balances into baskets inside your estate.</a:t>
-            </a:r>
-            <a:endParaRPr lang="en-US" sz="1000" dirty="0"/>
-          </a:p>
-          <a:p>
-            <a:pPr indent="0" marL="0">
-              <a:buNone/>
-            </a:pPr>
-            <a:endParaRPr lang="en-US" sz="1000" dirty="0"/>
-          </a:p>
-          <a:p>
-            <a:pPr indent="0" marL="0">
-              <a:buNone/>
-            </a:pPr>
-            <a:r>
-              <a:rPr lang="en-US" sz="1000" dirty="0">
-                <a:solidFill>
-                  <a:srgbClr val="D5DEEA"/>
-                </a:solidFill>
-                <a:latin typeface="Calibri" pitchFamily="34" charset="0"/>
-                <a:ea typeface="Calibri" pitchFamily="34" charset="-122"/>
-                <a:cs typeface="Calibri" pitchFamily="34" charset="-120"/>
-              </a:rPr>
-              <a:t>Institutions under discussion are prospects at this stage. Nothing is presented in-app as a confirmed partnership until an agreement is signed.</a:t>
-            </a:r>
-            <a:endParaRPr lang="en-US" sz="1000" dirty="0"/>
+              <a:rPr lang="en-US" sz="900" dirty="0">
+                <a:solidFill>
+                  <a:srgbClr val="C6D3E4"/>
+                </a:solidFill>
+                <a:latin typeface="Calibri" pitchFamily="34" charset="0"/>
+                <a:ea typeface="Calibri" pitchFamily="34" charset="-122"/>
+                <a:cs typeface="Calibri" pitchFamily="34" charset="-120"/>
+              </a:rPr>
+              <a:t>Rent-to-buy, then the rider owns it</a:t>
+            </a:r>
+            <a:endParaRPr lang="en-US" sz="900" dirty="0"/>
           </a:p>
         </p:txBody>
       </p:sp>
@@ -14840,20 +15040,20 @@
         </p:nvSpPr>
         <p:spPr>
           <a:xfrm>
-            <a:off x="411480" y="3977640"/>
-            <a:ext cx="8321040" cy="658368"/>
+            <a:off x="4636008" y="1645920"/>
+            <a:ext cx="1929384" cy="960120"/>
           </a:xfrm>
           <a:prstGeom prst="roundRect">
             <a:avLst>
-              <a:gd name="adj" fmla="val 11111"/>
+              <a:gd name="adj" fmla="val 7619"/>
             </a:avLst>
           </a:prstGeom>
           <a:solidFill>
-            <a:srgbClr val="D0103A"/>
+            <a:srgbClr val="1E426F"/>
           </a:solidFill>
           <a:ln w="12700">
             <a:solidFill>
-              <a:srgbClr val="D0103A"/>
+              <a:srgbClr val="1E426F"/>
             </a:solidFill>
             <a:prstDash val="solid"/>
           </a:ln>
@@ -14867,8 +15067,8 @@
         </p:nvSpPr>
         <p:spPr>
           <a:xfrm>
-            <a:off x="640080" y="3977640"/>
-            <a:ext cx="7863840" cy="658368"/>
+            <a:off x="4818888" y="1737360"/>
+            <a:ext cx="1600200" cy="411480"/>
           </a:xfrm>
           <a:prstGeom prst="rect">
             <a:avLst/>
@@ -14884,20 +15084,502 @@
               <a:buNone/>
             </a:pPr>
             <a:r>
-              <a:rPr lang="en-US" sz="1100" dirty="0">
+              <a:rPr lang="en-US" sz="2000" b="1" dirty="0">
+                <a:solidFill>
+                  <a:srgbClr val="F2B233"/>
+                </a:solidFill>
+                <a:latin typeface="Georgia" pitchFamily="34" charset="0"/>
+                <a:ea typeface="Georgia" pitchFamily="34" charset="-122"/>
+                <a:cs typeface="Georgia" pitchFamily="34" charset="-120"/>
+              </a:rPr>
+              <a:t>~5 months</a:t>
+            </a:r>
+            <a:endParaRPr lang="en-US" sz="2000" dirty="0"/>
+          </a:p>
+        </p:txBody>
+      </p:sp>
+      <p:sp>
+        <p:nvSpPr>
+          <p:cNvPr id="17" name="Text 14"/>
+          <p:cNvSpPr/>
+          <p:nvPr/>
+        </p:nvSpPr>
+        <p:spPr>
+          <a:xfrm>
+            <a:off x="4818888" y="2148840"/>
+            <a:ext cx="1600200" cy="384048"/>
+          </a:xfrm>
+          <a:prstGeom prst="rect">
+            <a:avLst/>
+          </a:prstGeom>
+          <a:noFill/>
+          <a:ln/>
+        </p:spPr>
+        <p:txBody>
+          <a:bodyPr wrap="square" lIns="0" tIns="0" rIns="0" bIns="0" rtlCol="0" anchor="t"/>
+          <a:lstStyle/>
+          <a:p>
+            <a:pPr indent="0" marL="0">
+              <a:buNone/>
+            </a:pPr>
+            <a:r>
+              <a:rPr lang="en-US" sz="900" dirty="0">
+                <a:solidFill>
+                  <a:srgbClr val="C6D3E4"/>
+                </a:solidFill>
+                <a:latin typeface="Calibri" pitchFamily="34" charset="0"/>
+                <a:ea typeface="Calibri" pitchFamily="34" charset="-122"/>
+                <a:cs typeface="Calibri" pitchFamily="34" charset="-120"/>
+              </a:rPr>
+              <a:t>Asset pays itself back</a:t>
+            </a:r>
+            <a:endParaRPr lang="en-US" sz="900" dirty="0"/>
+          </a:p>
+        </p:txBody>
+      </p:sp>
+      <p:sp>
+        <p:nvSpPr>
+          <p:cNvPr id="18" name="Shape 15"/>
+          <p:cNvSpPr/>
+          <p:nvPr/>
+        </p:nvSpPr>
+        <p:spPr>
+          <a:xfrm>
+            <a:off x="6748272" y="1645920"/>
+            <a:ext cx="1929384" cy="960120"/>
+          </a:xfrm>
+          <a:prstGeom prst="roundRect">
+            <a:avLst>
+              <a:gd name="adj" fmla="val 7619"/>
+            </a:avLst>
+          </a:prstGeom>
+          <a:solidFill>
+            <a:srgbClr val="1E426F"/>
+          </a:solidFill>
+          <a:ln w="12700">
+            <a:solidFill>
+              <a:srgbClr val="1E426F"/>
+            </a:solidFill>
+            <a:prstDash val="solid"/>
+          </a:ln>
+        </p:spPr>
+      </p:sp>
+      <p:sp>
+        <p:nvSpPr>
+          <p:cNvPr id="19" name="Text 16"/>
+          <p:cNvSpPr/>
+          <p:nvPr/>
+        </p:nvSpPr>
+        <p:spPr>
+          <a:xfrm>
+            <a:off x="6931152" y="1737360"/>
+            <a:ext cx="1600200" cy="411480"/>
+          </a:xfrm>
+          <a:prstGeom prst="rect">
+            <a:avLst/>
+          </a:prstGeom>
+          <a:noFill/>
+          <a:ln/>
+        </p:spPr>
+        <p:txBody>
+          <a:bodyPr wrap="square" lIns="0" tIns="0" rIns="0" bIns="0" rtlCol="0" anchor="ctr"/>
+          <a:lstStyle/>
+          <a:p>
+            <a:pPr indent="0" marL="0">
+              <a:buNone/>
+            </a:pPr>
+            <a:r>
+              <a:rPr lang="en-US" sz="2000" b="1" dirty="0">
+                <a:solidFill>
+                  <a:srgbClr val="F2B233"/>
+                </a:solidFill>
+                <a:latin typeface="Georgia" pitchFamily="34" charset="0"/>
+                <a:ea typeface="Georgia" pitchFamily="34" charset="-122"/>
+                <a:cs typeface="Georgia" pitchFamily="34" charset="-120"/>
+              </a:rPr>
+              <a:t>~10%</a:t>
+            </a:r>
+            <a:endParaRPr lang="en-US" sz="2000" dirty="0"/>
+          </a:p>
+        </p:txBody>
+      </p:sp>
+      <p:sp>
+        <p:nvSpPr>
+          <p:cNvPr id="20" name="Text 17"/>
+          <p:cNvSpPr/>
+          <p:nvPr/>
+        </p:nvSpPr>
+        <p:spPr>
+          <a:xfrm>
+            <a:off x="6931152" y="2148840"/>
+            <a:ext cx="1600200" cy="384048"/>
+          </a:xfrm>
+          <a:prstGeom prst="rect">
+            <a:avLst/>
+          </a:prstGeom>
+          <a:noFill/>
+          <a:ln/>
+        </p:spPr>
+        <p:txBody>
+          <a:bodyPr wrap="square" lIns="0" tIns="0" rIns="0" bIns="0" rtlCol="0" anchor="t"/>
+          <a:lstStyle/>
+          <a:p>
+            <a:pPr indent="0" marL="0">
+              <a:buNone/>
+            </a:pPr>
+            <a:r>
+              <a:rPr lang="en-US" sz="900" dirty="0">
+                <a:solidFill>
+                  <a:srgbClr val="C6D3E4"/>
+                </a:solidFill>
+                <a:latin typeface="Calibri" pitchFamily="34" charset="0"/>
+                <a:ea typeface="Calibri" pitchFamily="34" charset="-122"/>
+                <a:cs typeface="Calibri" pitchFamily="34" charset="-120"/>
+              </a:rPr>
+              <a:t>Platform fee per dollar earned after ownership</a:t>
+            </a:r>
+            <a:endParaRPr lang="en-US" sz="900" dirty="0"/>
+          </a:p>
+        </p:txBody>
+      </p:sp>
+      <p:sp>
+        <p:nvSpPr>
+          <p:cNvPr id="21" name="Shape 18"/>
+          <p:cNvSpPr/>
+          <p:nvPr/>
+        </p:nvSpPr>
+        <p:spPr>
+          <a:xfrm>
+            <a:off x="411480" y="2743200"/>
+            <a:ext cx="2651760" cy="1417320"/>
+          </a:xfrm>
+          <a:prstGeom prst="roundRect">
+            <a:avLst>
+              <a:gd name="adj" fmla="val 5161"/>
+            </a:avLst>
+          </a:prstGeom>
+          <a:solidFill>
+            <a:srgbClr val="1E426F"/>
+          </a:solidFill>
+          <a:ln w="12700">
+            <a:solidFill>
+              <a:srgbClr val="1E426F"/>
+            </a:solidFill>
+            <a:prstDash val="solid"/>
+          </a:ln>
+        </p:spPr>
+      </p:sp>
+      <p:sp>
+        <p:nvSpPr>
+          <p:cNvPr id="22" name="Text 19"/>
+          <p:cNvSpPr/>
+          <p:nvPr/>
+        </p:nvSpPr>
+        <p:spPr>
+          <a:xfrm>
+            <a:off x="612648" y="2907792"/>
+            <a:ext cx="2249424" cy="384048"/>
+          </a:xfrm>
+          <a:prstGeom prst="rect">
+            <a:avLst/>
+          </a:prstGeom>
+          <a:noFill/>
+          <a:ln/>
+        </p:spPr>
+        <p:txBody>
+          <a:bodyPr wrap="square" lIns="0" tIns="0" rIns="0" bIns="0" rtlCol="0" anchor="t"/>
+          <a:lstStyle/>
+          <a:p>
+            <a:pPr indent="0" marL="0">
+              <a:buNone/>
+            </a:pPr>
+            <a:r>
+              <a:rPr lang="en-US" sz="1300" b="1" dirty="0">
                 <a:solidFill>
                   <a:srgbClr val="FFFFFF"/>
                 </a:solidFill>
-                <a:latin typeface="Calibri" pitchFamily="34" charset="0"/>
-                <a:ea typeface="Calibri" pitchFamily="34" charset="-122"/>
-                <a:cs typeface="Calibri" pitchFamily="34" charset="-120"/>
-              </a:rPr>
-              <a:t>Design rule: no bank-specific logic in the core. Rails are adapters, so adding or dropping an institution is a configuration change, never a rebuild.</a:t>
-            </a:r>
-            <a:endParaRPr lang="en-US" sz="1100" dirty="0"/>
-          </a:p>
-        </p:txBody>
-      </p:sp>
+                <a:latin typeface="Georgia" pitchFamily="34" charset="0"/>
+                <a:ea typeface="Georgia" pitchFamily="34" charset="-122"/>
+                <a:cs typeface="Georgia" pitchFamily="34" charset="-120"/>
+              </a:rPr>
+              <a:t>Rent-to-buy</a:t>
+            </a:r>
+            <a:endParaRPr lang="en-US" sz="1300" dirty="0"/>
+          </a:p>
+        </p:txBody>
+      </p:sp>
+      <p:sp>
+        <p:nvSpPr>
+          <p:cNvPr id="23" name="Text 20"/>
+          <p:cNvSpPr/>
+          <p:nvPr/>
+        </p:nvSpPr>
+        <p:spPr>
+          <a:xfrm>
+            <a:off x="612648" y="3310128"/>
+            <a:ext cx="2249424" cy="685800"/>
+          </a:xfrm>
+          <a:prstGeom prst="rect">
+            <a:avLst/>
+          </a:prstGeom>
+          <a:noFill/>
+          <a:ln/>
+        </p:spPr>
+        <p:txBody>
+          <a:bodyPr wrap="square" lIns="0" tIns="0" rIns="0" bIns="0" rtlCol="0" anchor="t"/>
+          <a:lstStyle/>
+          <a:p>
+            <a:pPr indent="0" marL="0">
+              <a:buNone/>
+            </a:pPr>
+            <a:r>
+              <a:rPr lang="en-US" sz="1000" dirty="0">
+                <a:solidFill>
+                  <a:srgbClr val="D5DEEA"/>
+                </a:solidFill>
+                <a:latin typeface="Calibri" pitchFamily="34" charset="0"/>
+                <a:ea typeface="Calibri" pitchFamily="34" charset="-122"/>
+                <a:cs typeface="Calibri" pitchFamily="34" charset="-120"/>
+              </a:rPr>
+              <a:t>The rider operates for twelve months and then owns the scooter. The asset repays itself in roughly five months; months six to twelve are margin.</a:t>
+            </a:r>
+            <a:endParaRPr lang="en-US" sz="1000" dirty="0"/>
+          </a:p>
+        </p:txBody>
+      </p:sp>
+      <p:sp>
+        <p:nvSpPr>
+          <p:cNvPr id="24" name="Shape 21"/>
+          <p:cNvSpPr/>
+          <p:nvPr/>
+        </p:nvSpPr>
+        <p:spPr>
+          <a:xfrm>
+            <a:off x="3246120" y="2743200"/>
+            <a:ext cx="2651760" cy="1417320"/>
+          </a:xfrm>
+          <a:prstGeom prst="roundRect">
+            <a:avLst>
+              <a:gd name="adj" fmla="val 5161"/>
+            </a:avLst>
+          </a:prstGeom>
+          <a:solidFill>
+            <a:srgbClr val="1E426F"/>
+          </a:solidFill>
+          <a:ln w="12700">
+            <a:solidFill>
+              <a:srgbClr val="1E426F"/>
+            </a:solidFill>
+            <a:prstDash val="solid"/>
+          </a:ln>
+        </p:spPr>
+      </p:sp>
+      <p:sp>
+        <p:nvSpPr>
+          <p:cNvPr id="25" name="Text 22"/>
+          <p:cNvSpPr/>
+          <p:nvPr/>
+        </p:nvSpPr>
+        <p:spPr>
+          <a:xfrm>
+            <a:off x="3447288" y="2907792"/>
+            <a:ext cx="2249424" cy="384048"/>
+          </a:xfrm>
+          <a:prstGeom prst="rect">
+            <a:avLst/>
+          </a:prstGeom>
+          <a:noFill/>
+          <a:ln/>
+        </p:spPr>
+        <p:txBody>
+          <a:bodyPr wrap="square" lIns="0" tIns="0" rIns="0" bIns="0" rtlCol="0" anchor="t"/>
+          <a:lstStyle/>
+          <a:p>
+            <a:pPr indent="0" marL="0">
+              <a:buNone/>
+            </a:pPr>
+            <a:r>
+              <a:rPr lang="en-US" sz="1300" b="1" dirty="0">
+                <a:solidFill>
+                  <a:srgbClr val="FFFFFF"/>
+                </a:solidFill>
+                <a:latin typeface="Georgia" pitchFamily="34" charset="0"/>
+                <a:ea typeface="Georgia" pitchFamily="34" charset="-122"/>
+                <a:cs typeface="Georgia" pitchFamily="34" charset="-120"/>
+              </a:rPr>
+              <a:t>Advertising rights</a:t>
+            </a:r>
+            <a:endParaRPr lang="en-US" sz="1300" dirty="0"/>
+          </a:p>
+        </p:txBody>
+      </p:sp>
+      <p:sp>
+        <p:nvSpPr>
+          <p:cNvPr id="26" name="Text 23"/>
+          <p:cNvSpPr/>
+          <p:nvPr/>
+        </p:nvSpPr>
+        <p:spPr>
+          <a:xfrm>
+            <a:off x="3447288" y="3310128"/>
+            <a:ext cx="2249424" cy="685800"/>
+          </a:xfrm>
+          <a:prstGeom prst="rect">
+            <a:avLst/>
+          </a:prstGeom>
+          <a:noFill/>
+          <a:ln/>
+        </p:spPr>
+        <p:txBody>
+          <a:bodyPr wrap="square" lIns="0" tIns="0" rIns="0" bIns="0" rtlCol="0" anchor="t"/>
+          <a:lstStyle/>
+          <a:p>
+            <a:pPr indent="0" marL="0">
+              <a:buNone/>
+            </a:pPr>
+            <a:r>
+              <a:rPr lang="en-US" sz="1000" dirty="0">
+                <a:solidFill>
+                  <a:srgbClr val="D5DEEA"/>
+                </a:solidFill>
+                <a:latin typeface="Calibri" pitchFamily="34" charset="0"/>
+                <a:ea typeface="Calibri" pitchFamily="34" charset="-122"/>
+                <a:cs typeface="Calibri" pitchFamily="34" charset="-120"/>
+              </a:rPr>
+              <a:t>Livery is sold on subscription: 80% reserved for the anchor retailer, 20% open inventory. A moving media network across every delivery route.</a:t>
+            </a:r>
+            <a:endParaRPr lang="en-US" sz="1000" dirty="0"/>
+          </a:p>
+        </p:txBody>
+      </p:sp>
+      <p:sp>
+        <p:nvSpPr>
+          <p:cNvPr id="27" name="Shape 24"/>
+          <p:cNvSpPr/>
+          <p:nvPr/>
+        </p:nvSpPr>
+        <p:spPr>
+          <a:xfrm>
+            <a:off x="6080760" y="2743200"/>
+            <a:ext cx="2651760" cy="1417320"/>
+          </a:xfrm>
+          <a:prstGeom prst="roundRect">
+            <a:avLst>
+              <a:gd name="adj" fmla="val 5161"/>
+            </a:avLst>
+          </a:prstGeom>
+          <a:solidFill>
+            <a:srgbClr val="1E426F"/>
+          </a:solidFill>
+          <a:ln w="12700">
+            <a:solidFill>
+              <a:srgbClr val="1E426F"/>
+            </a:solidFill>
+            <a:prstDash val="solid"/>
+          </a:ln>
+        </p:spPr>
+      </p:sp>
+      <p:sp>
+        <p:nvSpPr>
+          <p:cNvPr id="28" name="Text 25"/>
+          <p:cNvSpPr/>
+          <p:nvPr/>
+        </p:nvSpPr>
+        <p:spPr>
+          <a:xfrm>
+            <a:off x="6281928" y="2907792"/>
+            <a:ext cx="2249424" cy="384048"/>
+          </a:xfrm>
+          <a:prstGeom prst="rect">
+            <a:avLst/>
+          </a:prstGeom>
+          <a:noFill/>
+          <a:ln/>
+        </p:spPr>
+        <p:txBody>
+          <a:bodyPr wrap="square" lIns="0" tIns="0" rIns="0" bIns="0" rtlCol="0" anchor="t"/>
+          <a:lstStyle/>
+          <a:p>
+            <a:pPr indent="0" marL="0">
+              <a:buNone/>
+            </a:pPr>
+            <a:r>
+              <a:rPr lang="en-US" sz="1300" b="1" dirty="0">
+                <a:solidFill>
+                  <a:srgbClr val="FFFFFF"/>
+                </a:solidFill>
+                <a:latin typeface="Georgia" pitchFamily="34" charset="0"/>
+                <a:ea typeface="Georgia" pitchFamily="34" charset="-122"/>
+                <a:cs typeface="Georgia" pitchFamily="34" charset="-120"/>
+              </a:rPr>
+              <a:t>Own the garage</a:t>
+            </a:r>
+            <a:endParaRPr lang="en-US" sz="1300" dirty="0"/>
+          </a:p>
+        </p:txBody>
+      </p:sp>
+      <p:sp>
+        <p:nvSpPr>
+          <p:cNvPr id="29" name="Text 26"/>
+          <p:cNvSpPr/>
+          <p:nvPr/>
+        </p:nvSpPr>
+        <p:spPr>
+          <a:xfrm>
+            <a:off x="6281928" y="3310128"/>
+            <a:ext cx="2249424" cy="685800"/>
+          </a:xfrm>
+          <a:prstGeom prst="rect">
+            <a:avLst/>
+          </a:prstGeom>
+          <a:noFill/>
+          <a:ln/>
+        </p:spPr>
+        <p:txBody>
+          <a:bodyPr wrap="square" lIns="0" tIns="0" rIns="0" bIns="0" rtlCol="0" anchor="t"/>
+          <a:lstStyle/>
+          <a:p>
+            <a:pPr indent="0" marL="0">
+              <a:buNone/>
+            </a:pPr>
+            <a:r>
+              <a:rPr lang="en-US" sz="1000" dirty="0">
+                <a:solidFill>
+                  <a:srgbClr val="D5DEEA"/>
+                </a:solidFill>
+                <a:latin typeface="Calibri" pitchFamily="34" charset="0"/>
+                <a:ea typeface="Calibri" pitchFamily="34" charset="-122"/>
+                <a:cs typeface="Calibri" pitchFamily="34" charset="-120"/>
+              </a:rPr>
+              <a:t>Repairs, parts and accessories stay inside the platform on a maintenance plan. Electric tricycles extend the fleet into rural routes, with women riders as the first cohort.</a:t>
+            </a:r>
+            <a:endParaRPr lang="en-US" sz="1000" dirty="0"/>
+          </a:p>
+        </p:txBody>
+      </p:sp>
+      <p:pic>
+        <p:nvPicPr>
+          <p:cNvPr id="30" name="Image 1" descr="preencoded.png">    </p:cNvPr>
+          <p:cNvPicPr>
+            <a:picLocks noChangeAspect="1"/>
+          </p:cNvPicPr>
+          <p:nvPr/>
+        </p:nvPicPr>
+        <p:blipFill>
+          <a:blip r:embed="rId2"/>
+          <a:srcRect l="0" r="0" t="0" b="0"/>
+          <a:stretch/>
+        </p:blipFill>
+        <p:spPr>
+          <a:xfrm>
+            <a:off x="411480" y="4279392"/>
+            <a:ext cx="8321040" cy="384048"/>
+          </a:xfrm>
+          <a:prstGeom prst="rect">
+            <a:avLst/>
+          </a:prstGeom>
+        </p:spPr>
+      </p:pic>
     </p:spTree>
   </p:cSld>
   <p:clrMapOvr>
@@ -15014,7 +15696,7 @@
                 <a:ea typeface="Calibri" pitchFamily="34" charset="-122"/>
                 <a:cs typeface="Calibri" pitchFamily="34" charset="-120"/>
               </a:rPr>
-              <a:t>SLIDE 21 · WHOLESALE &amp; INFORMAL CHANNEL</a:t>
+              <a:t>SLIDE 21 · LOYALTY &amp; DEVICE MIGRATION</a:t>
             </a:r>
             <a:endParaRPr lang="en-US" sz="1100" dirty="0"/>
           </a:p>
@@ -15170,7 +15852,7 @@
                 <a:ea typeface="Georgia" pitchFamily="34" charset="-122"/>
                 <a:cs typeface="Georgia" pitchFamily="34" charset="-120"/>
               </a:rPr>
-              <a:t>Tuck shops become distribution extensions, not competitors</a:t>
+              <a:t>Trade US$100 a month for five months — earn the handset</a:t>
             </a:r>
             <a:endParaRPr lang="en-US" sz="3000" dirty="0"/>
           </a:p>
@@ -15185,11 +15867,563 @@
         <p:spPr>
           <a:xfrm>
             <a:off x="411480" y="1691640"/>
-            <a:ext cx="1929384" cy="1280160"/>
+            <a:ext cx="1554480" cy="914400"/>
           </a:xfrm>
           <a:prstGeom prst="roundRect">
             <a:avLst>
-              <a:gd name="adj" fmla="val 5714"/>
+              <a:gd name="adj" fmla="val 8000"/>
+            </a:avLst>
+          </a:prstGeom>
+          <a:solidFill>
+            <a:srgbClr val="FFFFFF"/>
+          </a:solidFill>
+          <a:ln w="12700">
+            <a:solidFill>
+              <a:srgbClr val="E2E5EB"/>
+            </a:solidFill>
+            <a:prstDash val="solid"/>
+          </a:ln>
+        </p:spPr>
+      </p:sp>
+      <p:sp>
+        <p:nvSpPr>
+          <p:cNvPr id="10" name="Text 7"/>
+          <p:cNvSpPr/>
+          <p:nvPr/>
+        </p:nvSpPr>
+        <p:spPr>
+          <a:xfrm>
+            <a:off x="411480" y="1847088"/>
+            <a:ext cx="1554480" cy="292608"/>
+          </a:xfrm>
+          <a:prstGeom prst="rect">
+            <a:avLst/>
+          </a:prstGeom>
+          <a:noFill/>
+          <a:ln/>
+        </p:spPr>
+        <p:txBody>
+          <a:bodyPr wrap="square" lIns="0" tIns="0" rIns="0" bIns="0" rtlCol="0" anchor="ctr"/>
+          <a:lstStyle/>
+          <a:p>
+            <a:pPr algn="ctr" indent="0" marL="0">
+              <a:buNone/>
+            </a:pPr>
+            <a:r>
+              <a:rPr lang="en-US" sz="1300" b="1" dirty="0">
+                <a:solidFill>
+                  <a:srgbClr val="16233A"/>
+                </a:solidFill>
+                <a:latin typeface="Georgia" pitchFamily="34" charset="0"/>
+                <a:ea typeface="Georgia" pitchFamily="34" charset="-122"/>
+                <a:cs typeface="Georgia" pitchFamily="34" charset="-120"/>
+              </a:rPr>
+              <a:t>Month 1</a:t>
+            </a:r>
+            <a:endParaRPr lang="en-US" sz="1300" dirty="0"/>
+          </a:p>
+        </p:txBody>
+      </p:sp>
+      <p:sp>
+        <p:nvSpPr>
+          <p:cNvPr id="11" name="Text 8"/>
+          <p:cNvSpPr/>
+          <p:nvPr/>
+        </p:nvSpPr>
+        <p:spPr>
+          <a:xfrm>
+            <a:off x="548640" y="2157984"/>
+            <a:ext cx="1280160" cy="384048"/>
+          </a:xfrm>
+          <a:prstGeom prst="rect">
+            <a:avLst/>
+          </a:prstGeom>
+          <a:noFill/>
+          <a:ln/>
+        </p:spPr>
+        <p:txBody>
+          <a:bodyPr wrap="square" lIns="0" tIns="0" rIns="0" bIns="0" rtlCol="0" anchor="ctr"/>
+          <a:lstStyle/>
+          <a:p>
+            <a:pPr algn="ctr" indent="0" marL="0">
+              <a:buNone/>
+            </a:pPr>
+            <a:r>
+              <a:rPr lang="en-US" sz="900" dirty="0">
+                <a:solidFill>
+                  <a:srgbClr val="5C6779"/>
+                </a:solidFill>
+                <a:latin typeface="Calibri" pitchFamily="34" charset="0"/>
+                <a:ea typeface="Calibri" pitchFamily="34" charset="-122"/>
+                <a:cs typeface="Calibri" pitchFamily="34" charset="-120"/>
+              </a:rPr>
+              <a:t>US$100 traded</a:t>
+            </a:r>
+            <a:endParaRPr lang="en-US" sz="900" dirty="0"/>
+          </a:p>
+        </p:txBody>
+      </p:sp>
+      <p:sp>
+        <p:nvSpPr>
+          <p:cNvPr id="12" name="Shape 9"/>
+          <p:cNvSpPr/>
+          <p:nvPr/>
+        </p:nvSpPr>
+        <p:spPr>
+          <a:xfrm>
+            <a:off x="2103120" y="1691640"/>
+            <a:ext cx="1554480" cy="914400"/>
+          </a:xfrm>
+          <a:prstGeom prst="roundRect">
+            <a:avLst>
+              <a:gd name="adj" fmla="val 8000"/>
+            </a:avLst>
+          </a:prstGeom>
+          <a:solidFill>
+            <a:srgbClr val="FFFFFF"/>
+          </a:solidFill>
+          <a:ln w="12700">
+            <a:solidFill>
+              <a:srgbClr val="E2E5EB"/>
+            </a:solidFill>
+            <a:prstDash val="solid"/>
+          </a:ln>
+        </p:spPr>
+      </p:sp>
+      <p:sp>
+        <p:nvSpPr>
+          <p:cNvPr id="13" name="Text 10"/>
+          <p:cNvSpPr/>
+          <p:nvPr/>
+        </p:nvSpPr>
+        <p:spPr>
+          <a:xfrm>
+            <a:off x="2103120" y="1847088"/>
+            <a:ext cx="1554480" cy="292608"/>
+          </a:xfrm>
+          <a:prstGeom prst="rect">
+            <a:avLst/>
+          </a:prstGeom>
+          <a:noFill/>
+          <a:ln/>
+        </p:spPr>
+        <p:txBody>
+          <a:bodyPr wrap="square" lIns="0" tIns="0" rIns="0" bIns="0" rtlCol="0" anchor="ctr"/>
+          <a:lstStyle/>
+          <a:p>
+            <a:pPr algn="ctr" indent="0" marL="0">
+              <a:buNone/>
+            </a:pPr>
+            <a:r>
+              <a:rPr lang="en-US" sz="1300" b="1" dirty="0">
+                <a:solidFill>
+                  <a:srgbClr val="16233A"/>
+                </a:solidFill>
+                <a:latin typeface="Georgia" pitchFamily="34" charset="0"/>
+                <a:ea typeface="Georgia" pitchFamily="34" charset="-122"/>
+                <a:cs typeface="Georgia" pitchFamily="34" charset="-120"/>
+              </a:rPr>
+              <a:t>Month 2</a:t>
+            </a:r>
+            <a:endParaRPr lang="en-US" sz="1300" dirty="0"/>
+          </a:p>
+        </p:txBody>
+      </p:sp>
+      <p:sp>
+        <p:nvSpPr>
+          <p:cNvPr id="14" name="Text 11"/>
+          <p:cNvSpPr/>
+          <p:nvPr/>
+        </p:nvSpPr>
+        <p:spPr>
+          <a:xfrm>
+            <a:off x="2240280" y="2157984"/>
+            <a:ext cx="1280160" cy="384048"/>
+          </a:xfrm>
+          <a:prstGeom prst="rect">
+            <a:avLst/>
+          </a:prstGeom>
+          <a:noFill/>
+          <a:ln/>
+        </p:spPr>
+        <p:txBody>
+          <a:bodyPr wrap="square" lIns="0" tIns="0" rIns="0" bIns="0" rtlCol="0" anchor="ctr"/>
+          <a:lstStyle/>
+          <a:p>
+            <a:pPr algn="ctr" indent="0" marL="0">
+              <a:buNone/>
+            </a:pPr>
+            <a:r>
+              <a:rPr lang="en-US" sz="900" dirty="0">
+                <a:solidFill>
+                  <a:srgbClr val="5C6779"/>
+                </a:solidFill>
+                <a:latin typeface="Calibri" pitchFamily="34" charset="0"/>
+                <a:ea typeface="Calibri" pitchFamily="34" charset="-122"/>
+                <a:cs typeface="Calibri" pitchFamily="34" charset="-120"/>
+              </a:rPr>
+              <a:t>US$100 traded</a:t>
+            </a:r>
+            <a:endParaRPr lang="en-US" sz="900" dirty="0"/>
+          </a:p>
+        </p:txBody>
+      </p:sp>
+      <p:sp>
+        <p:nvSpPr>
+          <p:cNvPr id="15" name="Shape 12"/>
+          <p:cNvSpPr/>
+          <p:nvPr/>
+        </p:nvSpPr>
+        <p:spPr>
+          <a:xfrm>
+            <a:off x="3794760" y="1691640"/>
+            <a:ext cx="1554480" cy="914400"/>
+          </a:xfrm>
+          <a:prstGeom prst="roundRect">
+            <a:avLst>
+              <a:gd name="adj" fmla="val 8000"/>
+            </a:avLst>
+          </a:prstGeom>
+          <a:solidFill>
+            <a:srgbClr val="FFFFFF"/>
+          </a:solidFill>
+          <a:ln w="12700">
+            <a:solidFill>
+              <a:srgbClr val="E2E5EB"/>
+            </a:solidFill>
+            <a:prstDash val="solid"/>
+          </a:ln>
+        </p:spPr>
+      </p:sp>
+      <p:sp>
+        <p:nvSpPr>
+          <p:cNvPr id="16" name="Text 13"/>
+          <p:cNvSpPr/>
+          <p:nvPr/>
+        </p:nvSpPr>
+        <p:spPr>
+          <a:xfrm>
+            <a:off x="3794760" y="1847088"/>
+            <a:ext cx="1554480" cy="292608"/>
+          </a:xfrm>
+          <a:prstGeom prst="rect">
+            <a:avLst/>
+          </a:prstGeom>
+          <a:noFill/>
+          <a:ln/>
+        </p:spPr>
+        <p:txBody>
+          <a:bodyPr wrap="square" lIns="0" tIns="0" rIns="0" bIns="0" rtlCol="0" anchor="ctr"/>
+          <a:lstStyle/>
+          <a:p>
+            <a:pPr algn="ctr" indent="0" marL="0">
+              <a:buNone/>
+            </a:pPr>
+            <a:r>
+              <a:rPr lang="en-US" sz="1300" b="1" dirty="0">
+                <a:solidFill>
+                  <a:srgbClr val="16233A"/>
+                </a:solidFill>
+                <a:latin typeface="Georgia" pitchFamily="34" charset="0"/>
+                <a:ea typeface="Georgia" pitchFamily="34" charset="-122"/>
+                <a:cs typeface="Georgia" pitchFamily="34" charset="-120"/>
+              </a:rPr>
+              <a:t>Month 3</a:t>
+            </a:r>
+            <a:endParaRPr lang="en-US" sz="1300" dirty="0"/>
+          </a:p>
+        </p:txBody>
+      </p:sp>
+      <p:sp>
+        <p:nvSpPr>
+          <p:cNvPr id="17" name="Text 14"/>
+          <p:cNvSpPr/>
+          <p:nvPr/>
+        </p:nvSpPr>
+        <p:spPr>
+          <a:xfrm>
+            <a:off x="3931920" y="2157984"/>
+            <a:ext cx="1280160" cy="384048"/>
+          </a:xfrm>
+          <a:prstGeom prst="rect">
+            <a:avLst/>
+          </a:prstGeom>
+          <a:noFill/>
+          <a:ln/>
+        </p:spPr>
+        <p:txBody>
+          <a:bodyPr wrap="square" lIns="0" tIns="0" rIns="0" bIns="0" rtlCol="0" anchor="ctr"/>
+          <a:lstStyle/>
+          <a:p>
+            <a:pPr algn="ctr" indent="0" marL="0">
+              <a:buNone/>
+            </a:pPr>
+            <a:r>
+              <a:rPr lang="en-US" sz="900" dirty="0">
+                <a:solidFill>
+                  <a:srgbClr val="5C6779"/>
+                </a:solidFill>
+                <a:latin typeface="Calibri" pitchFamily="34" charset="0"/>
+                <a:ea typeface="Calibri" pitchFamily="34" charset="-122"/>
+                <a:cs typeface="Calibri" pitchFamily="34" charset="-120"/>
+              </a:rPr>
+              <a:t>US$100 traded</a:t>
+            </a:r>
+            <a:endParaRPr lang="en-US" sz="900" dirty="0"/>
+          </a:p>
+        </p:txBody>
+      </p:sp>
+      <p:sp>
+        <p:nvSpPr>
+          <p:cNvPr id="18" name="Shape 15"/>
+          <p:cNvSpPr/>
+          <p:nvPr/>
+        </p:nvSpPr>
+        <p:spPr>
+          <a:xfrm>
+            <a:off x="5486400" y="1691640"/>
+            <a:ext cx="1554480" cy="914400"/>
+          </a:xfrm>
+          <a:prstGeom prst="roundRect">
+            <a:avLst>
+              <a:gd name="adj" fmla="val 8000"/>
+            </a:avLst>
+          </a:prstGeom>
+          <a:solidFill>
+            <a:srgbClr val="FFFFFF"/>
+          </a:solidFill>
+          <a:ln w="12700">
+            <a:solidFill>
+              <a:srgbClr val="E2E5EB"/>
+            </a:solidFill>
+            <a:prstDash val="solid"/>
+          </a:ln>
+        </p:spPr>
+      </p:sp>
+      <p:sp>
+        <p:nvSpPr>
+          <p:cNvPr id="19" name="Text 16"/>
+          <p:cNvSpPr/>
+          <p:nvPr/>
+        </p:nvSpPr>
+        <p:spPr>
+          <a:xfrm>
+            <a:off x="5486400" y="1847088"/>
+            <a:ext cx="1554480" cy="292608"/>
+          </a:xfrm>
+          <a:prstGeom prst="rect">
+            <a:avLst/>
+          </a:prstGeom>
+          <a:noFill/>
+          <a:ln/>
+        </p:spPr>
+        <p:txBody>
+          <a:bodyPr wrap="square" lIns="0" tIns="0" rIns="0" bIns="0" rtlCol="0" anchor="ctr"/>
+          <a:lstStyle/>
+          <a:p>
+            <a:pPr algn="ctr" indent="0" marL="0">
+              <a:buNone/>
+            </a:pPr>
+            <a:r>
+              <a:rPr lang="en-US" sz="1300" b="1" dirty="0">
+                <a:solidFill>
+                  <a:srgbClr val="16233A"/>
+                </a:solidFill>
+                <a:latin typeface="Georgia" pitchFamily="34" charset="0"/>
+                <a:ea typeface="Georgia" pitchFamily="34" charset="-122"/>
+                <a:cs typeface="Georgia" pitchFamily="34" charset="-120"/>
+              </a:rPr>
+              <a:t>Month 4</a:t>
+            </a:r>
+            <a:endParaRPr lang="en-US" sz="1300" dirty="0"/>
+          </a:p>
+        </p:txBody>
+      </p:sp>
+      <p:sp>
+        <p:nvSpPr>
+          <p:cNvPr id="20" name="Text 17"/>
+          <p:cNvSpPr/>
+          <p:nvPr/>
+        </p:nvSpPr>
+        <p:spPr>
+          <a:xfrm>
+            <a:off x="5623560" y="2157984"/>
+            <a:ext cx="1280160" cy="384048"/>
+          </a:xfrm>
+          <a:prstGeom prst="rect">
+            <a:avLst/>
+          </a:prstGeom>
+          <a:noFill/>
+          <a:ln/>
+        </p:spPr>
+        <p:txBody>
+          <a:bodyPr wrap="square" lIns="0" tIns="0" rIns="0" bIns="0" rtlCol="0" anchor="ctr"/>
+          <a:lstStyle/>
+          <a:p>
+            <a:pPr algn="ctr" indent="0" marL="0">
+              <a:buNone/>
+            </a:pPr>
+            <a:r>
+              <a:rPr lang="en-US" sz="900" dirty="0">
+                <a:solidFill>
+                  <a:srgbClr val="5C6779"/>
+                </a:solidFill>
+                <a:latin typeface="Calibri" pitchFamily="34" charset="0"/>
+                <a:ea typeface="Calibri" pitchFamily="34" charset="-122"/>
+                <a:cs typeface="Calibri" pitchFamily="34" charset="-120"/>
+              </a:rPr>
+              <a:t>US$100 traded</a:t>
+            </a:r>
+            <a:endParaRPr lang="en-US" sz="900" dirty="0"/>
+          </a:p>
+        </p:txBody>
+      </p:sp>
+      <p:sp>
+        <p:nvSpPr>
+          <p:cNvPr id="21" name="Shape 18"/>
+          <p:cNvSpPr/>
+          <p:nvPr/>
+        </p:nvSpPr>
+        <p:spPr>
+          <a:xfrm>
+            <a:off x="7178040" y="1691640"/>
+            <a:ext cx="1554480" cy="914400"/>
+          </a:xfrm>
+          <a:prstGeom prst="roundRect">
+            <a:avLst>
+              <a:gd name="adj" fmla="val 8000"/>
+            </a:avLst>
+          </a:prstGeom>
+          <a:solidFill>
+            <a:srgbClr val="D0103A"/>
+          </a:solidFill>
+          <a:ln w="12700">
+            <a:solidFill>
+              <a:srgbClr val="D0103A"/>
+            </a:solidFill>
+            <a:prstDash val="solid"/>
+          </a:ln>
+        </p:spPr>
+      </p:sp>
+      <p:sp>
+        <p:nvSpPr>
+          <p:cNvPr id="22" name="Text 19"/>
+          <p:cNvSpPr/>
+          <p:nvPr/>
+        </p:nvSpPr>
+        <p:spPr>
+          <a:xfrm>
+            <a:off x="7178040" y="1847088"/>
+            <a:ext cx="1554480" cy="292608"/>
+          </a:xfrm>
+          <a:prstGeom prst="rect">
+            <a:avLst/>
+          </a:prstGeom>
+          <a:noFill/>
+          <a:ln/>
+        </p:spPr>
+        <p:txBody>
+          <a:bodyPr wrap="square" lIns="0" tIns="0" rIns="0" bIns="0" rtlCol="0" anchor="ctr"/>
+          <a:lstStyle/>
+          <a:p>
+            <a:pPr algn="ctr" indent="0" marL="0">
+              <a:buNone/>
+            </a:pPr>
+            <a:r>
+              <a:rPr lang="en-US" sz="1300" b="1" dirty="0">
+                <a:solidFill>
+                  <a:srgbClr val="FFFFFF"/>
+                </a:solidFill>
+                <a:latin typeface="Georgia" pitchFamily="34" charset="0"/>
+                <a:ea typeface="Georgia" pitchFamily="34" charset="-122"/>
+                <a:cs typeface="Georgia" pitchFamily="34" charset="-120"/>
+              </a:rPr>
+              <a:t>Month 5</a:t>
+            </a:r>
+            <a:endParaRPr lang="en-US" sz="1300" dirty="0"/>
+          </a:p>
+        </p:txBody>
+      </p:sp>
+      <p:sp>
+        <p:nvSpPr>
+          <p:cNvPr id="23" name="Text 20"/>
+          <p:cNvSpPr/>
+          <p:nvPr/>
+        </p:nvSpPr>
+        <p:spPr>
+          <a:xfrm>
+            <a:off x="7315200" y="2157984"/>
+            <a:ext cx="1280160" cy="384048"/>
+          </a:xfrm>
+          <a:prstGeom prst="rect">
+            <a:avLst/>
+          </a:prstGeom>
+          <a:noFill/>
+          <a:ln/>
+        </p:spPr>
+        <p:txBody>
+          <a:bodyPr wrap="square" lIns="0" tIns="0" rIns="0" bIns="0" rtlCol="0" anchor="ctr"/>
+          <a:lstStyle/>
+          <a:p>
+            <a:pPr algn="ctr" indent="0" marL="0">
+              <a:buNone/>
+            </a:pPr>
+            <a:r>
+              <a:rPr lang="en-US" sz="900" dirty="0">
+                <a:solidFill>
+                  <a:srgbClr val="FDE7EC"/>
+                </a:solidFill>
+                <a:latin typeface="Calibri" pitchFamily="34" charset="0"/>
+                <a:ea typeface="Calibri" pitchFamily="34" charset="-122"/>
+                <a:cs typeface="Calibri" pitchFamily="34" charset="-120"/>
+              </a:rPr>
+              <a:t>5G-lite smartphone awarded</a:t>
+            </a:r>
+            <a:endParaRPr lang="en-US" sz="900" dirty="0"/>
+          </a:p>
+        </p:txBody>
+      </p:sp>
+      <p:sp>
+        <p:nvSpPr>
+          <p:cNvPr id="24" name="Shape 21"/>
+          <p:cNvSpPr/>
+          <p:nvPr/>
+        </p:nvSpPr>
+        <p:spPr>
+          <a:xfrm>
+            <a:off x="411480" y="2788920"/>
+            <a:ext cx="2651760" cy="1828800"/>
+          </a:xfrm>
+          <a:prstGeom prst="roundRect">
+            <a:avLst>
+              <a:gd name="adj" fmla="val 4000"/>
+            </a:avLst>
+          </a:prstGeom>
+          <a:solidFill>
+            <a:srgbClr val="FFFFFF"/>
+          </a:solidFill>
+          <a:ln w="12700">
+            <a:solidFill>
+              <a:srgbClr val="E2E5EB"/>
+            </a:solidFill>
+            <a:prstDash val="solid"/>
+          </a:ln>
+        </p:spPr>
+      </p:sp>
+      <p:sp>
+        <p:nvSpPr>
+          <p:cNvPr id="25" name="Shape 22"/>
+          <p:cNvSpPr/>
+          <p:nvPr/>
+        </p:nvSpPr>
+        <p:spPr>
+          <a:xfrm>
+            <a:off x="640080" y="2971800"/>
+            <a:ext cx="411480" cy="54864"/>
+          </a:xfrm>
+          <a:prstGeom prst="roundRect">
+            <a:avLst>
+              <a:gd name="adj" fmla="val 50000"/>
             </a:avLst>
           </a:prstGeom>
           <a:solidFill>
@@ -15205,92 +16439,53 @@
       </p:sp>
       <p:sp>
         <p:nvSpPr>
-          <p:cNvPr id="10" name="Text 7"/>
-          <p:cNvSpPr/>
-          <p:nvPr/>
-        </p:nvSpPr>
-        <p:spPr>
-          <a:xfrm>
-            <a:off x="594360" y="1801368"/>
-            <a:ext cx="1600200" cy="201168"/>
-          </a:xfrm>
-          <a:prstGeom prst="rect">
-            <a:avLst/>
-          </a:prstGeom>
-          <a:noFill/>
-          <a:ln/>
-        </p:spPr>
-        <p:txBody>
-          <a:bodyPr wrap="square" lIns="0" tIns="0" rIns="0" bIns="0" rtlCol="0" anchor="ctr"/>
-          <a:lstStyle/>
-          <a:p>
-            <a:pPr indent="0" marL="0">
-              <a:buNone/>
-            </a:pPr>
-            <a:r>
-              <a:rPr lang="en-US" sz="800" b="1" spc="150" kern="0" dirty="0">
-                <a:solidFill>
-                  <a:srgbClr val="AEBED2"/>
-                </a:solidFill>
-                <a:latin typeface="Calibri" pitchFamily="34" charset="0"/>
-                <a:ea typeface="Calibri" pitchFamily="34" charset="-122"/>
-                <a:cs typeface="Calibri" pitchFamily="34" charset="-120"/>
-              </a:rPr>
-              <a:t>STEP 1</a:t>
-            </a:r>
-            <a:endParaRPr lang="en-US" sz="800" dirty="0"/>
-          </a:p>
-        </p:txBody>
-      </p:sp>
-      <p:sp>
-        <p:nvSpPr>
-          <p:cNvPr id="11" name="Text 8"/>
-          <p:cNvSpPr/>
-          <p:nvPr/>
-        </p:nvSpPr>
-        <p:spPr>
-          <a:xfrm>
-            <a:off x="594360" y="2002536"/>
-            <a:ext cx="1600200" cy="274320"/>
-          </a:xfrm>
-          <a:prstGeom prst="rect">
-            <a:avLst/>
-          </a:prstGeom>
-          <a:noFill/>
-          <a:ln/>
-        </p:spPr>
-        <p:txBody>
-          <a:bodyPr wrap="square" lIns="0" tIns="0" rIns="0" bIns="0" rtlCol="0" anchor="ctr"/>
-          <a:lstStyle/>
-          <a:p>
-            <a:pPr indent="0" marL="0">
-              <a:buNone/>
-            </a:pPr>
-            <a:r>
-              <a:rPr lang="en-US" sz="1250" b="1" dirty="0">
-                <a:solidFill>
-                  <a:srgbClr val="FFFFFF"/>
+          <p:cNvPr id="26" name="Text 23"/>
+          <p:cNvSpPr/>
+          <p:nvPr/>
+        </p:nvSpPr>
+        <p:spPr>
+          <a:xfrm>
+            <a:off x="640080" y="3118104"/>
+            <a:ext cx="2194560" cy="530352"/>
+          </a:xfrm>
+          <a:prstGeom prst="rect">
+            <a:avLst/>
+          </a:prstGeom>
+          <a:noFill/>
+          <a:ln/>
+        </p:spPr>
+        <p:txBody>
+          <a:bodyPr wrap="square" lIns="0" tIns="0" rIns="0" bIns="0" rtlCol="0" anchor="t"/>
+          <a:lstStyle/>
+          <a:p>
+            <a:pPr indent="0" marL="0">
+              <a:buNone/>
+            </a:pPr>
+            <a:r>
+              <a:rPr lang="en-US" sz="1400" b="1" dirty="0">
+                <a:solidFill>
+                  <a:srgbClr val="1B3A6B"/>
                 </a:solidFill>
                 <a:latin typeface="Georgia" pitchFamily="34" charset="0"/>
                 <a:ea typeface="Georgia" pitchFamily="34" charset="-122"/>
                 <a:cs typeface="Georgia" pitchFamily="34" charset="-120"/>
               </a:rPr>
-              <a:t>Aggregate</a:t>
-            </a:r>
-            <a:endParaRPr lang="en-US" sz="1250" dirty="0"/>
-          </a:p>
-        </p:txBody>
-      </p:sp>
-      <p:sp>
-        <p:nvSpPr>
-          <p:cNvPr id="12" name="Text 9"/>
-          <p:cNvSpPr/>
-          <p:nvPr/>
-        </p:nvSpPr>
-        <p:spPr>
-          <a:xfrm>
-            <a:off x="594360" y="2286000"/>
-            <a:ext cx="1600200" cy="594360"/>
+              <a:t>Discovery-Vitality mechanics</a:t>
+            </a:r>
+            <a:endParaRPr lang="en-US" sz="1400" dirty="0"/>
+          </a:p>
+        </p:txBody>
+      </p:sp>
+      <p:sp>
+        <p:nvSpPr>
+          <p:cNvPr id="27" name="Text 24"/>
+          <p:cNvSpPr/>
+          <p:nvPr/>
+        </p:nvSpPr>
+        <p:spPr>
+          <a:xfrm>
+            <a:off x="640080" y="3685032"/>
+            <a:ext cx="2194560" cy="768096"/>
           </a:xfrm>
           <a:prstGeom prst="rect">
             <a:avLst/>
@@ -15306,34 +16501,34 @@
               <a:buNone/>
             </a:pPr>
             <a:r>
-              <a:rPr lang="en-US" sz="850" dirty="0">
-                <a:solidFill>
-                  <a:srgbClr val="C6D3E4"/>
-                </a:solidFill>
-                <a:latin typeface="Calibri" pitchFamily="34" charset="0"/>
-                <a:ea typeface="Calibri" pitchFamily="34" charset="-122"/>
-                <a:cs typeface="Calibri" pitchFamily="34" charset="-120"/>
-              </a:rPr>
-              <a:t>Local orders in a suburb are pooled in the app rather than fragmented across trips.</a:t>
-            </a:r>
-            <a:endParaRPr lang="en-US" sz="850" dirty="0"/>
-          </a:p>
-        </p:txBody>
-      </p:sp>
-      <p:sp>
-        <p:nvSpPr>
-          <p:cNvPr id="13" name="Shape 10"/>
-          <p:cNvSpPr/>
-          <p:nvPr/>
-        </p:nvSpPr>
-        <p:spPr>
-          <a:xfrm>
-            <a:off x="2523744" y="1691640"/>
-            <a:ext cx="1929384" cy="1280160"/>
+              <a:rPr lang="en-US" sz="1200" dirty="0">
+                <a:solidFill>
+                  <a:srgbClr val="5C6779"/>
+                </a:solidFill>
+                <a:latin typeface="Calibri" pitchFamily="34" charset="0"/>
+                <a:ea typeface="Calibri" pitchFamily="34" charset="-122"/>
+                <a:cs typeface="Calibri" pitchFamily="34" charset="-120"/>
+              </a:rPr>
+              <a:t>Consecutive qualifying months unlock the reward. Behaviour is earned, not bought, and the tier resets if trading lapses.</a:t>
+            </a:r>
+            <a:endParaRPr lang="en-US" sz="1200" dirty="0"/>
+          </a:p>
+        </p:txBody>
+      </p:sp>
+      <p:sp>
+        <p:nvSpPr>
+          <p:cNvPr id="28" name="Shape 25"/>
+          <p:cNvSpPr/>
+          <p:nvPr/>
+        </p:nvSpPr>
+        <p:spPr>
+          <a:xfrm>
+            <a:off x="3246120" y="2788920"/>
+            <a:ext cx="2651760" cy="1828800"/>
           </a:xfrm>
           <a:prstGeom prst="roundRect">
             <a:avLst>
-              <a:gd name="adj" fmla="val 5714"/>
+              <a:gd name="adj" fmla="val 4000"/>
             </a:avLst>
           </a:prstGeom>
           <a:solidFill>
@@ -15349,69 +16544,57 @@
       </p:sp>
       <p:sp>
         <p:nvSpPr>
-          <p:cNvPr id="14" name="Text 11"/>
-          <p:cNvSpPr/>
-          <p:nvPr/>
-        </p:nvSpPr>
-        <p:spPr>
-          <a:xfrm>
-            <a:off x="2706624" y="1801368"/>
-            <a:ext cx="1600200" cy="201168"/>
-          </a:xfrm>
-          <a:prstGeom prst="rect">
-            <a:avLst/>
-          </a:prstGeom>
-          <a:noFill/>
-          <a:ln/>
-        </p:spPr>
-        <p:txBody>
-          <a:bodyPr wrap="square" lIns="0" tIns="0" rIns="0" bIns="0" rtlCol="0" anchor="ctr"/>
-          <a:lstStyle/>
-          <a:p>
-            <a:pPr indent="0" marL="0">
-              <a:buNone/>
-            </a:pPr>
-            <a:r>
-              <a:rPr lang="en-US" sz="800" b="1" spc="150" kern="0" dirty="0">
-                <a:solidFill>
-                  <a:srgbClr val="5C6779"/>
-                </a:solidFill>
-                <a:latin typeface="Calibri" pitchFamily="34" charset="0"/>
-                <a:ea typeface="Calibri" pitchFamily="34" charset="-122"/>
-                <a:cs typeface="Calibri" pitchFamily="34" charset="-120"/>
-              </a:rPr>
-              <a:t>STEP 2</a:t>
-            </a:r>
-            <a:endParaRPr lang="en-US" sz="800" dirty="0"/>
-          </a:p>
-        </p:txBody>
-      </p:sp>
-      <p:sp>
-        <p:nvSpPr>
-          <p:cNvPr id="15" name="Text 12"/>
-          <p:cNvSpPr/>
-          <p:nvPr/>
-        </p:nvSpPr>
-        <p:spPr>
-          <a:xfrm>
-            <a:off x="2706624" y="2002536"/>
-            <a:ext cx="1600200" cy="274320"/>
-          </a:xfrm>
-          <a:prstGeom prst="rect">
-            <a:avLst/>
-          </a:prstGeom>
-          <a:noFill/>
-          <a:ln/>
-        </p:spPr>
-        <p:txBody>
-          <a:bodyPr wrap="square" lIns="0" tIns="0" rIns="0" bIns="0" rtlCol="0" anchor="ctr"/>
-          <a:lstStyle/>
-          <a:p>
-            <a:pPr indent="0" marL="0">
-              <a:buNone/>
-            </a:pPr>
-            <a:r>
-              <a:rPr lang="en-US" sz="1250" b="1" dirty="0">
+          <p:cNvPr id="29" name="Shape 26"/>
+          <p:cNvSpPr/>
+          <p:nvPr/>
+        </p:nvSpPr>
+        <p:spPr>
+          <a:xfrm>
+            <a:off x="3474720" y="2971800"/>
+            <a:ext cx="411480" cy="54864"/>
+          </a:xfrm>
+          <a:prstGeom prst="roundRect">
+            <a:avLst>
+              <a:gd name="adj" fmla="val 50000"/>
+            </a:avLst>
+          </a:prstGeom>
+          <a:solidFill>
+            <a:srgbClr val="D0103A"/>
+          </a:solidFill>
+          <a:ln w="12700">
+            <a:solidFill>
+              <a:srgbClr val="D0103A"/>
+            </a:solidFill>
+            <a:prstDash val="solid"/>
+          </a:ln>
+        </p:spPr>
+      </p:sp>
+      <p:sp>
+        <p:nvSpPr>
+          <p:cNvPr id="30" name="Text 27"/>
+          <p:cNvSpPr/>
+          <p:nvPr/>
+        </p:nvSpPr>
+        <p:spPr>
+          <a:xfrm>
+            <a:off x="3474720" y="3118104"/>
+            <a:ext cx="2194560" cy="530352"/>
+          </a:xfrm>
+          <a:prstGeom prst="rect">
+            <a:avLst/>
+          </a:prstGeom>
+          <a:noFill/>
+          <a:ln/>
+        </p:spPr>
+        <p:txBody>
+          <a:bodyPr wrap="square" lIns="0" tIns="0" rIns="0" bIns="0" rtlCol="0" anchor="t"/>
+          <a:lstStyle/>
+          <a:p>
+            <a:pPr indent="0" marL="0">
+              <a:buNone/>
+            </a:pPr>
+            <a:r>
+              <a:rPr lang="en-US" sz="1400" b="1" dirty="0">
                 <a:solidFill>
                   <a:srgbClr val="1B3A6B"/>
                 </a:solidFill>
@@ -15419,22 +16602,22 @@
                 <a:ea typeface="Georgia" pitchFamily="34" charset="-122"/>
                 <a:cs typeface="Georgia" pitchFamily="34" charset="-120"/>
               </a:rPr>
-              <a:t>Fulfil locally</a:t>
-            </a:r>
-            <a:endParaRPr lang="en-US" sz="1250" dirty="0"/>
-          </a:p>
-        </p:txBody>
-      </p:sp>
-      <p:sp>
-        <p:nvSpPr>
-          <p:cNvPr id="16" name="Text 13"/>
-          <p:cNvSpPr/>
-          <p:nvPr/>
-        </p:nvSpPr>
-        <p:spPr>
-          <a:xfrm>
-            <a:off x="2706624" y="2286000"/>
-            <a:ext cx="1600200" cy="594360"/>
+              <a:t>Family basket sharing</a:t>
+            </a:r>
+            <a:endParaRPr lang="en-US" sz="1400" dirty="0"/>
+          </a:p>
+        </p:txBody>
+      </p:sp>
+      <p:sp>
+        <p:nvSpPr>
+          <p:cNvPr id="31" name="Text 28"/>
+          <p:cNvSpPr/>
+          <p:nvPr/>
+        </p:nvSpPr>
+        <p:spPr>
+          <a:xfrm>
+            <a:off x="3474720" y="3685032"/>
+            <a:ext cx="2194560" cy="768096"/>
           </a:xfrm>
           <a:prstGeom prst="rect">
             <a:avLst/>
@@ -15450,7 +16633,7 @@
               <a:buNone/>
             </a:pPr>
             <a:r>
-              <a:rPr lang="en-US" sz="850" dirty="0">
+              <a:rPr lang="en-US" sz="1200" dirty="0">
                 <a:solidFill>
                   <a:srgbClr val="5C6779"/>
                 </a:solidFill>
@@ -15458,26 +16641,53 @@
                 <a:ea typeface="Calibri" pitchFamily="34" charset="-122"/>
                 <a:cs typeface="Calibri" pitchFamily="34" charset="-120"/>
               </a:rPr>
-              <a:t>The nearest tuck shop picks and hands over, cutting distance, fuel and delivery cost.</a:t>
-            </a:r>
-            <a:endParaRPr lang="en-US" sz="850" dirty="0"/>
-          </a:p>
-        </p:txBody>
-      </p:sp>
-      <p:sp>
-        <p:nvSpPr>
-          <p:cNvPr id="17" name="Shape 14"/>
-          <p:cNvSpPr/>
-          <p:nvPr/>
-        </p:nvSpPr>
-        <p:spPr>
-          <a:xfrm>
-            <a:off x="4636008" y="1691640"/>
-            <a:ext cx="1929384" cy="1280160"/>
+              <a:t>Several household members contribute to one qualifying basket, so families reach the threshold faster and consolidate spend on the platform.</a:t>
+            </a:r>
+            <a:endParaRPr lang="en-US" sz="1200" dirty="0"/>
+          </a:p>
+        </p:txBody>
+      </p:sp>
+      <p:sp>
+        <p:nvSpPr>
+          <p:cNvPr id="32" name="Shape 29"/>
+          <p:cNvSpPr/>
+          <p:nvPr/>
+        </p:nvSpPr>
+        <p:spPr>
+          <a:xfrm>
+            <a:off x="6080760" y="2788920"/>
+            <a:ext cx="2651760" cy="1828800"/>
           </a:xfrm>
           <a:prstGeom prst="roundRect">
             <a:avLst>
-              <a:gd name="adj" fmla="val 5714"/>
+              <a:gd name="adj" fmla="val 4000"/>
+            </a:avLst>
+          </a:prstGeom>
+          <a:solidFill>
+            <a:srgbClr val="FFFFFF"/>
+          </a:solidFill>
+          <a:ln w="12700">
+            <a:solidFill>
+              <a:srgbClr val="E2E5EB"/>
+            </a:solidFill>
+            <a:prstDash val="solid"/>
+          </a:ln>
+        </p:spPr>
+      </p:sp>
+      <p:sp>
+        <p:nvSpPr>
+          <p:cNvPr id="33" name="Shape 30"/>
+          <p:cNvSpPr/>
+          <p:nvPr/>
+        </p:nvSpPr>
+        <p:spPr>
+          <a:xfrm>
+            <a:off x="6309360" y="2971800"/>
+            <a:ext cx="411480" cy="54864"/>
+          </a:xfrm>
+          <a:prstGeom prst="roundRect">
+            <a:avLst>
+              <a:gd name="adj" fmla="val 50000"/>
             </a:avLst>
           </a:prstGeom>
           <a:solidFill>
@@ -15493,92 +16703,53 @@
       </p:sp>
       <p:sp>
         <p:nvSpPr>
-          <p:cNvPr id="18" name="Text 15"/>
-          <p:cNvSpPr/>
-          <p:nvPr/>
-        </p:nvSpPr>
-        <p:spPr>
-          <a:xfrm>
-            <a:off x="4818888" y="1801368"/>
-            <a:ext cx="1600200" cy="201168"/>
-          </a:xfrm>
-          <a:prstGeom prst="rect">
-            <a:avLst/>
-          </a:prstGeom>
-          <a:noFill/>
-          <a:ln/>
-        </p:spPr>
-        <p:txBody>
-          <a:bodyPr wrap="square" lIns="0" tIns="0" rIns="0" bIns="0" rtlCol="0" anchor="ctr"/>
-          <a:lstStyle/>
-          <a:p>
-            <a:pPr indent="0" marL="0">
-              <a:buNone/>
-            </a:pPr>
-            <a:r>
-              <a:rPr lang="en-US" sz="800" b="1" spc="150" kern="0" dirty="0">
-                <a:solidFill>
-                  <a:srgbClr val="AEBED2"/>
-                </a:solidFill>
-                <a:latin typeface="Calibri" pitchFamily="34" charset="0"/>
-                <a:ea typeface="Calibri" pitchFamily="34" charset="-122"/>
-                <a:cs typeface="Calibri" pitchFamily="34" charset="-120"/>
-              </a:rPr>
-              <a:t>STEP 3</a:t>
-            </a:r>
-            <a:endParaRPr lang="en-US" sz="800" dirty="0"/>
-          </a:p>
-        </p:txBody>
-      </p:sp>
-      <p:sp>
-        <p:nvSpPr>
-          <p:cNvPr id="19" name="Text 16"/>
-          <p:cNvSpPr/>
-          <p:nvPr/>
-        </p:nvSpPr>
-        <p:spPr>
-          <a:xfrm>
-            <a:off x="4818888" y="2002536"/>
-            <a:ext cx="1600200" cy="274320"/>
-          </a:xfrm>
-          <a:prstGeom prst="rect">
-            <a:avLst/>
-          </a:prstGeom>
-          <a:noFill/>
-          <a:ln/>
-        </p:spPr>
-        <p:txBody>
-          <a:bodyPr wrap="square" lIns="0" tIns="0" rIns="0" bIns="0" rtlCol="0" anchor="ctr"/>
-          <a:lstStyle/>
-          <a:p>
-            <a:pPr indent="0" marL="0">
-              <a:buNone/>
-            </a:pPr>
-            <a:r>
-              <a:rPr lang="en-US" sz="1250" b="1" dirty="0">
-                <a:solidFill>
-                  <a:srgbClr val="FFFFFF"/>
+          <p:cNvPr id="34" name="Text 31"/>
+          <p:cNvSpPr/>
+          <p:nvPr/>
+        </p:nvSpPr>
+        <p:spPr>
+          <a:xfrm>
+            <a:off x="6309360" y="3118104"/>
+            <a:ext cx="2194560" cy="530352"/>
+          </a:xfrm>
+          <a:prstGeom prst="rect">
+            <a:avLst/>
+          </a:prstGeom>
+          <a:noFill/>
+          <a:ln/>
+        </p:spPr>
+        <p:txBody>
+          <a:bodyPr wrap="square" lIns="0" tIns="0" rIns="0" bIns="0" rtlCol="0" anchor="t"/>
+          <a:lstStyle/>
+          <a:p>
+            <a:pPr indent="0" marL="0">
+              <a:buNone/>
+            </a:pPr>
+            <a:r>
+              <a:rPr lang="en-US" sz="1400" b="1" dirty="0">
+                <a:solidFill>
+                  <a:srgbClr val="1B3A6B"/>
                 </a:solidFill>
                 <a:latin typeface="Georgia" pitchFamily="34" charset="0"/>
                 <a:ea typeface="Georgia" pitchFamily="34" charset="-122"/>
                 <a:cs typeface="Georgia" pitchFamily="34" charset="-120"/>
               </a:rPr>
-              <a:t>Repackage</a:t>
-            </a:r>
-            <a:endParaRPr lang="en-US" sz="1250" dirty="0"/>
-          </a:p>
-        </p:txBody>
-      </p:sp>
-      <p:sp>
-        <p:nvSpPr>
-          <p:cNvPr id="20" name="Text 17"/>
-          <p:cNvSpPr/>
-          <p:nvPr/>
-        </p:nvSpPr>
-        <p:spPr>
-          <a:xfrm>
-            <a:off x="4818888" y="2286000"/>
-            <a:ext cx="1600200" cy="594360"/>
+              <a:t>The real purpose</a:t>
+            </a:r>
+            <a:endParaRPr lang="en-US" sz="1400" dirty="0"/>
+          </a:p>
+        </p:txBody>
+      </p:sp>
+      <p:sp>
+        <p:nvSpPr>
+          <p:cNvPr id="35" name="Text 32"/>
+          <p:cNvSpPr/>
+          <p:nvPr/>
+        </p:nvSpPr>
+        <p:spPr>
+          <a:xfrm>
+            <a:off x="6309360" y="3685032"/>
+            <a:ext cx="2194560" cy="768096"/>
           </a:xfrm>
           <a:prstGeom prst="rect">
             <a:avLst/>
@@ -15594,73 +16765,7 @@
               <a:buNone/>
             </a:pPr>
             <a:r>
-              <a:rPr lang="en-US" sz="850" dirty="0">
-                <a:solidFill>
-                  <a:srgbClr val="C6D3E4"/>
-                </a:solidFill>
-                <a:latin typeface="Calibri" pitchFamily="34" charset="0"/>
-                <a:ea typeface="Calibri" pitchFamily="34" charset="-122"/>
-                <a:cs typeface="Calibri" pitchFamily="34" charset="-120"/>
-              </a:rPr>
-              <a:t>Bulk stock is broken into the 200g-type pack sizes the market actually buys.</a:t>
-            </a:r>
-            <a:endParaRPr lang="en-US" sz="850" dirty="0"/>
-          </a:p>
-        </p:txBody>
-      </p:sp>
-      <p:sp>
-        <p:nvSpPr>
-          <p:cNvPr id="21" name="Shape 18"/>
-          <p:cNvSpPr/>
-          <p:nvPr/>
-        </p:nvSpPr>
-        <p:spPr>
-          <a:xfrm>
-            <a:off x="6748272" y="1691640"/>
-            <a:ext cx="1929384" cy="1280160"/>
-          </a:xfrm>
-          <a:prstGeom prst="roundRect">
-            <a:avLst>
-              <a:gd name="adj" fmla="val 5714"/>
-            </a:avLst>
-          </a:prstGeom>
-          <a:solidFill>
-            <a:srgbClr val="FFFFFF"/>
-          </a:solidFill>
-          <a:ln w="12700">
-            <a:solidFill>
-              <a:srgbClr val="E2E5EB"/>
-            </a:solidFill>
-            <a:prstDash val="solid"/>
-          </a:ln>
-        </p:spPr>
-      </p:sp>
-      <p:sp>
-        <p:nvSpPr>
-          <p:cNvPr id="22" name="Text 19"/>
-          <p:cNvSpPr/>
-          <p:nvPr/>
-        </p:nvSpPr>
-        <p:spPr>
-          <a:xfrm>
-            <a:off x="6931152" y="1801368"/>
-            <a:ext cx="1600200" cy="201168"/>
-          </a:xfrm>
-          <a:prstGeom prst="rect">
-            <a:avLst/>
-          </a:prstGeom>
-          <a:noFill/>
-          <a:ln/>
-        </p:spPr>
-        <p:txBody>
-          <a:bodyPr wrap="square" lIns="0" tIns="0" rIns="0" bIns="0" rtlCol="0" anchor="ctr"/>
-          <a:lstStyle/>
-          <a:p>
-            <a:pPr indent="0" marL="0">
-              <a:buNone/>
-            </a:pPr>
-            <a:r>
-              <a:rPr lang="en-US" sz="800" b="1" spc="150" kern="0" dirty="0">
+              <a:rPr lang="en-US" sz="1200" dirty="0">
                 <a:solidFill>
                   <a:srgbClr val="5C6779"/>
                 </a:solidFill>
@@ -15668,349 +16773,7 @@
                 <a:ea typeface="Calibri" pitchFamily="34" charset="-122"/>
                 <a:cs typeface="Calibri" pitchFamily="34" charset="-120"/>
               </a:rPr>
-              <a:t>STEP 4</a:t>
-            </a:r>
-            <a:endParaRPr lang="en-US" sz="800" dirty="0"/>
-          </a:p>
-        </p:txBody>
-      </p:sp>
-      <p:sp>
-        <p:nvSpPr>
-          <p:cNvPr id="23" name="Text 20"/>
-          <p:cNvSpPr/>
-          <p:nvPr/>
-        </p:nvSpPr>
-        <p:spPr>
-          <a:xfrm>
-            <a:off x="6931152" y="2002536"/>
-            <a:ext cx="1600200" cy="274320"/>
-          </a:xfrm>
-          <a:prstGeom prst="rect">
-            <a:avLst/>
-          </a:prstGeom>
-          <a:noFill/>
-          <a:ln/>
-        </p:spPr>
-        <p:txBody>
-          <a:bodyPr wrap="square" lIns="0" tIns="0" rIns="0" bIns="0" rtlCol="0" anchor="ctr"/>
-          <a:lstStyle/>
-          <a:p>
-            <a:pPr indent="0" marL="0">
-              <a:buNone/>
-            </a:pPr>
-            <a:r>
-              <a:rPr lang="en-US" sz="1250" b="1" dirty="0">
-                <a:solidFill>
-                  <a:srgbClr val="1B3A6B"/>
-                </a:solidFill>
-                <a:latin typeface="Georgia" pitchFamily="34" charset="0"/>
-                <a:ea typeface="Georgia" pitchFamily="34" charset="-122"/>
-                <a:cs typeface="Georgia" pitchFamily="34" charset="-120"/>
-              </a:rPr>
-              <a:t>Supply</a:t>
-            </a:r>
-            <a:endParaRPr lang="en-US" sz="1250" dirty="0"/>
-          </a:p>
-        </p:txBody>
-      </p:sp>
-      <p:sp>
-        <p:nvSpPr>
-          <p:cNvPr id="24" name="Text 21"/>
-          <p:cNvSpPr/>
-          <p:nvPr/>
-        </p:nvSpPr>
-        <p:spPr>
-          <a:xfrm>
-            <a:off x="6931152" y="2286000"/>
-            <a:ext cx="1600200" cy="594360"/>
-          </a:xfrm>
-          <a:prstGeom prst="rect">
-            <a:avLst/>
-          </a:prstGeom>
-          <a:noFill/>
-          <a:ln/>
-        </p:spPr>
-        <p:txBody>
-          <a:bodyPr wrap="square" lIns="0" tIns="0" rIns="0" bIns="0" rtlCol="0" anchor="t"/>
-          <a:lstStyle/>
-          <a:p>
-            <a:pPr indent="0" marL="0">
-              <a:buNone/>
-            </a:pPr>
-            <a:r>
-              <a:rPr lang="en-US" sz="850" dirty="0">
-                <a:solidFill>
-                  <a:srgbClr val="5C6779"/>
-                </a:solidFill>
-                <a:latin typeface="Calibri" pitchFamily="34" charset="0"/>
-                <a:ea typeface="Calibri" pitchFamily="34" charset="-122"/>
-                <a:cs typeface="Calibri" pitchFamily="34" charset="-120"/>
-              </a:rPr>
-              <a:t>The retailer sells bulk into the channel as a wholesaler and keeps the volume.</a:t>
-            </a:r>
-            <a:endParaRPr lang="en-US" sz="850" dirty="0"/>
-          </a:p>
-        </p:txBody>
-      </p:sp>
-      <p:sp>
-        <p:nvSpPr>
-          <p:cNvPr id="25" name="Shape 22"/>
-          <p:cNvSpPr/>
-          <p:nvPr/>
-        </p:nvSpPr>
-        <p:spPr>
-          <a:xfrm>
-            <a:off x="411480" y="3108960"/>
-            <a:ext cx="4069080" cy="1463040"/>
-          </a:xfrm>
-          <a:prstGeom prst="roundRect">
-            <a:avLst>
-              <a:gd name="adj" fmla="val 5000"/>
-            </a:avLst>
-          </a:prstGeom>
-          <a:solidFill>
-            <a:srgbClr val="FFFFFF"/>
-          </a:solidFill>
-          <a:ln w="12700">
-            <a:solidFill>
-              <a:srgbClr val="E2E5EB"/>
-            </a:solidFill>
-            <a:prstDash val="solid"/>
-          </a:ln>
-        </p:spPr>
-      </p:sp>
-      <p:sp>
-        <p:nvSpPr>
-          <p:cNvPr id="26" name="Shape 23"/>
-          <p:cNvSpPr/>
-          <p:nvPr/>
-        </p:nvSpPr>
-        <p:spPr>
-          <a:xfrm>
-            <a:off x="640080" y="3337560"/>
-            <a:ext cx="411480" cy="54864"/>
-          </a:xfrm>
-          <a:prstGeom prst="roundRect">
-            <a:avLst>
-              <a:gd name="adj" fmla="val 50000"/>
-            </a:avLst>
-          </a:prstGeom>
-          <a:solidFill>
-            <a:srgbClr val="D0103A"/>
-          </a:solidFill>
-          <a:ln w="12700">
-            <a:solidFill>
-              <a:srgbClr val="D0103A"/>
-            </a:solidFill>
-            <a:prstDash val="solid"/>
-          </a:ln>
-        </p:spPr>
-      </p:sp>
-      <p:sp>
-        <p:nvSpPr>
-          <p:cNvPr id="27" name="Text 24"/>
-          <p:cNvSpPr/>
-          <p:nvPr/>
-        </p:nvSpPr>
-        <p:spPr>
-          <a:xfrm>
-            <a:off x="640080" y="3493008"/>
-            <a:ext cx="3611880" cy="530352"/>
-          </a:xfrm>
-          <a:prstGeom prst="rect">
-            <a:avLst/>
-          </a:prstGeom>
-          <a:noFill/>
-          <a:ln/>
-        </p:spPr>
-        <p:txBody>
-          <a:bodyPr wrap="square" lIns="0" tIns="0" rIns="0" bIns="0" rtlCol="0" anchor="t"/>
-          <a:lstStyle/>
-          <a:p>
-            <a:pPr indent="0" marL="0">
-              <a:buNone/>
-            </a:pPr>
-            <a:r>
-              <a:rPr lang="en-US" sz="1400" b="1" dirty="0">
-                <a:solidFill>
-                  <a:srgbClr val="1B3A6B"/>
-                </a:solidFill>
-                <a:latin typeface="Georgia" pitchFamily="34" charset="0"/>
-                <a:ea typeface="Georgia" pitchFamily="34" charset="-122"/>
-                <a:cs typeface="Georgia" pitchFamily="34" charset="-120"/>
-              </a:rPr>
-              <a:t>Pack size is the unlock</a:t>
-            </a:r>
-            <a:endParaRPr lang="en-US" sz="1400" dirty="0"/>
-          </a:p>
-        </p:txBody>
-      </p:sp>
-      <p:sp>
-        <p:nvSpPr>
-          <p:cNvPr id="28" name="Text 25"/>
-          <p:cNvSpPr/>
-          <p:nvPr/>
-        </p:nvSpPr>
-        <p:spPr>
-          <a:xfrm>
-            <a:off x="640080" y="4069080"/>
-            <a:ext cx="3611880" cy="274320"/>
-          </a:xfrm>
-          <a:prstGeom prst="rect">
-            <a:avLst/>
-          </a:prstGeom>
-          <a:noFill/>
-          <a:ln/>
-        </p:spPr>
-        <p:txBody>
-          <a:bodyPr wrap="square" lIns="0" tIns="0" rIns="0" bIns="0" rtlCol="0" anchor="t"/>
-          <a:lstStyle/>
-          <a:p>
-            <a:pPr indent="0" marL="0">
-              <a:buNone/>
-            </a:pPr>
-            <a:r>
-              <a:rPr lang="en-US" sz="1200" dirty="0">
-                <a:solidFill>
-                  <a:srgbClr val="5C6779"/>
-                </a:solidFill>
-                <a:latin typeface="Calibri" pitchFamily="34" charset="0"/>
-                <a:ea typeface="Calibri" pitchFamily="34" charset="-122"/>
-                <a:cs typeface="Calibri" pitchFamily="34" charset="-120"/>
-              </a:rPr>
-              <a:t>Households buy 200g, not 2kg. The retailer sells bulk to the tuck shop, the tuck shop repackages to the price point the street can afford — the small-multipack playbook proven by packaged brands expanding regionally.</a:t>
-            </a:r>
-            <a:endParaRPr lang="en-US" sz="1200" dirty="0"/>
-          </a:p>
-        </p:txBody>
-      </p:sp>
-      <p:sp>
-        <p:nvSpPr>
-          <p:cNvPr id="29" name="Shape 26"/>
-          <p:cNvSpPr/>
-          <p:nvPr/>
-        </p:nvSpPr>
-        <p:spPr>
-          <a:xfrm>
-            <a:off x="4663440" y="3108960"/>
-            <a:ext cx="4069080" cy="1463040"/>
-          </a:xfrm>
-          <a:prstGeom prst="roundRect">
-            <a:avLst>
-              <a:gd name="adj" fmla="val 5000"/>
-            </a:avLst>
-          </a:prstGeom>
-          <a:solidFill>
-            <a:srgbClr val="FFFFFF"/>
-          </a:solidFill>
-          <a:ln w="12700">
-            <a:solidFill>
-              <a:srgbClr val="E2E5EB"/>
-            </a:solidFill>
-            <a:prstDash val="solid"/>
-          </a:ln>
-        </p:spPr>
-      </p:sp>
-      <p:sp>
-        <p:nvSpPr>
-          <p:cNvPr id="30" name="Shape 27"/>
-          <p:cNvSpPr/>
-          <p:nvPr/>
-        </p:nvSpPr>
-        <p:spPr>
-          <a:xfrm>
-            <a:off x="4892040" y="3337560"/>
-            <a:ext cx="411480" cy="54864"/>
-          </a:xfrm>
-          <a:prstGeom prst="roundRect">
-            <a:avLst>
-              <a:gd name="adj" fmla="val 50000"/>
-            </a:avLst>
-          </a:prstGeom>
-          <a:solidFill>
-            <a:srgbClr val="1B3A6B"/>
-          </a:solidFill>
-          <a:ln w="12700">
-            <a:solidFill>
-              <a:srgbClr val="1B3A6B"/>
-            </a:solidFill>
-            <a:prstDash val="solid"/>
-          </a:ln>
-        </p:spPr>
-      </p:sp>
-      <p:sp>
-        <p:nvSpPr>
-          <p:cNvPr id="31" name="Text 28"/>
-          <p:cNvSpPr/>
-          <p:nvPr/>
-        </p:nvSpPr>
-        <p:spPr>
-          <a:xfrm>
-            <a:off x="4892040" y="3493008"/>
-            <a:ext cx="3611880" cy="530352"/>
-          </a:xfrm>
-          <a:prstGeom prst="rect">
-            <a:avLst/>
-          </a:prstGeom>
-          <a:noFill/>
-          <a:ln/>
-        </p:spPr>
-        <p:txBody>
-          <a:bodyPr wrap="square" lIns="0" tIns="0" rIns="0" bIns="0" rtlCol="0" anchor="t"/>
-          <a:lstStyle/>
-          <a:p>
-            <a:pPr indent="0" marL="0">
-              <a:buNone/>
-            </a:pPr>
-            <a:r>
-              <a:rPr lang="en-US" sz="1400" b="1" dirty="0">
-                <a:solidFill>
-                  <a:srgbClr val="1B3A6B"/>
-                </a:solidFill>
-                <a:latin typeface="Georgia" pitchFamily="34" charset="0"/>
-                <a:ea typeface="Georgia" pitchFamily="34" charset="-122"/>
-                <a:cs typeface="Georgia" pitchFamily="34" charset="-120"/>
-              </a:rPr>
-              <a:t>The government argument</a:t>
-            </a:r>
-            <a:endParaRPr lang="en-US" sz="1400" dirty="0"/>
-          </a:p>
-        </p:txBody>
-      </p:sp>
-      <p:sp>
-        <p:nvSpPr>
-          <p:cNvPr id="32" name="Text 29"/>
-          <p:cNvSpPr/>
-          <p:nvPr/>
-        </p:nvSpPr>
-        <p:spPr>
-          <a:xfrm>
-            <a:off x="4892040" y="4069080"/>
-            <a:ext cx="3611880" cy="274320"/>
-          </a:xfrm>
-          <a:prstGeom prst="rect">
-            <a:avLst/>
-          </a:prstGeom>
-          <a:noFill/>
-          <a:ln/>
-        </p:spPr>
-        <p:txBody>
-          <a:bodyPr wrap="square" lIns="0" tIns="0" rIns="0" bIns="0" rtlCol="0" anchor="t"/>
-          <a:lstStyle/>
-          <a:p>
-            <a:pPr indent="0" marL="0">
-              <a:buNone/>
-            </a:pPr>
-            <a:r>
-              <a:rPr lang="en-US" sz="1200" dirty="0">
-                <a:solidFill>
-                  <a:srgbClr val="5C6779"/>
-                </a:solidFill>
-                <a:latin typeface="Calibri" pitchFamily="34" charset="0"/>
-                <a:ea typeface="Calibri" pitchFamily="34" charset="-122"/>
-                <a:cs typeface="Calibri" pitchFamily="34" charset="-120"/>
-              </a:rPr>
-              <a:t>Routing informal trade through the platform makes it visible: tax is captured, stock is traceable and counterfeit product is squeezed out. Legitimisation, not enforcement.</a:t>
+              <a:t>A ~US$50 landed handset with the markup absorbed migrates 2G and 3G users onto the platform. Device cost is customer acquisition, booked as such.</a:t>
             </a:r>
             <a:endParaRPr lang="en-US" sz="1200" dirty="0"/>
           </a:p>
@@ -16132,7 +16895,7 @@
                 <a:ea typeface="Calibri" pitchFamily="34" charset="-122"/>
                 <a:cs typeface="Calibri" pitchFamily="34" charset="-120"/>
               </a:rPr>
-              <a:t>SLIDE 22 · COMMERCIAL &amp; ENTITY STRUCTURE</a:t>
+              <a:t>SLIDE 22 · PAYMENT RAILS</a:t>
             </a:r>
             <a:endParaRPr lang="en-US" sz="1100" dirty="0"/>
           </a:p>
@@ -16288,7 +17051,7 @@
                 <a:ea typeface="Georgia" pitchFamily="34" charset="-122"/>
                 <a:cs typeface="Georgia" pitchFamily="34" charset="-120"/>
               </a:rPr>
-              <a:t>Hybrid commercial model, two-country structure</a:t>
+              <a:t>Bank-agnostic by design, multi-bank in practice</a:t>
             </a:r>
             <a:endParaRPr lang="en-US" sz="3000" dirty="0"/>
           </a:p>
@@ -16303,11 +17066,11 @@
         <p:spPr>
           <a:xfrm>
             <a:off x="411480" y="1691640"/>
-            <a:ext cx="2651760" cy="1143000"/>
+            <a:ext cx="4069080" cy="2148840"/>
           </a:xfrm>
           <a:prstGeom prst="roundRect">
             <a:avLst>
-              <a:gd name="adj" fmla="val 6400"/>
+              <a:gd name="adj" fmla="val 3404"/>
             </a:avLst>
           </a:prstGeom>
           <a:solidFill>
@@ -16330,7 +17093,7 @@
         <p:spPr>
           <a:xfrm>
             <a:off x="612648" y="1856232"/>
-            <a:ext cx="2249424" cy="384048"/>
+            <a:ext cx="3666744" cy="384048"/>
           </a:xfrm>
           <a:prstGeom prst="rect">
             <a:avLst/>
@@ -16354,7 +17117,7 @@
                 <a:ea typeface="Georgia" pitchFamily="34" charset="-122"/>
                 <a:cs typeface="Georgia" pitchFamily="34" charset="-120"/>
               </a:rPr>
-              <a:t>White-label</a:t>
+              <a:t>What we say to banks</a:t>
             </a:r>
             <a:endParaRPr lang="en-US" sz="1300" dirty="0"/>
           </a:p>
@@ -16369,7 +17132,7 @@
         <p:spPr>
           <a:xfrm>
             <a:off x="612648" y="2258568"/>
-            <a:ext cx="2249424" cy="411480"/>
+            <a:ext cx="3666744" cy="1417320"/>
           </a:xfrm>
           <a:prstGeom prst="rect">
             <a:avLst/>
@@ -16393,10 +17156,33 @@
                 <a:ea typeface="Calibri" pitchFamily="34" charset="-122"/>
                 <a:cs typeface="Calibri" pitchFamily="34" charset="-120"/>
               </a:rPr>
-              <a:t>The storefront and app ship under the retailer's brand, licensed rather than sold.</a:t>
+              <a:t>Plug your remittance APIs into the platform and we bring transaction share-of-wallet: recurring diaspora flows landing as retail settlement rather than cash-out.</a:t>
             </a:r>
             <a:endParaRPr lang="en-US" sz="1000" dirty="0"/>
           </a:p>
+          <a:p>
+            <a:pPr indent="0" marL="0">
+              <a:buNone/>
+            </a:pPr>
+            <a:endParaRPr lang="en-US" sz="1000" dirty="0"/>
+          </a:p>
+          <a:p>
+            <a:pPr indent="0" marL="0">
+              <a:buNone/>
+            </a:pPr>
+            <a:r>
+              <a:rPr lang="en-US" sz="1000" dirty="0">
+                <a:solidFill>
+                  <a:srgbClr val="D5DEEA"/>
+                </a:solidFill>
+                <a:latin typeface="Calibri" pitchFamily="34" charset="0"/>
+                <a:ea typeface="Calibri" pitchFamily="34" charset="-122"/>
+                <a:cs typeface="Calibri" pitchFamily="34" charset="-120"/>
+              </a:rPr>
+              <a:t>No exclusivity is requested and none is given. Every rail is one integration among several, so pricing stays competitive and no single institution gates the platform.</a:t>
+            </a:r>
+            <a:endParaRPr lang="en-US" sz="1000" dirty="0"/>
+          </a:p>
         </p:txBody>
       </p:sp>
       <p:sp>
@@ -16407,12 +17193,12 @@
         </p:nvSpPr>
         <p:spPr>
           <a:xfrm>
-            <a:off x="3246120" y="1691640"/>
-            <a:ext cx="2651760" cy="1143000"/>
+            <a:off x="4663440" y="1691640"/>
+            <a:ext cx="4069080" cy="2148840"/>
           </a:xfrm>
           <a:prstGeom prst="roundRect">
             <a:avLst>
-              <a:gd name="adj" fmla="val 6400"/>
+              <a:gd name="adj" fmla="val 3404"/>
             </a:avLst>
           </a:prstGeom>
           <a:solidFill>
@@ -16434,8 +17220,8 @@
         </p:nvSpPr>
         <p:spPr>
           <a:xfrm>
-            <a:off x="3447288" y="1856232"/>
-            <a:ext cx="2249424" cy="384048"/>
+            <a:off x="4864608" y="1856232"/>
+            <a:ext cx="3666744" cy="384048"/>
           </a:xfrm>
           <a:prstGeom prst="rect">
             <a:avLst/>
@@ -16459,7 +17245,7 @@
                 <a:ea typeface="Georgia" pitchFamily="34" charset="-122"/>
                 <a:cs typeface="Georgia" pitchFamily="34" charset="-120"/>
               </a:rPr>
-              <a:t>Subscription</a:t>
+              <a:t>What we say to the retailer</a:t>
             </a:r>
             <a:endParaRPr lang="en-US" sz="1300" dirty="0"/>
           </a:p>
@@ -16473,8 +17259,8 @@
         </p:nvSpPr>
         <p:spPr>
           <a:xfrm>
-            <a:off x="3447288" y="2258568"/>
-            <a:ext cx="2249424" cy="411480"/>
+            <a:off x="4864608" y="2258568"/>
+            <a:ext cx="3666744" cy="1417320"/>
           </a:xfrm>
           <a:prstGeom prst="rect">
             <a:avLst/>
@@ -16498,10 +17284,33 @@
                 <a:ea typeface="Calibri" pitchFamily="34" charset="-122"/>
                 <a:cs typeface="Calibri" pitchFamily="34" charset="-120"/>
               </a:rPr>
-              <a:t>Tiered monthly platform fees per tenant, opening at a 100,000-participant tier.</a:t>
+              <a:t>Banks bring critical mass. Their diaspora bases are already captured audiences; the platform converts those balances into baskets inside your estate.</a:t>
             </a:r>
             <a:endParaRPr lang="en-US" sz="1000" dirty="0"/>
           </a:p>
+          <a:p>
+            <a:pPr indent="0" marL="0">
+              <a:buNone/>
+            </a:pPr>
+            <a:endParaRPr lang="en-US" sz="1000" dirty="0"/>
+          </a:p>
+          <a:p>
+            <a:pPr indent="0" marL="0">
+              <a:buNone/>
+            </a:pPr>
+            <a:r>
+              <a:rPr lang="en-US" sz="1000" dirty="0">
+                <a:solidFill>
+                  <a:srgbClr val="D5DEEA"/>
+                </a:solidFill>
+                <a:latin typeface="Calibri" pitchFamily="34" charset="0"/>
+                <a:ea typeface="Calibri" pitchFamily="34" charset="-122"/>
+                <a:cs typeface="Calibri" pitchFamily="34" charset="-120"/>
+              </a:rPr>
+              <a:t>Institutions under discussion are prospects at this stage. Nothing is presented in-app as a confirmed partnership until an agreement is signed.</a:t>
+            </a:r>
+            <a:endParaRPr lang="en-US" sz="1000" dirty="0"/>
+          </a:p>
         </p:txBody>
       </p:sp>
       <p:sp>
@@ -16512,20 +17321,20 @@
         </p:nvSpPr>
         <p:spPr>
           <a:xfrm>
-            <a:off x="6080760" y="1691640"/>
-            <a:ext cx="2651760" cy="1143000"/>
+            <a:off x="411480" y="3977640"/>
+            <a:ext cx="8321040" cy="658368"/>
           </a:xfrm>
           <a:prstGeom prst="roundRect">
             <a:avLst>
-              <a:gd name="adj" fmla="val 6400"/>
+              <a:gd name="adj" fmla="val 11111"/>
             </a:avLst>
           </a:prstGeom>
           <a:solidFill>
-            <a:srgbClr val="1E426F"/>
+            <a:srgbClr val="D0103A"/>
           </a:solidFill>
           <a:ln w="12700">
             <a:solidFill>
-              <a:srgbClr val="1E426F"/>
+              <a:srgbClr val="D0103A"/>
             </a:solidFill>
             <a:prstDash val="solid"/>
           </a:ln>
@@ -16539,322 +17348,34 @@
         </p:nvSpPr>
         <p:spPr>
           <a:xfrm>
-            <a:off x="6281928" y="1856232"/>
-            <a:ext cx="2249424" cy="384048"/>
-          </a:xfrm>
-          <a:prstGeom prst="rect">
-            <a:avLst/>
-          </a:prstGeom>
-          <a:noFill/>
-          <a:ln/>
-        </p:spPr>
-        <p:txBody>
-          <a:bodyPr wrap="square" lIns="0" tIns="0" rIns="0" bIns="0" rtlCol="0" anchor="t"/>
-          <a:lstStyle/>
-          <a:p>
-            <a:pPr indent="0" marL="0">
-              <a:buNone/>
-            </a:pPr>
-            <a:r>
-              <a:rPr lang="en-US" sz="1300" b="1" dirty="0">
+            <a:off x="640080" y="3977640"/>
+            <a:ext cx="7863840" cy="658368"/>
+          </a:xfrm>
+          <a:prstGeom prst="rect">
+            <a:avLst/>
+          </a:prstGeom>
+          <a:noFill/>
+          <a:ln/>
+        </p:spPr>
+        <p:txBody>
+          <a:bodyPr wrap="square" lIns="0" tIns="0" rIns="0" bIns="0" rtlCol="0" anchor="ctr"/>
+          <a:lstStyle/>
+          <a:p>
+            <a:pPr indent="0" marL="0">
+              <a:buNone/>
+            </a:pPr>
+            <a:r>
+              <a:rPr lang="en-US" sz="1100" dirty="0">
                 <a:solidFill>
                   <a:srgbClr val="FFFFFF"/>
                 </a:solidFill>
-                <a:latin typeface="Georgia" pitchFamily="34" charset="0"/>
-                <a:ea typeface="Georgia" pitchFamily="34" charset="-122"/>
-                <a:cs typeface="Georgia" pitchFamily="34" charset="-120"/>
-              </a:rPr>
-              <a:t>Commission</a:t>
-            </a:r>
-            <a:endParaRPr lang="en-US" sz="1300" dirty="0"/>
-          </a:p>
-        </p:txBody>
-      </p:sp>
-      <p:sp>
-        <p:nvSpPr>
-          <p:cNvPr id="17" name="Text 14"/>
-          <p:cNvSpPr/>
-          <p:nvPr/>
-        </p:nvSpPr>
-        <p:spPr>
-          <a:xfrm>
-            <a:off x="6281928" y="2258568"/>
-            <a:ext cx="2249424" cy="411480"/>
-          </a:xfrm>
-          <a:prstGeom prst="rect">
-            <a:avLst/>
-          </a:prstGeom>
-          <a:noFill/>
-          <a:ln/>
-        </p:spPr>
-        <p:txBody>
-          <a:bodyPr wrap="square" lIns="0" tIns="0" rIns="0" bIns="0" rtlCol="0" anchor="t"/>
-          <a:lstStyle/>
-          <a:p>
-            <a:pPr indent="0" marL="0">
-              <a:buNone/>
-            </a:pPr>
-            <a:r>
-              <a:rPr lang="en-US" sz="1000" dirty="0">
-                <a:solidFill>
-                  <a:srgbClr val="D5DEEA"/>
-                </a:solidFill>
-                <a:latin typeface="Calibri" pitchFamily="34" charset="0"/>
-                <a:ea typeface="Calibri" pitchFamily="34" charset="-122"/>
-                <a:cs typeface="Calibri" pitchFamily="34" charset="-120"/>
-              </a:rPr>
-              <a:t>A thin transaction share on GMV, sitting on top of the recurring base.</a:t>
-            </a:r>
-            <a:endParaRPr lang="en-US" sz="1000" dirty="0"/>
-          </a:p>
-        </p:txBody>
-      </p:sp>
-      <p:sp>
-        <p:nvSpPr>
-          <p:cNvPr id="18" name="Shape 15"/>
-          <p:cNvSpPr/>
-          <p:nvPr/>
-        </p:nvSpPr>
-        <p:spPr>
-          <a:xfrm>
-            <a:off x="411480" y="2971800"/>
-            <a:ext cx="4069080" cy="1188720"/>
-          </a:xfrm>
-          <a:prstGeom prst="roundRect">
-            <a:avLst>
-              <a:gd name="adj" fmla="val 6154"/>
-            </a:avLst>
-          </a:prstGeom>
-          <a:solidFill>
-            <a:srgbClr val="1E426F"/>
-          </a:solidFill>
-          <a:ln w="12700">
-            <a:solidFill>
-              <a:srgbClr val="1E426F"/>
-            </a:solidFill>
-            <a:prstDash val="solid"/>
-          </a:ln>
-        </p:spPr>
-      </p:sp>
-      <p:sp>
-        <p:nvSpPr>
-          <p:cNvPr id="19" name="Text 16"/>
-          <p:cNvSpPr/>
-          <p:nvPr/>
-        </p:nvSpPr>
-        <p:spPr>
-          <a:xfrm>
-            <a:off x="612648" y="3136392"/>
-            <a:ext cx="3666744" cy="384048"/>
-          </a:xfrm>
-          <a:prstGeom prst="rect">
-            <a:avLst/>
-          </a:prstGeom>
-          <a:noFill/>
-          <a:ln/>
-        </p:spPr>
-        <p:txBody>
-          <a:bodyPr wrap="square" lIns="0" tIns="0" rIns="0" bIns="0" rtlCol="0" anchor="t"/>
-          <a:lstStyle/>
-          <a:p>
-            <a:pPr indent="0" marL="0">
-              <a:buNone/>
-            </a:pPr>
-            <a:r>
-              <a:rPr lang="en-US" sz="1300" b="1" dirty="0">
-                <a:solidFill>
-                  <a:srgbClr val="FFFFFF"/>
-                </a:solidFill>
-                <a:latin typeface="Georgia" pitchFamily="34" charset="0"/>
-                <a:ea typeface="Georgia" pitchFamily="34" charset="-122"/>
-                <a:cs typeface="Georgia" pitchFamily="34" charset="-120"/>
-              </a:rPr>
-              <a:t>South African company</a:t>
-            </a:r>
-            <a:endParaRPr lang="en-US" sz="1300" dirty="0"/>
-          </a:p>
-        </p:txBody>
-      </p:sp>
-      <p:sp>
-        <p:nvSpPr>
-          <p:cNvPr id="20" name="Text 17"/>
-          <p:cNvSpPr/>
-          <p:nvPr/>
-        </p:nvSpPr>
-        <p:spPr>
-          <a:xfrm>
-            <a:off x="612648" y="3538728"/>
-            <a:ext cx="3666744" cy="457200"/>
-          </a:xfrm>
-          <a:prstGeom prst="rect">
-            <a:avLst/>
-          </a:prstGeom>
-          <a:noFill/>
-          <a:ln/>
-        </p:spPr>
-        <p:txBody>
-          <a:bodyPr wrap="square" lIns="0" tIns="0" rIns="0" bIns="0" rtlCol="0" anchor="t"/>
-          <a:lstStyle/>
-          <a:p>
-            <a:pPr indent="0" marL="0">
-              <a:buNone/>
-            </a:pPr>
-            <a:r>
-              <a:rPr lang="en-US" sz="1000" dirty="0">
-                <a:solidFill>
-                  <a:srgbClr val="D5DEEA"/>
-                </a:solidFill>
-                <a:latin typeface="Calibri" pitchFamily="34" charset="0"/>
-                <a:ea typeface="Calibri" pitchFamily="34" charset="-122"/>
-                <a:cs typeface="Calibri" pitchFamily="34" charset="-120"/>
-              </a:rPr>
-              <a:t>Holds the platform IP and raises capital where liquidity and investor access are deepest. Contracts with tenants and banks sit here.</a:t>
-            </a:r>
-            <a:endParaRPr lang="en-US" sz="1000" dirty="0"/>
-          </a:p>
-        </p:txBody>
-      </p:sp>
-      <p:sp>
-        <p:nvSpPr>
-          <p:cNvPr id="21" name="Shape 18"/>
-          <p:cNvSpPr/>
-          <p:nvPr/>
-        </p:nvSpPr>
-        <p:spPr>
-          <a:xfrm>
-            <a:off x="4663440" y="2971800"/>
-            <a:ext cx="4069080" cy="1188720"/>
-          </a:xfrm>
-          <a:prstGeom prst="roundRect">
-            <a:avLst>
-              <a:gd name="adj" fmla="val 6154"/>
-            </a:avLst>
-          </a:prstGeom>
-          <a:solidFill>
-            <a:srgbClr val="1E426F"/>
-          </a:solidFill>
-          <a:ln w="12700">
-            <a:solidFill>
-              <a:srgbClr val="1E426F"/>
-            </a:solidFill>
-            <a:prstDash val="solid"/>
-          </a:ln>
-        </p:spPr>
-      </p:sp>
-      <p:sp>
-        <p:nvSpPr>
-          <p:cNvPr id="22" name="Text 19"/>
-          <p:cNvSpPr/>
-          <p:nvPr/>
-        </p:nvSpPr>
-        <p:spPr>
-          <a:xfrm>
-            <a:off x="4864608" y="3136392"/>
-            <a:ext cx="3666744" cy="384048"/>
-          </a:xfrm>
-          <a:prstGeom prst="rect">
-            <a:avLst/>
-          </a:prstGeom>
-          <a:noFill/>
-          <a:ln/>
-        </p:spPr>
-        <p:txBody>
-          <a:bodyPr wrap="square" lIns="0" tIns="0" rIns="0" bIns="0" rtlCol="0" anchor="t"/>
-          <a:lstStyle/>
-          <a:p>
-            <a:pPr indent="0" marL="0">
-              <a:buNone/>
-            </a:pPr>
-            <a:r>
-              <a:rPr lang="en-US" sz="1300" b="1" dirty="0">
-                <a:solidFill>
-                  <a:srgbClr val="FFFFFF"/>
-                </a:solidFill>
-                <a:latin typeface="Georgia" pitchFamily="34" charset="0"/>
-                <a:ea typeface="Georgia" pitchFamily="34" charset="-122"/>
-                <a:cs typeface="Georgia" pitchFamily="34" charset="-120"/>
-              </a:rPr>
-              <a:t>Zimbabwean subsidiary</a:t>
-            </a:r>
-            <a:endParaRPr lang="en-US" sz="1300" dirty="0"/>
-          </a:p>
-        </p:txBody>
-      </p:sp>
-      <p:sp>
-        <p:nvSpPr>
-          <p:cNvPr id="23" name="Text 20"/>
-          <p:cNvSpPr/>
-          <p:nvPr/>
-        </p:nvSpPr>
-        <p:spPr>
-          <a:xfrm>
-            <a:off x="4864608" y="3538728"/>
-            <a:ext cx="3666744" cy="457200"/>
-          </a:xfrm>
-          <a:prstGeom prst="rect">
-            <a:avLst/>
-          </a:prstGeom>
-          <a:noFill/>
-          <a:ln/>
-        </p:spPr>
-        <p:txBody>
-          <a:bodyPr wrap="square" lIns="0" tIns="0" rIns="0" bIns="0" rtlCol="0" anchor="t"/>
-          <a:lstStyle/>
-          <a:p>
-            <a:pPr indent="0" marL="0">
-              <a:buNone/>
-            </a:pPr>
-            <a:r>
-              <a:rPr lang="en-US" sz="1000" dirty="0">
-                <a:solidFill>
-                  <a:srgbClr val="D5DEEA"/>
-                </a:solidFill>
-                <a:latin typeface="Calibri" pitchFamily="34" charset="0"/>
-                <a:ea typeface="Calibri" pitchFamily="34" charset="-122"/>
-                <a:cs typeface="Calibri" pitchFamily="34" charset="-120"/>
-              </a:rPr>
-              <a:t>Runs logistics, the scooter fleet and local agreements on the ground, with local employment and local regulatory standing.</a:t>
-            </a:r>
-            <a:endParaRPr lang="en-US" sz="1000" dirty="0"/>
-          </a:p>
-        </p:txBody>
-      </p:sp>
-      <p:sp>
-        <p:nvSpPr>
-          <p:cNvPr id="24" name="Text 21"/>
-          <p:cNvSpPr/>
-          <p:nvPr/>
-        </p:nvSpPr>
-        <p:spPr>
-          <a:xfrm>
-            <a:off x="411480" y="4279392"/>
-            <a:ext cx="8321040" cy="292608"/>
-          </a:xfrm>
-          <a:prstGeom prst="rect">
-            <a:avLst/>
-          </a:prstGeom>
-          <a:noFill/>
-          <a:ln/>
-        </p:spPr>
-        <p:txBody>
-          <a:bodyPr wrap="square" lIns="0" tIns="0" rIns="0" bIns="0" rtlCol="0" anchor="ctr"/>
-          <a:lstStyle/>
-          <a:p>
-            <a:pPr indent="0" marL="0">
-              <a:buNone/>
-            </a:pPr>
-            <a:r>
-              <a:rPr lang="en-US" sz="950" dirty="0">
-                <a:solidFill>
-                  <a:srgbClr val="8C9BB0"/>
-                </a:solidFill>
-                <a:latin typeface="Calibri" pitchFamily="34" charset="0"/>
-                <a:ea typeface="Calibri" pitchFamily="34" charset="-122"/>
-                <a:cs typeface="Calibri" pitchFamily="34" charset="-120"/>
-              </a:rPr>
-              <a:t>Directional as at 13 August — structure to be confirmed with tax and legal counsel before any binding term sheet.</a:t>
-            </a:r>
-            <a:endParaRPr lang="en-US" sz="950" dirty="0"/>
+                <a:latin typeface="Calibri" pitchFamily="34" charset="0"/>
+                <a:ea typeface="Calibri" pitchFamily="34" charset="-122"/>
+                <a:cs typeface="Calibri" pitchFamily="34" charset="-120"/>
+              </a:rPr>
+              <a:t>Design rule: no bank-specific logic in the core. Rails are adapters, so adding or dropping an institution is a configuration change, never a rebuild.</a:t>
+            </a:r>
+            <a:endParaRPr lang="en-US" sz="1100" dirty="0"/>
           </a:p>
         </p:txBody>
       </p:sp>
@@ -16869,6 +17390,1966 @@
 <file path=ppt/slides/slide23.xml><?xml version="1.0" encoding="utf-8"?>
 <p:sld xmlns:a="http://schemas.openxmlformats.org/drawingml/2006/main" xmlns:r="http://schemas.openxmlformats.org/officeDocument/2006/relationships" xmlns:p="http://schemas.openxmlformats.org/presentationml/2006/main">
   <p:cSld name="Slide 23">
+    <p:bg>
+      <p:bgPr>
+        <a:solidFill>
+          <a:srgbClr val="F7F7F9"/>
+        </a:solidFill>
+      </p:bgPr>
+    </p:bg>
+    <p:spTree>
+      <p:nvGrpSpPr>
+        <p:cNvPr id="1" name=""/>
+        <p:cNvGrpSpPr/>
+        <p:nvPr/>
+      </p:nvGrpSpPr>
+      <p:grpSpPr>
+        <a:xfrm>
+          <a:off x="0" y="0"/>
+          <a:ext cx="0" cy="0"/>
+          <a:chOff x="0" y="0"/>
+          <a:chExt cx="0" cy="0"/>
+        </a:xfrm>
+      </p:grpSpPr>
+      <p:sp>
+        <p:nvSpPr>
+          <p:cNvPr id="2" name="Shape 0"/>
+          <p:cNvSpPr/>
+          <p:nvPr/>
+        </p:nvSpPr>
+        <p:spPr>
+          <a:xfrm>
+            <a:off x="411480" y="274320"/>
+            <a:ext cx="1371600" cy="365760"/>
+          </a:xfrm>
+          <a:prstGeom prst="roundRect">
+            <a:avLst>
+              <a:gd name="adj" fmla="val 15000"/>
+            </a:avLst>
+          </a:prstGeom>
+          <a:solidFill>
+            <a:srgbClr val="FFFFFF"/>
+          </a:solidFill>
+          <a:ln w="12700">
+            <a:solidFill>
+              <a:srgbClr val="FFFFFF"/>
+            </a:solidFill>
+            <a:prstDash val="solid"/>
+          </a:ln>
+        </p:spPr>
+      </p:sp>
+      <p:pic>
+        <p:nvPicPr>
+          <p:cNvPr id="3" name="Image 0" descr="preencoded.png">    </p:cNvPr>
+          <p:cNvPicPr>
+            <a:picLocks noChangeAspect="1"/>
+          </p:cNvPicPr>
+          <p:nvPr/>
+        </p:nvPicPr>
+        <p:blipFill>
+          <a:blip r:embed="rId1"/>
+          <a:stretch>
+            <a:fillRect/>
+          </a:stretch>
+        </p:blipFill>
+        <p:spPr>
+          <a:xfrm>
+            <a:off x="484632" y="338328"/>
+            <a:ext cx="1225296" cy="237744"/>
+          </a:xfrm>
+          <a:prstGeom prst="rect">
+            <a:avLst/>
+          </a:prstGeom>
+        </p:spPr>
+      </p:pic>
+      <p:sp>
+        <p:nvSpPr>
+          <p:cNvPr id="4" name="Text 1"/>
+          <p:cNvSpPr/>
+          <p:nvPr/>
+        </p:nvSpPr>
+        <p:spPr>
+          <a:xfrm>
+            <a:off x="1920240" y="301752"/>
+            <a:ext cx="6263640" cy="320040"/>
+          </a:xfrm>
+          <a:prstGeom prst="rect">
+            <a:avLst/>
+          </a:prstGeom>
+          <a:noFill/>
+          <a:ln/>
+        </p:spPr>
+        <p:txBody>
+          <a:bodyPr wrap="square" rtlCol="0" anchor="ctr"/>
+          <a:lstStyle/>
+          <a:p>
+            <a:pPr indent="0" marL="0">
+              <a:buNone/>
+            </a:pPr>
+            <a:r>
+              <a:rPr lang="en-US" sz="1100" b="1" spc="200" kern="0" dirty="0">
+                <a:solidFill>
+                  <a:srgbClr val="D0103A"/>
+                </a:solidFill>
+                <a:latin typeface="Calibri" pitchFamily="34" charset="0"/>
+                <a:ea typeface="Calibri" pitchFamily="34" charset="-122"/>
+                <a:cs typeface="Calibri" pitchFamily="34" charset="-120"/>
+              </a:rPr>
+              <a:t>SLIDE 23 · WHOLESALE &amp; INFORMAL CHANNEL</a:t>
+            </a:r>
+            <a:endParaRPr lang="en-US" sz="1100" dirty="0"/>
+          </a:p>
+        </p:txBody>
+      </p:sp>
+      <p:sp>
+        <p:nvSpPr>
+          <p:cNvPr id="5" name="Text 2"/>
+          <p:cNvSpPr/>
+          <p:nvPr/>
+        </p:nvSpPr>
+        <p:spPr>
+          <a:xfrm>
+            <a:off x="8229600" y="301752"/>
+            <a:ext cx="502920" cy="320040"/>
+          </a:xfrm>
+          <a:prstGeom prst="rect">
+            <a:avLst/>
+          </a:prstGeom>
+          <a:noFill/>
+          <a:ln/>
+        </p:spPr>
+        <p:txBody>
+          <a:bodyPr wrap="square" rtlCol="0" anchor="ctr"/>
+          <a:lstStyle/>
+          <a:p>
+            <a:pPr algn="r" indent="0" marL="0">
+              <a:buNone/>
+            </a:pPr>
+            <a:r>
+              <a:rPr lang="en-US" sz="1100" b="1" dirty="0">
+                <a:solidFill>
+                  <a:srgbClr val="5C6779"/>
+                </a:solidFill>
+                <a:latin typeface="Calibri" pitchFamily="34" charset="0"/>
+                <a:ea typeface="Calibri" pitchFamily="34" charset="-122"/>
+                <a:cs typeface="Calibri" pitchFamily="34" charset="-120"/>
+              </a:rPr>
+              <a:t>24</a:t>
+            </a:r>
+            <a:endParaRPr lang="en-US" sz="1100" dirty="0"/>
+          </a:p>
+        </p:txBody>
+      </p:sp>
+      <p:sp>
+        <p:nvSpPr>
+          <p:cNvPr id="6" name="Text 3"/>
+          <p:cNvSpPr/>
+          <p:nvPr/>
+        </p:nvSpPr>
+        <p:spPr>
+          <a:xfrm>
+            <a:off x="411480" y="4686300"/>
+            <a:ext cx="4572000" cy="274320"/>
+          </a:xfrm>
+          <a:prstGeom prst="rect">
+            <a:avLst/>
+          </a:prstGeom>
+          <a:noFill/>
+          <a:ln/>
+        </p:spPr>
+        <p:txBody>
+          <a:bodyPr wrap="square" rtlCol="0" anchor="ctr"/>
+          <a:lstStyle/>
+          <a:p>
+            <a:pPr indent="0" marL="0">
+              <a:buNone/>
+            </a:pPr>
+            <a:r>
+              <a:rPr lang="en-US" sz="900" dirty="0">
+                <a:solidFill>
+                  <a:srgbClr val="5C6779"/>
+                </a:solidFill>
+                <a:latin typeface="Calibri" pitchFamily="34" charset="0"/>
+                <a:ea typeface="Calibri" pitchFamily="34" charset="-122"/>
+                <a:cs typeface="Calibri" pitchFamily="34" charset="-120"/>
+              </a:rPr>
+              <a:t>TM Pick n Pay Express — Diaspora-to-Door</a:t>
+            </a:r>
+            <a:endParaRPr lang="en-US" sz="900" dirty="0"/>
+          </a:p>
+        </p:txBody>
+      </p:sp>
+      <p:sp>
+        <p:nvSpPr>
+          <p:cNvPr id="7" name="Text 4"/>
+          <p:cNvSpPr/>
+          <p:nvPr/>
+        </p:nvSpPr>
+        <p:spPr>
+          <a:xfrm>
+            <a:off x="4160520" y="4686300"/>
+            <a:ext cx="4572000" cy="274320"/>
+          </a:xfrm>
+          <a:prstGeom prst="rect">
+            <a:avLst/>
+          </a:prstGeom>
+          <a:noFill/>
+          <a:ln/>
+        </p:spPr>
+        <p:txBody>
+          <a:bodyPr wrap="square" rtlCol="0" anchor="ctr"/>
+          <a:lstStyle/>
+          <a:p>
+            <a:pPr algn="r" indent="0" marL="0">
+              <a:buNone/>
+            </a:pPr>
+            <a:r>
+              <a:rPr lang="en-US" sz="900" dirty="0">
+                <a:solidFill>
+                  <a:srgbClr val="5C6779"/>
+                </a:solidFill>
+                <a:latin typeface="Calibri" pitchFamily="34" charset="0"/>
+                <a:ea typeface="Calibri" pitchFamily="34" charset="-122"/>
+                <a:cs typeface="Calibri" pitchFamily="34" charset="-120"/>
+              </a:rPr>
+              <a:t>Confidential · Executive Board Proposal</a:t>
+            </a:r>
+            <a:endParaRPr lang="en-US" sz="900" dirty="0"/>
+          </a:p>
+        </p:txBody>
+      </p:sp>
+      <p:sp>
+        <p:nvSpPr>
+          <p:cNvPr id="8" name="Text 5"/>
+          <p:cNvSpPr/>
+          <p:nvPr/>
+        </p:nvSpPr>
+        <p:spPr>
+          <a:xfrm>
+            <a:off x="411480" y="868680"/>
+            <a:ext cx="8321040" cy="731520"/>
+          </a:xfrm>
+          <a:prstGeom prst="rect">
+            <a:avLst/>
+          </a:prstGeom>
+          <a:noFill/>
+          <a:ln/>
+        </p:spPr>
+        <p:txBody>
+          <a:bodyPr wrap="square" rtlCol="0" anchor="ctr"/>
+          <a:lstStyle/>
+          <a:p>
+            <a:pPr indent="0" marL="0">
+              <a:buNone/>
+            </a:pPr>
+            <a:r>
+              <a:rPr lang="en-US" sz="3000" b="1" dirty="0">
+                <a:solidFill>
+                  <a:srgbClr val="1B3A6B"/>
+                </a:solidFill>
+                <a:latin typeface="Georgia" pitchFamily="34" charset="0"/>
+                <a:ea typeface="Georgia" pitchFamily="34" charset="-122"/>
+                <a:cs typeface="Georgia" pitchFamily="34" charset="-120"/>
+              </a:rPr>
+              <a:t>Tuck shops become distribution extensions, not competitors</a:t>
+            </a:r>
+            <a:endParaRPr lang="en-US" sz="3000" dirty="0"/>
+          </a:p>
+        </p:txBody>
+      </p:sp>
+      <p:sp>
+        <p:nvSpPr>
+          <p:cNvPr id="9" name="Shape 6"/>
+          <p:cNvSpPr/>
+          <p:nvPr/>
+        </p:nvSpPr>
+        <p:spPr>
+          <a:xfrm>
+            <a:off x="411480" y="1691640"/>
+            <a:ext cx="1929384" cy="1280160"/>
+          </a:xfrm>
+          <a:prstGeom prst="roundRect">
+            <a:avLst>
+              <a:gd name="adj" fmla="val 5714"/>
+            </a:avLst>
+          </a:prstGeom>
+          <a:solidFill>
+            <a:srgbClr val="1B3A6B"/>
+          </a:solidFill>
+          <a:ln w="12700">
+            <a:solidFill>
+              <a:srgbClr val="1B3A6B"/>
+            </a:solidFill>
+            <a:prstDash val="solid"/>
+          </a:ln>
+        </p:spPr>
+      </p:sp>
+      <p:sp>
+        <p:nvSpPr>
+          <p:cNvPr id="10" name="Text 7"/>
+          <p:cNvSpPr/>
+          <p:nvPr/>
+        </p:nvSpPr>
+        <p:spPr>
+          <a:xfrm>
+            <a:off x="594360" y="1801368"/>
+            <a:ext cx="1600200" cy="201168"/>
+          </a:xfrm>
+          <a:prstGeom prst="rect">
+            <a:avLst/>
+          </a:prstGeom>
+          <a:noFill/>
+          <a:ln/>
+        </p:spPr>
+        <p:txBody>
+          <a:bodyPr wrap="square" lIns="0" tIns="0" rIns="0" bIns="0" rtlCol="0" anchor="ctr"/>
+          <a:lstStyle/>
+          <a:p>
+            <a:pPr indent="0" marL="0">
+              <a:buNone/>
+            </a:pPr>
+            <a:r>
+              <a:rPr lang="en-US" sz="800" b="1" spc="150" kern="0" dirty="0">
+                <a:solidFill>
+                  <a:srgbClr val="AEBED2"/>
+                </a:solidFill>
+                <a:latin typeface="Calibri" pitchFamily="34" charset="0"/>
+                <a:ea typeface="Calibri" pitchFamily="34" charset="-122"/>
+                <a:cs typeface="Calibri" pitchFamily="34" charset="-120"/>
+              </a:rPr>
+              <a:t>STEP 1</a:t>
+            </a:r>
+            <a:endParaRPr lang="en-US" sz="800" dirty="0"/>
+          </a:p>
+        </p:txBody>
+      </p:sp>
+      <p:sp>
+        <p:nvSpPr>
+          <p:cNvPr id="11" name="Text 8"/>
+          <p:cNvSpPr/>
+          <p:nvPr/>
+        </p:nvSpPr>
+        <p:spPr>
+          <a:xfrm>
+            <a:off x="594360" y="2002536"/>
+            <a:ext cx="1600200" cy="274320"/>
+          </a:xfrm>
+          <a:prstGeom prst="rect">
+            <a:avLst/>
+          </a:prstGeom>
+          <a:noFill/>
+          <a:ln/>
+        </p:spPr>
+        <p:txBody>
+          <a:bodyPr wrap="square" lIns="0" tIns="0" rIns="0" bIns="0" rtlCol="0" anchor="ctr"/>
+          <a:lstStyle/>
+          <a:p>
+            <a:pPr indent="0" marL="0">
+              <a:buNone/>
+            </a:pPr>
+            <a:r>
+              <a:rPr lang="en-US" sz="1250" b="1" dirty="0">
+                <a:solidFill>
+                  <a:srgbClr val="FFFFFF"/>
+                </a:solidFill>
+                <a:latin typeface="Georgia" pitchFamily="34" charset="0"/>
+                <a:ea typeface="Georgia" pitchFamily="34" charset="-122"/>
+                <a:cs typeface="Georgia" pitchFamily="34" charset="-120"/>
+              </a:rPr>
+              <a:t>Aggregate</a:t>
+            </a:r>
+            <a:endParaRPr lang="en-US" sz="1250" dirty="0"/>
+          </a:p>
+        </p:txBody>
+      </p:sp>
+      <p:sp>
+        <p:nvSpPr>
+          <p:cNvPr id="12" name="Text 9"/>
+          <p:cNvSpPr/>
+          <p:nvPr/>
+        </p:nvSpPr>
+        <p:spPr>
+          <a:xfrm>
+            <a:off x="594360" y="2286000"/>
+            <a:ext cx="1600200" cy="594360"/>
+          </a:xfrm>
+          <a:prstGeom prst="rect">
+            <a:avLst/>
+          </a:prstGeom>
+          <a:noFill/>
+          <a:ln/>
+        </p:spPr>
+        <p:txBody>
+          <a:bodyPr wrap="square" lIns="0" tIns="0" rIns="0" bIns="0" rtlCol="0" anchor="t"/>
+          <a:lstStyle/>
+          <a:p>
+            <a:pPr indent="0" marL="0">
+              <a:buNone/>
+            </a:pPr>
+            <a:r>
+              <a:rPr lang="en-US" sz="850" dirty="0">
+                <a:solidFill>
+                  <a:srgbClr val="C6D3E4"/>
+                </a:solidFill>
+                <a:latin typeface="Calibri" pitchFamily="34" charset="0"/>
+                <a:ea typeface="Calibri" pitchFamily="34" charset="-122"/>
+                <a:cs typeface="Calibri" pitchFamily="34" charset="-120"/>
+              </a:rPr>
+              <a:t>Local orders in a suburb are pooled in the app rather than fragmented across trips.</a:t>
+            </a:r>
+            <a:endParaRPr lang="en-US" sz="850" dirty="0"/>
+          </a:p>
+        </p:txBody>
+      </p:sp>
+      <p:sp>
+        <p:nvSpPr>
+          <p:cNvPr id="13" name="Shape 10"/>
+          <p:cNvSpPr/>
+          <p:nvPr/>
+        </p:nvSpPr>
+        <p:spPr>
+          <a:xfrm>
+            <a:off x="2523744" y="1691640"/>
+            <a:ext cx="1929384" cy="1280160"/>
+          </a:xfrm>
+          <a:prstGeom prst="roundRect">
+            <a:avLst>
+              <a:gd name="adj" fmla="val 5714"/>
+            </a:avLst>
+          </a:prstGeom>
+          <a:solidFill>
+            <a:srgbClr val="FFFFFF"/>
+          </a:solidFill>
+          <a:ln w="12700">
+            <a:solidFill>
+              <a:srgbClr val="E2E5EB"/>
+            </a:solidFill>
+            <a:prstDash val="solid"/>
+          </a:ln>
+        </p:spPr>
+      </p:sp>
+      <p:sp>
+        <p:nvSpPr>
+          <p:cNvPr id="14" name="Text 11"/>
+          <p:cNvSpPr/>
+          <p:nvPr/>
+        </p:nvSpPr>
+        <p:spPr>
+          <a:xfrm>
+            <a:off x="2706624" y="1801368"/>
+            <a:ext cx="1600200" cy="201168"/>
+          </a:xfrm>
+          <a:prstGeom prst="rect">
+            <a:avLst/>
+          </a:prstGeom>
+          <a:noFill/>
+          <a:ln/>
+        </p:spPr>
+        <p:txBody>
+          <a:bodyPr wrap="square" lIns="0" tIns="0" rIns="0" bIns="0" rtlCol="0" anchor="ctr"/>
+          <a:lstStyle/>
+          <a:p>
+            <a:pPr indent="0" marL="0">
+              <a:buNone/>
+            </a:pPr>
+            <a:r>
+              <a:rPr lang="en-US" sz="800" b="1" spc="150" kern="0" dirty="0">
+                <a:solidFill>
+                  <a:srgbClr val="5C6779"/>
+                </a:solidFill>
+                <a:latin typeface="Calibri" pitchFamily="34" charset="0"/>
+                <a:ea typeface="Calibri" pitchFamily="34" charset="-122"/>
+                <a:cs typeface="Calibri" pitchFamily="34" charset="-120"/>
+              </a:rPr>
+              <a:t>STEP 2</a:t>
+            </a:r>
+            <a:endParaRPr lang="en-US" sz="800" dirty="0"/>
+          </a:p>
+        </p:txBody>
+      </p:sp>
+      <p:sp>
+        <p:nvSpPr>
+          <p:cNvPr id="15" name="Text 12"/>
+          <p:cNvSpPr/>
+          <p:nvPr/>
+        </p:nvSpPr>
+        <p:spPr>
+          <a:xfrm>
+            <a:off x="2706624" y="2002536"/>
+            <a:ext cx="1600200" cy="274320"/>
+          </a:xfrm>
+          <a:prstGeom prst="rect">
+            <a:avLst/>
+          </a:prstGeom>
+          <a:noFill/>
+          <a:ln/>
+        </p:spPr>
+        <p:txBody>
+          <a:bodyPr wrap="square" lIns="0" tIns="0" rIns="0" bIns="0" rtlCol="0" anchor="ctr"/>
+          <a:lstStyle/>
+          <a:p>
+            <a:pPr indent="0" marL="0">
+              <a:buNone/>
+            </a:pPr>
+            <a:r>
+              <a:rPr lang="en-US" sz="1250" b="1" dirty="0">
+                <a:solidFill>
+                  <a:srgbClr val="1B3A6B"/>
+                </a:solidFill>
+                <a:latin typeface="Georgia" pitchFamily="34" charset="0"/>
+                <a:ea typeface="Georgia" pitchFamily="34" charset="-122"/>
+                <a:cs typeface="Georgia" pitchFamily="34" charset="-120"/>
+              </a:rPr>
+              <a:t>Fulfil locally</a:t>
+            </a:r>
+            <a:endParaRPr lang="en-US" sz="1250" dirty="0"/>
+          </a:p>
+        </p:txBody>
+      </p:sp>
+      <p:sp>
+        <p:nvSpPr>
+          <p:cNvPr id="16" name="Text 13"/>
+          <p:cNvSpPr/>
+          <p:nvPr/>
+        </p:nvSpPr>
+        <p:spPr>
+          <a:xfrm>
+            <a:off x="2706624" y="2286000"/>
+            <a:ext cx="1600200" cy="594360"/>
+          </a:xfrm>
+          <a:prstGeom prst="rect">
+            <a:avLst/>
+          </a:prstGeom>
+          <a:noFill/>
+          <a:ln/>
+        </p:spPr>
+        <p:txBody>
+          <a:bodyPr wrap="square" lIns="0" tIns="0" rIns="0" bIns="0" rtlCol="0" anchor="t"/>
+          <a:lstStyle/>
+          <a:p>
+            <a:pPr indent="0" marL="0">
+              <a:buNone/>
+            </a:pPr>
+            <a:r>
+              <a:rPr lang="en-US" sz="850" dirty="0">
+                <a:solidFill>
+                  <a:srgbClr val="5C6779"/>
+                </a:solidFill>
+                <a:latin typeface="Calibri" pitchFamily="34" charset="0"/>
+                <a:ea typeface="Calibri" pitchFamily="34" charset="-122"/>
+                <a:cs typeface="Calibri" pitchFamily="34" charset="-120"/>
+              </a:rPr>
+              <a:t>The nearest tuck shop picks and hands over, cutting distance, fuel and delivery cost.</a:t>
+            </a:r>
+            <a:endParaRPr lang="en-US" sz="850" dirty="0"/>
+          </a:p>
+        </p:txBody>
+      </p:sp>
+      <p:sp>
+        <p:nvSpPr>
+          <p:cNvPr id="17" name="Shape 14"/>
+          <p:cNvSpPr/>
+          <p:nvPr/>
+        </p:nvSpPr>
+        <p:spPr>
+          <a:xfrm>
+            <a:off x="4636008" y="1691640"/>
+            <a:ext cx="1929384" cy="1280160"/>
+          </a:xfrm>
+          <a:prstGeom prst="roundRect">
+            <a:avLst>
+              <a:gd name="adj" fmla="val 5714"/>
+            </a:avLst>
+          </a:prstGeom>
+          <a:solidFill>
+            <a:srgbClr val="1B3A6B"/>
+          </a:solidFill>
+          <a:ln w="12700">
+            <a:solidFill>
+              <a:srgbClr val="1B3A6B"/>
+            </a:solidFill>
+            <a:prstDash val="solid"/>
+          </a:ln>
+        </p:spPr>
+      </p:sp>
+      <p:sp>
+        <p:nvSpPr>
+          <p:cNvPr id="18" name="Text 15"/>
+          <p:cNvSpPr/>
+          <p:nvPr/>
+        </p:nvSpPr>
+        <p:spPr>
+          <a:xfrm>
+            <a:off x="4818888" y="1801368"/>
+            <a:ext cx="1600200" cy="201168"/>
+          </a:xfrm>
+          <a:prstGeom prst="rect">
+            <a:avLst/>
+          </a:prstGeom>
+          <a:noFill/>
+          <a:ln/>
+        </p:spPr>
+        <p:txBody>
+          <a:bodyPr wrap="square" lIns="0" tIns="0" rIns="0" bIns="0" rtlCol="0" anchor="ctr"/>
+          <a:lstStyle/>
+          <a:p>
+            <a:pPr indent="0" marL="0">
+              <a:buNone/>
+            </a:pPr>
+            <a:r>
+              <a:rPr lang="en-US" sz="800" b="1" spc="150" kern="0" dirty="0">
+                <a:solidFill>
+                  <a:srgbClr val="AEBED2"/>
+                </a:solidFill>
+                <a:latin typeface="Calibri" pitchFamily="34" charset="0"/>
+                <a:ea typeface="Calibri" pitchFamily="34" charset="-122"/>
+                <a:cs typeface="Calibri" pitchFamily="34" charset="-120"/>
+              </a:rPr>
+              <a:t>STEP 3</a:t>
+            </a:r>
+            <a:endParaRPr lang="en-US" sz="800" dirty="0"/>
+          </a:p>
+        </p:txBody>
+      </p:sp>
+      <p:sp>
+        <p:nvSpPr>
+          <p:cNvPr id="19" name="Text 16"/>
+          <p:cNvSpPr/>
+          <p:nvPr/>
+        </p:nvSpPr>
+        <p:spPr>
+          <a:xfrm>
+            <a:off x="4818888" y="2002536"/>
+            <a:ext cx="1600200" cy="274320"/>
+          </a:xfrm>
+          <a:prstGeom prst="rect">
+            <a:avLst/>
+          </a:prstGeom>
+          <a:noFill/>
+          <a:ln/>
+        </p:spPr>
+        <p:txBody>
+          <a:bodyPr wrap="square" lIns="0" tIns="0" rIns="0" bIns="0" rtlCol="0" anchor="ctr"/>
+          <a:lstStyle/>
+          <a:p>
+            <a:pPr indent="0" marL="0">
+              <a:buNone/>
+            </a:pPr>
+            <a:r>
+              <a:rPr lang="en-US" sz="1250" b="1" dirty="0">
+                <a:solidFill>
+                  <a:srgbClr val="FFFFFF"/>
+                </a:solidFill>
+                <a:latin typeface="Georgia" pitchFamily="34" charset="0"/>
+                <a:ea typeface="Georgia" pitchFamily="34" charset="-122"/>
+                <a:cs typeface="Georgia" pitchFamily="34" charset="-120"/>
+              </a:rPr>
+              <a:t>Repackage</a:t>
+            </a:r>
+            <a:endParaRPr lang="en-US" sz="1250" dirty="0"/>
+          </a:p>
+        </p:txBody>
+      </p:sp>
+      <p:sp>
+        <p:nvSpPr>
+          <p:cNvPr id="20" name="Text 17"/>
+          <p:cNvSpPr/>
+          <p:nvPr/>
+        </p:nvSpPr>
+        <p:spPr>
+          <a:xfrm>
+            <a:off x="4818888" y="2286000"/>
+            <a:ext cx="1600200" cy="594360"/>
+          </a:xfrm>
+          <a:prstGeom prst="rect">
+            <a:avLst/>
+          </a:prstGeom>
+          <a:noFill/>
+          <a:ln/>
+        </p:spPr>
+        <p:txBody>
+          <a:bodyPr wrap="square" lIns="0" tIns="0" rIns="0" bIns="0" rtlCol="0" anchor="t"/>
+          <a:lstStyle/>
+          <a:p>
+            <a:pPr indent="0" marL="0">
+              <a:buNone/>
+            </a:pPr>
+            <a:r>
+              <a:rPr lang="en-US" sz="850" dirty="0">
+                <a:solidFill>
+                  <a:srgbClr val="C6D3E4"/>
+                </a:solidFill>
+                <a:latin typeface="Calibri" pitchFamily="34" charset="0"/>
+                <a:ea typeface="Calibri" pitchFamily="34" charset="-122"/>
+                <a:cs typeface="Calibri" pitchFamily="34" charset="-120"/>
+              </a:rPr>
+              <a:t>Bulk stock is broken into the 200g-type pack sizes the market actually buys.</a:t>
+            </a:r>
+            <a:endParaRPr lang="en-US" sz="850" dirty="0"/>
+          </a:p>
+        </p:txBody>
+      </p:sp>
+      <p:sp>
+        <p:nvSpPr>
+          <p:cNvPr id="21" name="Shape 18"/>
+          <p:cNvSpPr/>
+          <p:nvPr/>
+        </p:nvSpPr>
+        <p:spPr>
+          <a:xfrm>
+            <a:off x="6748272" y="1691640"/>
+            <a:ext cx="1929384" cy="1280160"/>
+          </a:xfrm>
+          <a:prstGeom prst="roundRect">
+            <a:avLst>
+              <a:gd name="adj" fmla="val 5714"/>
+            </a:avLst>
+          </a:prstGeom>
+          <a:solidFill>
+            <a:srgbClr val="FFFFFF"/>
+          </a:solidFill>
+          <a:ln w="12700">
+            <a:solidFill>
+              <a:srgbClr val="E2E5EB"/>
+            </a:solidFill>
+            <a:prstDash val="solid"/>
+          </a:ln>
+        </p:spPr>
+      </p:sp>
+      <p:sp>
+        <p:nvSpPr>
+          <p:cNvPr id="22" name="Text 19"/>
+          <p:cNvSpPr/>
+          <p:nvPr/>
+        </p:nvSpPr>
+        <p:spPr>
+          <a:xfrm>
+            <a:off x="6931152" y="1801368"/>
+            <a:ext cx="1600200" cy="201168"/>
+          </a:xfrm>
+          <a:prstGeom prst="rect">
+            <a:avLst/>
+          </a:prstGeom>
+          <a:noFill/>
+          <a:ln/>
+        </p:spPr>
+        <p:txBody>
+          <a:bodyPr wrap="square" lIns="0" tIns="0" rIns="0" bIns="0" rtlCol="0" anchor="ctr"/>
+          <a:lstStyle/>
+          <a:p>
+            <a:pPr indent="0" marL="0">
+              <a:buNone/>
+            </a:pPr>
+            <a:r>
+              <a:rPr lang="en-US" sz="800" b="1" spc="150" kern="0" dirty="0">
+                <a:solidFill>
+                  <a:srgbClr val="5C6779"/>
+                </a:solidFill>
+                <a:latin typeface="Calibri" pitchFamily="34" charset="0"/>
+                <a:ea typeface="Calibri" pitchFamily="34" charset="-122"/>
+                <a:cs typeface="Calibri" pitchFamily="34" charset="-120"/>
+              </a:rPr>
+              <a:t>STEP 4</a:t>
+            </a:r>
+            <a:endParaRPr lang="en-US" sz="800" dirty="0"/>
+          </a:p>
+        </p:txBody>
+      </p:sp>
+      <p:sp>
+        <p:nvSpPr>
+          <p:cNvPr id="23" name="Text 20"/>
+          <p:cNvSpPr/>
+          <p:nvPr/>
+        </p:nvSpPr>
+        <p:spPr>
+          <a:xfrm>
+            <a:off x="6931152" y="2002536"/>
+            <a:ext cx="1600200" cy="274320"/>
+          </a:xfrm>
+          <a:prstGeom prst="rect">
+            <a:avLst/>
+          </a:prstGeom>
+          <a:noFill/>
+          <a:ln/>
+        </p:spPr>
+        <p:txBody>
+          <a:bodyPr wrap="square" lIns="0" tIns="0" rIns="0" bIns="0" rtlCol="0" anchor="ctr"/>
+          <a:lstStyle/>
+          <a:p>
+            <a:pPr indent="0" marL="0">
+              <a:buNone/>
+            </a:pPr>
+            <a:r>
+              <a:rPr lang="en-US" sz="1250" b="1" dirty="0">
+                <a:solidFill>
+                  <a:srgbClr val="1B3A6B"/>
+                </a:solidFill>
+                <a:latin typeface="Georgia" pitchFamily="34" charset="0"/>
+                <a:ea typeface="Georgia" pitchFamily="34" charset="-122"/>
+                <a:cs typeface="Georgia" pitchFamily="34" charset="-120"/>
+              </a:rPr>
+              <a:t>Supply</a:t>
+            </a:r>
+            <a:endParaRPr lang="en-US" sz="1250" dirty="0"/>
+          </a:p>
+        </p:txBody>
+      </p:sp>
+      <p:sp>
+        <p:nvSpPr>
+          <p:cNvPr id="24" name="Text 21"/>
+          <p:cNvSpPr/>
+          <p:nvPr/>
+        </p:nvSpPr>
+        <p:spPr>
+          <a:xfrm>
+            <a:off x="6931152" y="2286000"/>
+            <a:ext cx="1600200" cy="594360"/>
+          </a:xfrm>
+          <a:prstGeom prst="rect">
+            <a:avLst/>
+          </a:prstGeom>
+          <a:noFill/>
+          <a:ln/>
+        </p:spPr>
+        <p:txBody>
+          <a:bodyPr wrap="square" lIns="0" tIns="0" rIns="0" bIns="0" rtlCol="0" anchor="t"/>
+          <a:lstStyle/>
+          <a:p>
+            <a:pPr indent="0" marL="0">
+              <a:buNone/>
+            </a:pPr>
+            <a:r>
+              <a:rPr lang="en-US" sz="850" dirty="0">
+                <a:solidFill>
+                  <a:srgbClr val="5C6779"/>
+                </a:solidFill>
+                <a:latin typeface="Calibri" pitchFamily="34" charset="0"/>
+                <a:ea typeface="Calibri" pitchFamily="34" charset="-122"/>
+                <a:cs typeface="Calibri" pitchFamily="34" charset="-120"/>
+              </a:rPr>
+              <a:t>The retailer sells bulk into the channel as a wholesaler and keeps the volume.</a:t>
+            </a:r>
+            <a:endParaRPr lang="en-US" sz="850" dirty="0"/>
+          </a:p>
+        </p:txBody>
+      </p:sp>
+      <p:sp>
+        <p:nvSpPr>
+          <p:cNvPr id="25" name="Shape 22"/>
+          <p:cNvSpPr/>
+          <p:nvPr/>
+        </p:nvSpPr>
+        <p:spPr>
+          <a:xfrm>
+            <a:off x="411480" y="3108960"/>
+            <a:ext cx="4069080" cy="1463040"/>
+          </a:xfrm>
+          <a:prstGeom prst="roundRect">
+            <a:avLst>
+              <a:gd name="adj" fmla="val 5000"/>
+            </a:avLst>
+          </a:prstGeom>
+          <a:solidFill>
+            <a:srgbClr val="FFFFFF"/>
+          </a:solidFill>
+          <a:ln w="12700">
+            <a:solidFill>
+              <a:srgbClr val="E2E5EB"/>
+            </a:solidFill>
+            <a:prstDash val="solid"/>
+          </a:ln>
+        </p:spPr>
+      </p:sp>
+      <p:sp>
+        <p:nvSpPr>
+          <p:cNvPr id="26" name="Shape 23"/>
+          <p:cNvSpPr/>
+          <p:nvPr/>
+        </p:nvSpPr>
+        <p:spPr>
+          <a:xfrm>
+            <a:off x="640080" y="3291840"/>
+            <a:ext cx="411480" cy="54864"/>
+          </a:xfrm>
+          <a:prstGeom prst="roundRect">
+            <a:avLst>
+              <a:gd name="adj" fmla="val 50000"/>
+            </a:avLst>
+          </a:prstGeom>
+          <a:solidFill>
+            <a:srgbClr val="D0103A"/>
+          </a:solidFill>
+          <a:ln w="12700">
+            <a:solidFill>
+              <a:srgbClr val="D0103A"/>
+            </a:solidFill>
+            <a:prstDash val="solid"/>
+          </a:ln>
+        </p:spPr>
+      </p:sp>
+      <p:sp>
+        <p:nvSpPr>
+          <p:cNvPr id="27" name="Text 24"/>
+          <p:cNvSpPr/>
+          <p:nvPr/>
+        </p:nvSpPr>
+        <p:spPr>
+          <a:xfrm>
+            <a:off x="640080" y="3438144"/>
+            <a:ext cx="3611880" cy="530352"/>
+          </a:xfrm>
+          <a:prstGeom prst="rect">
+            <a:avLst/>
+          </a:prstGeom>
+          <a:noFill/>
+          <a:ln/>
+        </p:spPr>
+        <p:txBody>
+          <a:bodyPr wrap="square" lIns="0" tIns="0" rIns="0" bIns="0" rtlCol="0" anchor="t"/>
+          <a:lstStyle/>
+          <a:p>
+            <a:pPr indent="0" marL="0">
+              <a:buNone/>
+            </a:pPr>
+            <a:r>
+              <a:rPr lang="en-US" sz="1400" b="1" dirty="0">
+                <a:solidFill>
+                  <a:srgbClr val="1B3A6B"/>
+                </a:solidFill>
+                <a:latin typeface="Georgia" pitchFamily="34" charset="0"/>
+                <a:ea typeface="Georgia" pitchFamily="34" charset="-122"/>
+                <a:cs typeface="Georgia" pitchFamily="34" charset="-120"/>
+              </a:rPr>
+              <a:t>Pack size is the unlock</a:t>
+            </a:r>
+            <a:endParaRPr lang="en-US" sz="1400" dirty="0"/>
+          </a:p>
+        </p:txBody>
+      </p:sp>
+      <p:sp>
+        <p:nvSpPr>
+          <p:cNvPr id="28" name="Text 25"/>
+          <p:cNvSpPr/>
+          <p:nvPr/>
+        </p:nvSpPr>
+        <p:spPr>
+          <a:xfrm>
+            <a:off x="640080" y="4005072"/>
+            <a:ext cx="3611880" cy="402336"/>
+          </a:xfrm>
+          <a:prstGeom prst="rect">
+            <a:avLst/>
+          </a:prstGeom>
+          <a:noFill/>
+          <a:ln/>
+        </p:spPr>
+        <p:txBody>
+          <a:bodyPr wrap="square" lIns="0" tIns="0" rIns="0" bIns="0" rtlCol="0" anchor="t"/>
+          <a:lstStyle/>
+          <a:p>
+            <a:pPr indent="0" marL="0">
+              <a:buNone/>
+            </a:pPr>
+            <a:r>
+              <a:rPr lang="en-US" sz="1200" dirty="0">
+                <a:solidFill>
+                  <a:srgbClr val="5C6779"/>
+                </a:solidFill>
+                <a:latin typeface="Calibri" pitchFamily="34" charset="0"/>
+                <a:ea typeface="Calibri" pitchFamily="34" charset="-122"/>
+                <a:cs typeface="Calibri" pitchFamily="34" charset="-120"/>
+              </a:rPr>
+              <a:t>Households buy 200g, not 2kg. The retailer sells bulk to the tuck shop, the tuck shop repackages to the price point the street can afford — the small-multipack playbook proven by packaged brands expanding regionally.</a:t>
+            </a:r>
+            <a:endParaRPr lang="en-US" sz="1200" dirty="0"/>
+          </a:p>
+        </p:txBody>
+      </p:sp>
+      <p:sp>
+        <p:nvSpPr>
+          <p:cNvPr id="29" name="Shape 26"/>
+          <p:cNvSpPr/>
+          <p:nvPr/>
+        </p:nvSpPr>
+        <p:spPr>
+          <a:xfrm>
+            <a:off x="4663440" y="3108960"/>
+            <a:ext cx="4069080" cy="1463040"/>
+          </a:xfrm>
+          <a:prstGeom prst="roundRect">
+            <a:avLst>
+              <a:gd name="adj" fmla="val 5000"/>
+            </a:avLst>
+          </a:prstGeom>
+          <a:solidFill>
+            <a:srgbClr val="FFFFFF"/>
+          </a:solidFill>
+          <a:ln w="12700">
+            <a:solidFill>
+              <a:srgbClr val="E2E5EB"/>
+            </a:solidFill>
+            <a:prstDash val="solid"/>
+          </a:ln>
+        </p:spPr>
+      </p:sp>
+      <p:sp>
+        <p:nvSpPr>
+          <p:cNvPr id="30" name="Shape 27"/>
+          <p:cNvSpPr/>
+          <p:nvPr/>
+        </p:nvSpPr>
+        <p:spPr>
+          <a:xfrm>
+            <a:off x="4892040" y="3291840"/>
+            <a:ext cx="411480" cy="54864"/>
+          </a:xfrm>
+          <a:prstGeom prst="roundRect">
+            <a:avLst>
+              <a:gd name="adj" fmla="val 50000"/>
+            </a:avLst>
+          </a:prstGeom>
+          <a:solidFill>
+            <a:srgbClr val="1B3A6B"/>
+          </a:solidFill>
+          <a:ln w="12700">
+            <a:solidFill>
+              <a:srgbClr val="1B3A6B"/>
+            </a:solidFill>
+            <a:prstDash val="solid"/>
+          </a:ln>
+        </p:spPr>
+      </p:sp>
+      <p:sp>
+        <p:nvSpPr>
+          <p:cNvPr id="31" name="Text 28"/>
+          <p:cNvSpPr/>
+          <p:nvPr/>
+        </p:nvSpPr>
+        <p:spPr>
+          <a:xfrm>
+            <a:off x="4892040" y="3438144"/>
+            <a:ext cx="3611880" cy="530352"/>
+          </a:xfrm>
+          <a:prstGeom prst="rect">
+            <a:avLst/>
+          </a:prstGeom>
+          <a:noFill/>
+          <a:ln/>
+        </p:spPr>
+        <p:txBody>
+          <a:bodyPr wrap="square" lIns="0" tIns="0" rIns="0" bIns="0" rtlCol="0" anchor="t"/>
+          <a:lstStyle/>
+          <a:p>
+            <a:pPr indent="0" marL="0">
+              <a:buNone/>
+            </a:pPr>
+            <a:r>
+              <a:rPr lang="en-US" sz="1400" b="1" dirty="0">
+                <a:solidFill>
+                  <a:srgbClr val="1B3A6B"/>
+                </a:solidFill>
+                <a:latin typeface="Georgia" pitchFamily="34" charset="0"/>
+                <a:ea typeface="Georgia" pitchFamily="34" charset="-122"/>
+                <a:cs typeface="Georgia" pitchFamily="34" charset="-120"/>
+              </a:rPr>
+              <a:t>The government argument</a:t>
+            </a:r>
+            <a:endParaRPr lang="en-US" sz="1400" dirty="0"/>
+          </a:p>
+        </p:txBody>
+      </p:sp>
+      <p:sp>
+        <p:nvSpPr>
+          <p:cNvPr id="32" name="Text 29"/>
+          <p:cNvSpPr/>
+          <p:nvPr/>
+        </p:nvSpPr>
+        <p:spPr>
+          <a:xfrm>
+            <a:off x="4892040" y="4005072"/>
+            <a:ext cx="3611880" cy="402336"/>
+          </a:xfrm>
+          <a:prstGeom prst="rect">
+            <a:avLst/>
+          </a:prstGeom>
+          <a:noFill/>
+          <a:ln/>
+        </p:spPr>
+        <p:txBody>
+          <a:bodyPr wrap="square" lIns="0" tIns="0" rIns="0" bIns="0" rtlCol="0" anchor="t"/>
+          <a:lstStyle/>
+          <a:p>
+            <a:pPr indent="0" marL="0">
+              <a:buNone/>
+            </a:pPr>
+            <a:r>
+              <a:rPr lang="en-US" sz="1200" dirty="0">
+                <a:solidFill>
+                  <a:srgbClr val="5C6779"/>
+                </a:solidFill>
+                <a:latin typeface="Calibri" pitchFamily="34" charset="0"/>
+                <a:ea typeface="Calibri" pitchFamily="34" charset="-122"/>
+                <a:cs typeface="Calibri" pitchFamily="34" charset="-120"/>
+              </a:rPr>
+              <a:t>Routing informal trade through the platform makes it visible: tax is captured, stock is traceable and counterfeit product is squeezed out. Legitimisation, not enforcement.</a:t>
+            </a:r>
+            <a:endParaRPr lang="en-US" sz="1200" dirty="0"/>
+          </a:p>
+        </p:txBody>
+      </p:sp>
+    </p:spTree>
+  </p:cSld>
+  <p:clrMapOvr>
+    <a:masterClrMapping/>
+  </p:clrMapOvr>
+</p:sld>
+</file>
+
+<file path=ppt/slides/slide24.xml><?xml version="1.0" encoding="utf-8"?>
+<p:sld xmlns:a="http://schemas.openxmlformats.org/drawingml/2006/main" xmlns:r="http://schemas.openxmlformats.org/officeDocument/2006/relationships" xmlns:p="http://schemas.openxmlformats.org/presentationml/2006/main">
+  <p:cSld name="Slide 24">
+    <p:bg>
+      <p:bgPr>
+        <a:solidFill>
+          <a:srgbClr val="10243F"/>
+        </a:solidFill>
+      </p:bgPr>
+    </p:bg>
+    <p:spTree>
+      <p:nvGrpSpPr>
+        <p:cNvPr id="1" name=""/>
+        <p:cNvGrpSpPr/>
+        <p:nvPr/>
+      </p:nvGrpSpPr>
+      <p:grpSpPr>
+        <a:xfrm>
+          <a:off x="0" y="0"/>
+          <a:ext cx="0" cy="0"/>
+          <a:chOff x="0" y="0"/>
+          <a:chExt cx="0" cy="0"/>
+        </a:xfrm>
+      </p:grpSpPr>
+      <p:sp>
+        <p:nvSpPr>
+          <p:cNvPr id="2" name="Shape 0"/>
+          <p:cNvSpPr/>
+          <p:nvPr/>
+        </p:nvSpPr>
+        <p:spPr>
+          <a:xfrm>
+            <a:off x="411480" y="274320"/>
+            <a:ext cx="1371600" cy="365760"/>
+          </a:xfrm>
+          <a:prstGeom prst="roundRect">
+            <a:avLst>
+              <a:gd name="adj" fmla="val 15000"/>
+            </a:avLst>
+          </a:prstGeom>
+          <a:solidFill>
+            <a:srgbClr val="FFFFFF"/>
+          </a:solidFill>
+          <a:ln w="12700">
+            <a:solidFill>
+              <a:srgbClr val="FFFFFF"/>
+            </a:solidFill>
+            <a:prstDash val="solid"/>
+          </a:ln>
+        </p:spPr>
+      </p:sp>
+      <p:pic>
+        <p:nvPicPr>
+          <p:cNvPr id="3" name="Image 0" descr="preencoded.png">    </p:cNvPr>
+          <p:cNvPicPr>
+            <a:picLocks noChangeAspect="1"/>
+          </p:cNvPicPr>
+          <p:nvPr/>
+        </p:nvPicPr>
+        <p:blipFill>
+          <a:blip r:embed="rId1"/>
+          <a:stretch>
+            <a:fillRect/>
+          </a:stretch>
+        </p:blipFill>
+        <p:spPr>
+          <a:xfrm>
+            <a:off x="484632" y="338328"/>
+            <a:ext cx="1225296" cy="237744"/>
+          </a:xfrm>
+          <a:prstGeom prst="rect">
+            <a:avLst/>
+          </a:prstGeom>
+        </p:spPr>
+      </p:pic>
+      <p:sp>
+        <p:nvSpPr>
+          <p:cNvPr id="4" name="Text 1"/>
+          <p:cNvSpPr/>
+          <p:nvPr/>
+        </p:nvSpPr>
+        <p:spPr>
+          <a:xfrm>
+            <a:off x="1920240" y="301752"/>
+            <a:ext cx="6263640" cy="320040"/>
+          </a:xfrm>
+          <a:prstGeom prst="rect">
+            <a:avLst/>
+          </a:prstGeom>
+          <a:noFill/>
+          <a:ln/>
+        </p:spPr>
+        <p:txBody>
+          <a:bodyPr wrap="square" rtlCol="0" anchor="ctr"/>
+          <a:lstStyle/>
+          <a:p>
+            <a:pPr indent="0" marL="0">
+              <a:buNone/>
+            </a:pPr>
+            <a:r>
+              <a:rPr lang="en-US" sz="1100" b="1" spc="200" kern="0" dirty="0">
+                <a:solidFill>
+                  <a:srgbClr val="FFFFFF"/>
+                </a:solidFill>
+                <a:latin typeface="Calibri" pitchFamily="34" charset="0"/>
+                <a:ea typeface="Calibri" pitchFamily="34" charset="-122"/>
+                <a:cs typeface="Calibri" pitchFamily="34" charset="-120"/>
+              </a:rPr>
+              <a:t>SLIDE 24 · COMMERCIAL &amp; ENTITY STRUCTURE</a:t>
+            </a:r>
+            <a:endParaRPr lang="en-US" sz="1100" dirty="0"/>
+          </a:p>
+        </p:txBody>
+      </p:sp>
+      <p:sp>
+        <p:nvSpPr>
+          <p:cNvPr id="5" name="Text 2"/>
+          <p:cNvSpPr/>
+          <p:nvPr/>
+        </p:nvSpPr>
+        <p:spPr>
+          <a:xfrm>
+            <a:off x="8229600" y="301752"/>
+            <a:ext cx="502920" cy="320040"/>
+          </a:xfrm>
+          <a:prstGeom prst="rect">
+            <a:avLst/>
+          </a:prstGeom>
+          <a:noFill/>
+          <a:ln/>
+        </p:spPr>
+        <p:txBody>
+          <a:bodyPr wrap="square" rtlCol="0" anchor="ctr"/>
+          <a:lstStyle/>
+          <a:p>
+            <a:pPr algn="r" indent="0" marL="0">
+              <a:buNone/>
+            </a:pPr>
+            <a:r>
+              <a:rPr lang="en-US" sz="1100" b="1" dirty="0">
+                <a:solidFill>
+                  <a:srgbClr val="AAB6C8"/>
+                </a:solidFill>
+                <a:latin typeface="Calibri" pitchFamily="34" charset="0"/>
+                <a:ea typeface="Calibri" pitchFamily="34" charset="-122"/>
+                <a:cs typeface="Calibri" pitchFamily="34" charset="-120"/>
+              </a:rPr>
+              <a:t>25</a:t>
+            </a:r>
+            <a:endParaRPr lang="en-US" sz="1100" dirty="0"/>
+          </a:p>
+        </p:txBody>
+      </p:sp>
+      <p:sp>
+        <p:nvSpPr>
+          <p:cNvPr id="6" name="Text 3"/>
+          <p:cNvSpPr/>
+          <p:nvPr/>
+        </p:nvSpPr>
+        <p:spPr>
+          <a:xfrm>
+            <a:off x="411480" y="4686300"/>
+            <a:ext cx="4572000" cy="274320"/>
+          </a:xfrm>
+          <a:prstGeom prst="rect">
+            <a:avLst/>
+          </a:prstGeom>
+          <a:noFill/>
+          <a:ln/>
+        </p:spPr>
+        <p:txBody>
+          <a:bodyPr wrap="square" rtlCol="0" anchor="ctr"/>
+          <a:lstStyle/>
+          <a:p>
+            <a:pPr indent="0" marL="0">
+              <a:buNone/>
+            </a:pPr>
+            <a:r>
+              <a:rPr lang="en-US" sz="900" dirty="0">
+                <a:solidFill>
+                  <a:srgbClr val="8C9BB0"/>
+                </a:solidFill>
+                <a:latin typeface="Calibri" pitchFamily="34" charset="0"/>
+                <a:ea typeface="Calibri" pitchFamily="34" charset="-122"/>
+                <a:cs typeface="Calibri" pitchFamily="34" charset="-120"/>
+              </a:rPr>
+              <a:t>TM Pick n Pay Express — Diaspora-to-Door</a:t>
+            </a:r>
+            <a:endParaRPr lang="en-US" sz="900" dirty="0"/>
+          </a:p>
+        </p:txBody>
+      </p:sp>
+      <p:sp>
+        <p:nvSpPr>
+          <p:cNvPr id="7" name="Text 4"/>
+          <p:cNvSpPr/>
+          <p:nvPr/>
+        </p:nvSpPr>
+        <p:spPr>
+          <a:xfrm>
+            <a:off x="4160520" y="4686300"/>
+            <a:ext cx="4572000" cy="274320"/>
+          </a:xfrm>
+          <a:prstGeom prst="rect">
+            <a:avLst/>
+          </a:prstGeom>
+          <a:noFill/>
+          <a:ln/>
+        </p:spPr>
+        <p:txBody>
+          <a:bodyPr wrap="square" rtlCol="0" anchor="ctr"/>
+          <a:lstStyle/>
+          <a:p>
+            <a:pPr algn="r" indent="0" marL="0">
+              <a:buNone/>
+            </a:pPr>
+            <a:r>
+              <a:rPr lang="en-US" sz="900" dirty="0">
+                <a:solidFill>
+                  <a:srgbClr val="8C9BB0"/>
+                </a:solidFill>
+                <a:latin typeface="Calibri" pitchFamily="34" charset="0"/>
+                <a:ea typeface="Calibri" pitchFamily="34" charset="-122"/>
+                <a:cs typeface="Calibri" pitchFamily="34" charset="-120"/>
+              </a:rPr>
+              <a:t>Confidential · Executive Board Proposal</a:t>
+            </a:r>
+            <a:endParaRPr lang="en-US" sz="900" dirty="0"/>
+          </a:p>
+        </p:txBody>
+      </p:sp>
+      <p:sp>
+        <p:nvSpPr>
+          <p:cNvPr id="8" name="Text 5"/>
+          <p:cNvSpPr/>
+          <p:nvPr/>
+        </p:nvSpPr>
+        <p:spPr>
+          <a:xfrm>
+            <a:off x="411480" y="868680"/>
+            <a:ext cx="8321040" cy="731520"/>
+          </a:xfrm>
+          <a:prstGeom prst="rect">
+            <a:avLst/>
+          </a:prstGeom>
+          <a:noFill/>
+          <a:ln/>
+        </p:spPr>
+        <p:txBody>
+          <a:bodyPr wrap="square" rtlCol="0" anchor="ctr"/>
+          <a:lstStyle/>
+          <a:p>
+            <a:pPr indent="0" marL="0">
+              <a:buNone/>
+            </a:pPr>
+            <a:r>
+              <a:rPr lang="en-US" sz="3000" b="1" dirty="0">
+                <a:solidFill>
+                  <a:srgbClr val="FFFFFF"/>
+                </a:solidFill>
+                <a:latin typeface="Georgia" pitchFamily="34" charset="0"/>
+                <a:ea typeface="Georgia" pitchFamily="34" charset="-122"/>
+                <a:cs typeface="Georgia" pitchFamily="34" charset="-120"/>
+              </a:rPr>
+              <a:t>Hybrid commercial model, two-country structure</a:t>
+            </a:r>
+            <a:endParaRPr lang="en-US" sz="3000" dirty="0"/>
+          </a:p>
+        </p:txBody>
+      </p:sp>
+      <p:sp>
+        <p:nvSpPr>
+          <p:cNvPr id="9" name="Shape 6"/>
+          <p:cNvSpPr/>
+          <p:nvPr/>
+        </p:nvSpPr>
+        <p:spPr>
+          <a:xfrm>
+            <a:off x="411480" y="1691640"/>
+            <a:ext cx="2651760" cy="1143000"/>
+          </a:xfrm>
+          <a:prstGeom prst="roundRect">
+            <a:avLst>
+              <a:gd name="adj" fmla="val 6400"/>
+            </a:avLst>
+          </a:prstGeom>
+          <a:solidFill>
+            <a:srgbClr val="1E426F"/>
+          </a:solidFill>
+          <a:ln w="12700">
+            <a:solidFill>
+              <a:srgbClr val="1E426F"/>
+            </a:solidFill>
+            <a:prstDash val="solid"/>
+          </a:ln>
+        </p:spPr>
+      </p:sp>
+      <p:sp>
+        <p:nvSpPr>
+          <p:cNvPr id="10" name="Text 7"/>
+          <p:cNvSpPr/>
+          <p:nvPr/>
+        </p:nvSpPr>
+        <p:spPr>
+          <a:xfrm>
+            <a:off x="612648" y="1856232"/>
+            <a:ext cx="2249424" cy="384048"/>
+          </a:xfrm>
+          <a:prstGeom prst="rect">
+            <a:avLst/>
+          </a:prstGeom>
+          <a:noFill/>
+          <a:ln/>
+        </p:spPr>
+        <p:txBody>
+          <a:bodyPr wrap="square" lIns="0" tIns="0" rIns="0" bIns="0" rtlCol="0" anchor="t"/>
+          <a:lstStyle/>
+          <a:p>
+            <a:pPr indent="0" marL="0">
+              <a:buNone/>
+            </a:pPr>
+            <a:r>
+              <a:rPr lang="en-US" sz="1300" b="1" dirty="0">
+                <a:solidFill>
+                  <a:srgbClr val="FFFFFF"/>
+                </a:solidFill>
+                <a:latin typeface="Georgia" pitchFamily="34" charset="0"/>
+                <a:ea typeface="Georgia" pitchFamily="34" charset="-122"/>
+                <a:cs typeface="Georgia" pitchFamily="34" charset="-120"/>
+              </a:rPr>
+              <a:t>White-label</a:t>
+            </a:r>
+            <a:endParaRPr lang="en-US" sz="1300" dirty="0"/>
+          </a:p>
+        </p:txBody>
+      </p:sp>
+      <p:sp>
+        <p:nvSpPr>
+          <p:cNvPr id="11" name="Text 8"/>
+          <p:cNvSpPr/>
+          <p:nvPr/>
+        </p:nvSpPr>
+        <p:spPr>
+          <a:xfrm>
+            <a:off x="612648" y="2258568"/>
+            <a:ext cx="2249424" cy="411480"/>
+          </a:xfrm>
+          <a:prstGeom prst="rect">
+            <a:avLst/>
+          </a:prstGeom>
+          <a:noFill/>
+          <a:ln/>
+        </p:spPr>
+        <p:txBody>
+          <a:bodyPr wrap="square" lIns="0" tIns="0" rIns="0" bIns="0" rtlCol="0" anchor="t"/>
+          <a:lstStyle/>
+          <a:p>
+            <a:pPr indent="0" marL="0">
+              <a:buNone/>
+            </a:pPr>
+            <a:r>
+              <a:rPr lang="en-US" sz="1000" dirty="0">
+                <a:solidFill>
+                  <a:srgbClr val="D5DEEA"/>
+                </a:solidFill>
+                <a:latin typeface="Calibri" pitchFamily="34" charset="0"/>
+                <a:ea typeface="Calibri" pitchFamily="34" charset="-122"/>
+                <a:cs typeface="Calibri" pitchFamily="34" charset="-120"/>
+              </a:rPr>
+              <a:t>The storefront and app ship under the retailer's brand, licensed rather than sold.</a:t>
+            </a:r>
+            <a:endParaRPr lang="en-US" sz="1000" dirty="0"/>
+          </a:p>
+        </p:txBody>
+      </p:sp>
+      <p:sp>
+        <p:nvSpPr>
+          <p:cNvPr id="12" name="Shape 9"/>
+          <p:cNvSpPr/>
+          <p:nvPr/>
+        </p:nvSpPr>
+        <p:spPr>
+          <a:xfrm>
+            <a:off x="3246120" y="1691640"/>
+            <a:ext cx="2651760" cy="1143000"/>
+          </a:xfrm>
+          <a:prstGeom prst="roundRect">
+            <a:avLst>
+              <a:gd name="adj" fmla="val 6400"/>
+            </a:avLst>
+          </a:prstGeom>
+          <a:solidFill>
+            <a:srgbClr val="1E426F"/>
+          </a:solidFill>
+          <a:ln w="12700">
+            <a:solidFill>
+              <a:srgbClr val="1E426F"/>
+            </a:solidFill>
+            <a:prstDash val="solid"/>
+          </a:ln>
+        </p:spPr>
+      </p:sp>
+      <p:sp>
+        <p:nvSpPr>
+          <p:cNvPr id="13" name="Text 10"/>
+          <p:cNvSpPr/>
+          <p:nvPr/>
+        </p:nvSpPr>
+        <p:spPr>
+          <a:xfrm>
+            <a:off x="3447288" y="1856232"/>
+            <a:ext cx="2249424" cy="384048"/>
+          </a:xfrm>
+          <a:prstGeom prst="rect">
+            <a:avLst/>
+          </a:prstGeom>
+          <a:noFill/>
+          <a:ln/>
+        </p:spPr>
+        <p:txBody>
+          <a:bodyPr wrap="square" lIns="0" tIns="0" rIns="0" bIns="0" rtlCol="0" anchor="t"/>
+          <a:lstStyle/>
+          <a:p>
+            <a:pPr indent="0" marL="0">
+              <a:buNone/>
+            </a:pPr>
+            <a:r>
+              <a:rPr lang="en-US" sz="1300" b="1" dirty="0">
+                <a:solidFill>
+                  <a:srgbClr val="FFFFFF"/>
+                </a:solidFill>
+                <a:latin typeface="Georgia" pitchFamily="34" charset="0"/>
+                <a:ea typeface="Georgia" pitchFamily="34" charset="-122"/>
+                <a:cs typeface="Georgia" pitchFamily="34" charset="-120"/>
+              </a:rPr>
+              <a:t>Subscription</a:t>
+            </a:r>
+            <a:endParaRPr lang="en-US" sz="1300" dirty="0"/>
+          </a:p>
+        </p:txBody>
+      </p:sp>
+      <p:sp>
+        <p:nvSpPr>
+          <p:cNvPr id="14" name="Text 11"/>
+          <p:cNvSpPr/>
+          <p:nvPr/>
+        </p:nvSpPr>
+        <p:spPr>
+          <a:xfrm>
+            <a:off x="3447288" y="2258568"/>
+            <a:ext cx="2249424" cy="411480"/>
+          </a:xfrm>
+          <a:prstGeom prst="rect">
+            <a:avLst/>
+          </a:prstGeom>
+          <a:noFill/>
+          <a:ln/>
+        </p:spPr>
+        <p:txBody>
+          <a:bodyPr wrap="square" lIns="0" tIns="0" rIns="0" bIns="0" rtlCol="0" anchor="t"/>
+          <a:lstStyle/>
+          <a:p>
+            <a:pPr indent="0" marL="0">
+              <a:buNone/>
+            </a:pPr>
+            <a:r>
+              <a:rPr lang="en-US" sz="1000" dirty="0">
+                <a:solidFill>
+                  <a:srgbClr val="D5DEEA"/>
+                </a:solidFill>
+                <a:latin typeface="Calibri" pitchFamily="34" charset="0"/>
+                <a:ea typeface="Calibri" pitchFamily="34" charset="-122"/>
+                <a:cs typeface="Calibri" pitchFamily="34" charset="-120"/>
+              </a:rPr>
+              <a:t>Tiered monthly platform fees per tenant, opening at a 100,000-participant tier.</a:t>
+            </a:r>
+            <a:endParaRPr lang="en-US" sz="1000" dirty="0"/>
+          </a:p>
+        </p:txBody>
+      </p:sp>
+      <p:sp>
+        <p:nvSpPr>
+          <p:cNvPr id="15" name="Shape 12"/>
+          <p:cNvSpPr/>
+          <p:nvPr/>
+        </p:nvSpPr>
+        <p:spPr>
+          <a:xfrm>
+            <a:off x="6080760" y="1691640"/>
+            <a:ext cx="2651760" cy="1143000"/>
+          </a:xfrm>
+          <a:prstGeom prst="roundRect">
+            <a:avLst>
+              <a:gd name="adj" fmla="val 6400"/>
+            </a:avLst>
+          </a:prstGeom>
+          <a:solidFill>
+            <a:srgbClr val="1E426F"/>
+          </a:solidFill>
+          <a:ln w="12700">
+            <a:solidFill>
+              <a:srgbClr val="1E426F"/>
+            </a:solidFill>
+            <a:prstDash val="solid"/>
+          </a:ln>
+        </p:spPr>
+      </p:sp>
+      <p:sp>
+        <p:nvSpPr>
+          <p:cNvPr id="16" name="Text 13"/>
+          <p:cNvSpPr/>
+          <p:nvPr/>
+        </p:nvSpPr>
+        <p:spPr>
+          <a:xfrm>
+            <a:off x="6281928" y="1856232"/>
+            <a:ext cx="2249424" cy="384048"/>
+          </a:xfrm>
+          <a:prstGeom prst="rect">
+            <a:avLst/>
+          </a:prstGeom>
+          <a:noFill/>
+          <a:ln/>
+        </p:spPr>
+        <p:txBody>
+          <a:bodyPr wrap="square" lIns="0" tIns="0" rIns="0" bIns="0" rtlCol="0" anchor="t"/>
+          <a:lstStyle/>
+          <a:p>
+            <a:pPr indent="0" marL="0">
+              <a:buNone/>
+            </a:pPr>
+            <a:r>
+              <a:rPr lang="en-US" sz="1300" b="1" dirty="0">
+                <a:solidFill>
+                  <a:srgbClr val="FFFFFF"/>
+                </a:solidFill>
+                <a:latin typeface="Georgia" pitchFamily="34" charset="0"/>
+                <a:ea typeface="Georgia" pitchFamily="34" charset="-122"/>
+                <a:cs typeface="Georgia" pitchFamily="34" charset="-120"/>
+              </a:rPr>
+              <a:t>Commission</a:t>
+            </a:r>
+            <a:endParaRPr lang="en-US" sz="1300" dirty="0"/>
+          </a:p>
+        </p:txBody>
+      </p:sp>
+      <p:sp>
+        <p:nvSpPr>
+          <p:cNvPr id="17" name="Text 14"/>
+          <p:cNvSpPr/>
+          <p:nvPr/>
+        </p:nvSpPr>
+        <p:spPr>
+          <a:xfrm>
+            <a:off x="6281928" y="2258568"/>
+            <a:ext cx="2249424" cy="411480"/>
+          </a:xfrm>
+          <a:prstGeom prst="rect">
+            <a:avLst/>
+          </a:prstGeom>
+          <a:noFill/>
+          <a:ln/>
+        </p:spPr>
+        <p:txBody>
+          <a:bodyPr wrap="square" lIns="0" tIns="0" rIns="0" bIns="0" rtlCol="0" anchor="t"/>
+          <a:lstStyle/>
+          <a:p>
+            <a:pPr indent="0" marL="0">
+              <a:buNone/>
+            </a:pPr>
+            <a:r>
+              <a:rPr lang="en-US" sz="1000" dirty="0">
+                <a:solidFill>
+                  <a:srgbClr val="D5DEEA"/>
+                </a:solidFill>
+                <a:latin typeface="Calibri" pitchFamily="34" charset="0"/>
+                <a:ea typeface="Calibri" pitchFamily="34" charset="-122"/>
+                <a:cs typeface="Calibri" pitchFamily="34" charset="-120"/>
+              </a:rPr>
+              <a:t>A thin transaction share on GMV, sitting on top of the recurring base.</a:t>
+            </a:r>
+            <a:endParaRPr lang="en-US" sz="1000" dirty="0"/>
+          </a:p>
+        </p:txBody>
+      </p:sp>
+      <p:sp>
+        <p:nvSpPr>
+          <p:cNvPr id="18" name="Shape 15"/>
+          <p:cNvSpPr/>
+          <p:nvPr/>
+        </p:nvSpPr>
+        <p:spPr>
+          <a:xfrm>
+            <a:off x="411480" y="2971800"/>
+            <a:ext cx="4069080" cy="1188720"/>
+          </a:xfrm>
+          <a:prstGeom prst="roundRect">
+            <a:avLst>
+              <a:gd name="adj" fmla="val 6154"/>
+            </a:avLst>
+          </a:prstGeom>
+          <a:solidFill>
+            <a:srgbClr val="1E426F"/>
+          </a:solidFill>
+          <a:ln w="12700">
+            <a:solidFill>
+              <a:srgbClr val="1E426F"/>
+            </a:solidFill>
+            <a:prstDash val="solid"/>
+          </a:ln>
+        </p:spPr>
+      </p:sp>
+      <p:sp>
+        <p:nvSpPr>
+          <p:cNvPr id="19" name="Text 16"/>
+          <p:cNvSpPr/>
+          <p:nvPr/>
+        </p:nvSpPr>
+        <p:spPr>
+          <a:xfrm>
+            <a:off x="612648" y="3136392"/>
+            <a:ext cx="3666744" cy="384048"/>
+          </a:xfrm>
+          <a:prstGeom prst="rect">
+            <a:avLst/>
+          </a:prstGeom>
+          <a:noFill/>
+          <a:ln/>
+        </p:spPr>
+        <p:txBody>
+          <a:bodyPr wrap="square" lIns="0" tIns="0" rIns="0" bIns="0" rtlCol="0" anchor="t"/>
+          <a:lstStyle/>
+          <a:p>
+            <a:pPr indent="0" marL="0">
+              <a:buNone/>
+            </a:pPr>
+            <a:r>
+              <a:rPr lang="en-US" sz="1300" b="1" dirty="0">
+                <a:solidFill>
+                  <a:srgbClr val="FFFFFF"/>
+                </a:solidFill>
+                <a:latin typeface="Georgia" pitchFamily="34" charset="0"/>
+                <a:ea typeface="Georgia" pitchFamily="34" charset="-122"/>
+                <a:cs typeface="Georgia" pitchFamily="34" charset="-120"/>
+              </a:rPr>
+              <a:t>South African company</a:t>
+            </a:r>
+            <a:endParaRPr lang="en-US" sz="1300" dirty="0"/>
+          </a:p>
+        </p:txBody>
+      </p:sp>
+      <p:sp>
+        <p:nvSpPr>
+          <p:cNvPr id="20" name="Text 17"/>
+          <p:cNvSpPr/>
+          <p:nvPr/>
+        </p:nvSpPr>
+        <p:spPr>
+          <a:xfrm>
+            <a:off x="612648" y="3538728"/>
+            <a:ext cx="3666744" cy="457200"/>
+          </a:xfrm>
+          <a:prstGeom prst="rect">
+            <a:avLst/>
+          </a:prstGeom>
+          <a:noFill/>
+          <a:ln/>
+        </p:spPr>
+        <p:txBody>
+          <a:bodyPr wrap="square" lIns="0" tIns="0" rIns="0" bIns="0" rtlCol="0" anchor="t"/>
+          <a:lstStyle/>
+          <a:p>
+            <a:pPr indent="0" marL="0">
+              <a:buNone/>
+            </a:pPr>
+            <a:r>
+              <a:rPr lang="en-US" sz="1000" dirty="0">
+                <a:solidFill>
+                  <a:srgbClr val="D5DEEA"/>
+                </a:solidFill>
+                <a:latin typeface="Calibri" pitchFamily="34" charset="0"/>
+                <a:ea typeface="Calibri" pitchFamily="34" charset="-122"/>
+                <a:cs typeface="Calibri" pitchFamily="34" charset="-120"/>
+              </a:rPr>
+              <a:t>Holds the platform IP and raises capital where liquidity and investor access are deepest. Contracts with tenants and banks sit here.</a:t>
+            </a:r>
+            <a:endParaRPr lang="en-US" sz="1000" dirty="0"/>
+          </a:p>
+        </p:txBody>
+      </p:sp>
+      <p:sp>
+        <p:nvSpPr>
+          <p:cNvPr id="21" name="Shape 18"/>
+          <p:cNvSpPr/>
+          <p:nvPr/>
+        </p:nvSpPr>
+        <p:spPr>
+          <a:xfrm>
+            <a:off x="4663440" y="2971800"/>
+            <a:ext cx="4069080" cy="1188720"/>
+          </a:xfrm>
+          <a:prstGeom prst="roundRect">
+            <a:avLst>
+              <a:gd name="adj" fmla="val 6154"/>
+            </a:avLst>
+          </a:prstGeom>
+          <a:solidFill>
+            <a:srgbClr val="1E426F"/>
+          </a:solidFill>
+          <a:ln w="12700">
+            <a:solidFill>
+              <a:srgbClr val="1E426F"/>
+            </a:solidFill>
+            <a:prstDash val="solid"/>
+          </a:ln>
+        </p:spPr>
+      </p:sp>
+      <p:sp>
+        <p:nvSpPr>
+          <p:cNvPr id="22" name="Text 19"/>
+          <p:cNvSpPr/>
+          <p:nvPr/>
+        </p:nvSpPr>
+        <p:spPr>
+          <a:xfrm>
+            <a:off x="4864608" y="3136392"/>
+            <a:ext cx="3666744" cy="384048"/>
+          </a:xfrm>
+          <a:prstGeom prst="rect">
+            <a:avLst/>
+          </a:prstGeom>
+          <a:noFill/>
+          <a:ln/>
+        </p:spPr>
+        <p:txBody>
+          <a:bodyPr wrap="square" lIns="0" tIns="0" rIns="0" bIns="0" rtlCol="0" anchor="t"/>
+          <a:lstStyle/>
+          <a:p>
+            <a:pPr indent="0" marL="0">
+              <a:buNone/>
+            </a:pPr>
+            <a:r>
+              <a:rPr lang="en-US" sz="1300" b="1" dirty="0">
+                <a:solidFill>
+                  <a:srgbClr val="FFFFFF"/>
+                </a:solidFill>
+                <a:latin typeface="Georgia" pitchFamily="34" charset="0"/>
+                <a:ea typeface="Georgia" pitchFamily="34" charset="-122"/>
+                <a:cs typeface="Georgia" pitchFamily="34" charset="-120"/>
+              </a:rPr>
+              <a:t>Zimbabwean subsidiary</a:t>
+            </a:r>
+            <a:endParaRPr lang="en-US" sz="1300" dirty="0"/>
+          </a:p>
+        </p:txBody>
+      </p:sp>
+      <p:sp>
+        <p:nvSpPr>
+          <p:cNvPr id="23" name="Text 20"/>
+          <p:cNvSpPr/>
+          <p:nvPr/>
+        </p:nvSpPr>
+        <p:spPr>
+          <a:xfrm>
+            <a:off x="4864608" y="3538728"/>
+            <a:ext cx="3666744" cy="457200"/>
+          </a:xfrm>
+          <a:prstGeom prst="rect">
+            <a:avLst/>
+          </a:prstGeom>
+          <a:noFill/>
+          <a:ln/>
+        </p:spPr>
+        <p:txBody>
+          <a:bodyPr wrap="square" lIns="0" tIns="0" rIns="0" bIns="0" rtlCol="0" anchor="t"/>
+          <a:lstStyle/>
+          <a:p>
+            <a:pPr indent="0" marL="0">
+              <a:buNone/>
+            </a:pPr>
+            <a:r>
+              <a:rPr lang="en-US" sz="1000" dirty="0">
+                <a:solidFill>
+                  <a:srgbClr val="D5DEEA"/>
+                </a:solidFill>
+                <a:latin typeface="Calibri" pitchFamily="34" charset="0"/>
+                <a:ea typeface="Calibri" pitchFamily="34" charset="-122"/>
+                <a:cs typeface="Calibri" pitchFamily="34" charset="-120"/>
+              </a:rPr>
+              <a:t>Runs logistics, the scooter fleet and local agreements on the ground, with local employment and local regulatory standing.</a:t>
+            </a:r>
+            <a:endParaRPr lang="en-US" sz="1000" dirty="0"/>
+          </a:p>
+        </p:txBody>
+      </p:sp>
+      <p:sp>
+        <p:nvSpPr>
+          <p:cNvPr id="24" name="Text 21"/>
+          <p:cNvSpPr/>
+          <p:nvPr/>
+        </p:nvSpPr>
+        <p:spPr>
+          <a:xfrm>
+            <a:off x="411480" y="4279392"/>
+            <a:ext cx="8321040" cy="292608"/>
+          </a:xfrm>
+          <a:prstGeom prst="rect">
+            <a:avLst/>
+          </a:prstGeom>
+          <a:noFill/>
+          <a:ln/>
+        </p:spPr>
+        <p:txBody>
+          <a:bodyPr wrap="square" lIns="0" tIns="0" rIns="0" bIns="0" rtlCol="0" anchor="ctr"/>
+          <a:lstStyle/>
+          <a:p>
+            <a:pPr indent="0" marL="0">
+              <a:buNone/>
+            </a:pPr>
+            <a:r>
+              <a:rPr lang="en-US" sz="950" dirty="0">
+                <a:solidFill>
+                  <a:srgbClr val="8C9BB0"/>
+                </a:solidFill>
+                <a:latin typeface="Calibri" pitchFamily="34" charset="0"/>
+                <a:ea typeface="Calibri" pitchFamily="34" charset="-122"/>
+                <a:cs typeface="Calibri" pitchFamily="34" charset="-120"/>
+              </a:rPr>
+              <a:t>Directional as at 13 August — structure to be confirmed with tax and legal counsel before any binding term sheet.</a:t>
+            </a:r>
+            <a:endParaRPr lang="en-US" sz="950" dirty="0"/>
+          </a:p>
+        </p:txBody>
+      </p:sp>
+    </p:spTree>
+  </p:cSld>
+  <p:clrMapOvr>
+    <a:masterClrMapping/>
+  </p:clrMapOvr>
+</p:sld>
+</file>
+
+<file path=ppt/slides/slide25.xml><?xml version="1.0" encoding="utf-8"?>
+<p:sld xmlns:a="http://schemas.openxmlformats.org/drawingml/2006/main" xmlns:r="http://schemas.openxmlformats.org/officeDocument/2006/relationships" xmlns:p="http://schemas.openxmlformats.org/presentationml/2006/main">
+  <p:cSld name="Slide 25">
     <p:bg>
       <p:bgPr>
         <a:solidFill>

--- a/public/TM-Pick-n-Pay-Express.pptx
+++ b/public/TM-Pick-n-Pay-Express.pptx
@@ -11816,7 +11816,7 @@
                 <a:ea typeface="Georgia" pitchFamily="34" charset="-122"/>
                 <a:cs typeface="Georgia" pitchFamily="34" charset="-120"/>
               </a:rPr>
-              <a:t>One revenue model: the launch stack plus a recurring layer</a:t>
+              <a:t>One revenue model: launch stack plus recurring layer</a:t>
             </a:r>
             <a:endParaRPr lang="en-US" sz="3000" dirty="0"/>
           </a:p>
@@ -12650,7 +12650,7 @@
         </p:nvSpPr>
         <p:spPr>
           <a:xfrm>
-            <a:off x="5669280" y="2121408"/>
+            <a:off x="5669280" y="2103120"/>
             <a:ext cx="2834640" cy="201168"/>
           </a:xfrm>
           <a:prstGeom prst="rect">
@@ -12689,7 +12689,7 @@
         </p:nvSpPr>
         <p:spPr>
           <a:xfrm>
-            <a:off x="5669280" y="2304288"/>
+            <a:off x="5669280" y="2286000"/>
             <a:ext cx="2834640" cy="237744"/>
           </a:xfrm>
           <a:prstGeom prst="rect">
@@ -12728,7 +12728,7 @@
         </p:nvSpPr>
         <p:spPr>
           <a:xfrm>
-            <a:off x="5669280" y="2578608"/>
+            <a:off x="5669280" y="2532888"/>
             <a:ext cx="2834640" cy="201168"/>
           </a:xfrm>
           <a:prstGeom prst="rect">
@@ -12767,7 +12767,7 @@
         </p:nvSpPr>
         <p:spPr>
           <a:xfrm>
-            <a:off x="5669280" y="2761488"/>
+            <a:off x="5669280" y="2715768"/>
             <a:ext cx="2834640" cy="237744"/>
           </a:xfrm>
           <a:prstGeom prst="rect">
@@ -12806,7 +12806,7 @@
         </p:nvSpPr>
         <p:spPr>
           <a:xfrm>
-            <a:off x="5669280" y="3035808"/>
+            <a:off x="5669280" y="2962656"/>
             <a:ext cx="2834640" cy="201168"/>
           </a:xfrm>
           <a:prstGeom prst="rect">
@@ -12845,7 +12845,7 @@
         </p:nvSpPr>
         <p:spPr>
           <a:xfrm>
-            <a:off x="5669280" y="3218688"/>
+            <a:off x="5669280" y="3145536"/>
             <a:ext cx="2834640" cy="237744"/>
           </a:xfrm>
           <a:prstGeom prst="rect">
@@ -12884,7 +12884,7 @@
         </p:nvSpPr>
         <p:spPr>
           <a:xfrm>
-            <a:off x="5669280" y="3493008"/>
+            <a:off x="5669280" y="3392424"/>
             <a:ext cx="2834640" cy="201168"/>
           </a:xfrm>
           <a:prstGeom prst="rect">
@@ -12923,7 +12923,7 @@
         </p:nvSpPr>
         <p:spPr>
           <a:xfrm>
-            <a:off x="5669280" y="3675888"/>
+            <a:off x="5669280" y="3575304"/>
             <a:ext cx="2834640" cy="237744"/>
           </a:xfrm>
           <a:prstGeom prst="rect">
@@ -12962,7 +12962,7 @@
         </p:nvSpPr>
         <p:spPr>
           <a:xfrm>
-            <a:off x="5669280" y="3950208"/>
+            <a:off x="5669280" y="3822192"/>
             <a:ext cx="2834640" cy="201168"/>
           </a:xfrm>
           <a:prstGeom prst="rect">
@@ -13001,7 +13001,7 @@
         </p:nvSpPr>
         <p:spPr>
           <a:xfrm>
-            <a:off x="5669280" y="4133088"/>
+            <a:off x="5669280" y="4005072"/>
             <a:ext cx="2834640" cy="237744"/>
           </a:xfrm>
           <a:prstGeom prst="rect">
@@ -13040,7 +13040,7 @@
         </p:nvSpPr>
         <p:spPr>
           <a:xfrm>
-            <a:off x="5669280" y="4315968"/>
+            <a:off x="5669280" y="4279392"/>
             <a:ext cx="2834640" cy="228600"/>
           </a:xfrm>
           <a:prstGeom prst="rect">

--- a/public/TM-Pick-n-Pay-Express.pptx
+++ b/public/TM-Pick-n-Pay-Express.pptx
@@ -11816,7 +11816,7 @@
                 <a:ea typeface="Georgia" pitchFamily="34" charset="-122"/>
                 <a:cs typeface="Georgia" pitchFamily="34" charset="-120"/>
               </a:rPr>
-              <a:t>One revenue model: launch stack plus recurring layer</a:t>
+              <a:t>One consolidated revenue model</a:t>
             </a:r>
             <a:endParaRPr lang="en-US" sz="3000" dirty="0"/>
           </a:p>
@@ -12714,7 +12714,7 @@
                 <a:ea typeface="Calibri" pitchFamily="34" charset="-122"/>
                 <a:cs typeface="Calibri" pitchFamily="34" charset="-120"/>
               </a:rPr>
-              <a:t>Tiered monthly fee per retailer, wholesaler and tuck shop</a:t>
+              <a:t>Tiered monthly fee per retailer and tuck shop</a:t>
             </a:r>
             <a:endParaRPr lang="en-US" sz="850" dirty="0"/>
           </a:p>
